--- a/update_relation_new_blocks.pptx
+++ b/update_relation_new_blocks.pptx
@@ -260,7 +260,7 @@
           <a:p>
             <a:fld id="{490C79C5-3CC8-4373-907F-2E1F47B9C95B}" type="datetimeFigureOut">
               <a:rPr lang="fr-FR" smtClean="0"/>
-              <a:t>04/08/2026</a:t>
+              <a:t>28/08/2026</a:t>
             </a:fld>
             <a:endParaRPr lang="fr-FR"/>
           </a:p>
@@ -458,7 +458,7 @@
           <a:p>
             <a:fld id="{490C79C5-3CC8-4373-907F-2E1F47B9C95B}" type="datetimeFigureOut">
               <a:rPr lang="fr-FR" smtClean="0"/>
-              <a:t>04/08/2026</a:t>
+              <a:t>28/08/2026</a:t>
             </a:fld>
             <a:endParaRPr lang="fr-FR"/>
           </a:p>
@@ -666,7 +666,7 @@
           <a:p>
             <a:fld id="{490C79C5-3CC8-4373-907F-2E1F47B9C95B}" type="datetimeFigureOut">
               <a:rPr lang="fr-FR" smtClean="0"/>
-              <a:t>04/08/2026</a:t>
+              <a:t>28/08/2026</a:t>
             </a:fld>
             <a:endParaRPr lang="fr-FR"/>
           </a:p>
@@ -864,7 +864,7 @@
           <a:p>
             <a:fld id="{490C79C5-3CC8-4373-907F-2E1F47B9C95B}" type="datetimeFigureOut">
               <a:rPr lang="fr-FR" smtClean="0"/>
-              <a:t>04/08/2026</a:t>
+              <a:t>28/08/2026</a:t>
             </a:fld>
             <a:endParaRPr lang="fr-FR"/>
           </a:p>
@@ -1139,7 +1139,7 @@
           <a:p>
             <a:fld id="{490C79C5-3CC8-4373-907F-2E1F47B9C95B}" type="datetimeFigureOut">
               <a:rPr lang="fr-FR" smtClean="0"/>
-              <a:t>04/08/2026</a:t>
+              <a:t>28/08/2026</a:t>
             </a:fld>
             <a:endParaRPr lang="fr-FR"/>
           </a:p>
@@ -1404,7 +1404,7 @@
           <a:p>
             <a:fld id="{490C79C5-3CC8-4373-907F-2E1F47B9C95B}" type="datetimeFigureOut">
               <a:rPr lang="fr-FR" smtClean="0"/>
-              <a:t>04/08/2026</a:t>
+              <a:t>28/08/2026</a:t>
             </a:fld>
             <a:endParaRPr lang="fr-FR"/>
           </a:p>
@@ -1816,7 +1816,7 @@
           <a:p>
             <a:fld id="{490C79C5-3CC8-4373-907F-2E1F47B9C95B}" type="datetimeFigureOut">
               <a:rPr lang="fr-FR" smtClean="0"/>
-              <a:t>04/08/2026</a:t>
+              <a:t>28/08/2026</a:t>
             </a:fld>
             <a:endParaRPr lang="fr-FR"/>
           </a:p>
@@ -1957,7 +1957,7 @@
           <a:p>
             <a:fld id="{490C79C5-3CC8-4373-907F-2E1F47B9C95B}" type="datetimeFigureOut">
               <a:rPr lang="fr-FR" smtClean="0"/>
-              <a:t>04/08/2026</a:t>
+              <a:t>28/08/2026</a:t>
             </a:fld>
             <a:endParaRPr lang="fr-FR"/>
           </a:p>
@@ -2070,7 +2070,7 @@
           <a:p>
             <a:fld id="{490C79C5-3CC8-4373-907F-2E1F47B9C95B}" type="datetimeFigureOut">
               <a:rPr lang="fr-FR" smtClean="0"/>
-              <a:t>04/08/2026</a:t>
+              <a:t>28/08/2026</a:t>
             </a:fld>
             <a:endParaRPr lang="fr-FR"/>
           </a:p>
@@ -2381,7 +2381,7 @@
           <a:p>
             <a:fld id="{490C79C5-3CC8-4373-907F-2E1F47B9C95B}" type="datetimeFigureOut">
               <a:rPr lang="fr-FR" smtClean="0"/>
-              <a:t>04/08/2026</a:t>
+              <a:t>28/08/2026</a:t>
             </a:fld>
             <a:endParaRPr lang="fr-FR"/>
           </a:p>
@@ -2669,7 +2669,7 @@
           <a:p>
             <a:fld id="{490C79C5-3CC8-4373-907F-2E1F47B9C95B}" type="datetimeFigureOut">
               <a:rPr lang="fr-FR" smtClean="0"/>
-              <a:t>04/08/2026</a:t>
+              <a:t>28/08/2026</a:t>
             </a:fld>
             <a:endParaRPr lang="fr-FR"/>
           </a:p>
@@ -2910,7 +2910,7 @@
           <a:p>
             <a:fld id="{490C79C5-3CC8-4373-907F-2E1F47B9C95B}" type="datetimeFigureOut">
               <a:rPr lang="fr-FR" smtClean="0"/>
-              <a:t>04/08/2026</a:t>
+              <a:t>28/08/2026</a:t>
             </a:fld>
             <a:endParaRPr lang="fr-FR"/>
           </a:p>
@@ -5544,10 +5544,10 @@
       </p:grpSpPr>
       <p:grpSp>
         <p:nvGrpSpPr>
-          <p:cNvPr id="100" name="Groupe 99">
+          <p:cNvPr id="180" name="Groupe 179">
             <a:extLst>
               <a:ext uri="{FF2B5EF4-FFF2-40B4-BE49-F238E27FC236}">
-                <a16:creationId xmlns:a16="http://schemas.microsoft.com/office/drawing/2014/main" id="{B87AC518-1796-49AB-93BC-3D713E5720D1}"/>
+                <a16:creationId xmlns:a16="http://schemas.microsoft.com/office/drawing/2014/main" id="{A4714321-91E2-4B70-9162-A9DB16AB5642}"/>
               </a:ext>
             </a:extLst>
           </p:cNvPr>
@@ -5556,1972 +5556,206 @@
         </p:nvGrpSpPr>
         <p:grpSpPr>
           <a:xfrm>
-            <a:off x="66630" y="355310"/>
-            <a:ext cx="10861717" cy="6046670"/>
-            <a:chOff x="66630" y="355310"/>
-            <a:chExt cx="10861717" cy="6046670"/>
+            <a:off x="117446" y="916503"/>
+            <a:ext cx="12074554" cy="5755048"/>
+            <a:chOff x="117446" y="916503"/>
+            <a:chExt cx="12074554" cy="5755048"/>
           </a:xfrm>
         </p:grpSpPr>
-        <p:grpSp>
-          <p:nvGrpSpPr>
-            <p:cNvPr id="3" name="Groupe 2">
+        <p:sp>
+          <p:nvSpPr>
+            <p:cNvPr id="172" name="Rectangle : coins arrondis 171">
               <a:extLst>
                 <a:ext uri="{FF2B5EF4-FFF2-40B4-BE49-F238E27FC236}">
-                  <a16:creationId xmlns:a16="http://schemas.microsoft.com/office/drawing/2014/main" id="{F5C23EA5-E784-4021-A82D-AE7317BAA0EA}"/>
+                  <a16:creationId xmlns:a16="http://schemas.microsoft.com/office/drawing/2014/main" id="{7720046A-E648-4D7F-A833-CCA3272650F1}"/>
                 </a:ext>
               </a:extLst>
             </p:cNvPr>
-            <p:cNvGrpSpPr/>
+            <p:cNvSpPr/>
             <p:nvPr/>
-          </p:nvGrpSpPr>
-          <p:grpSpPr>
+          </p:nvSpPr>
+          <p:spPr>
             <a:xfrm>
-              <a:off x="66630" y="355310"/>
-              <a:ext cx="10861717" cy="5580709"/>
-              <a:chOff x="66630" y="355310"/>
-              <a:chExt cx="10861717" cy="5580709"/>
+              <a:off x="2926476" y="931178"/>
+              <a:ext cx="9265524" cy="5553512"/>
             </a:xfrm>
-          </p:grpSpPr>
-          <p:grpSp>
-            <p:nvGrpSpPr>
-              <p:cNvPr id="39" name="Groupe 38">
-                <a:extLst>
-                  <a:ext uri="{FF2B5EF4-FFF2-40B4-BE49-F238E27FC236}">
-                    <a16:creationId xmlns:a16="http://schemas.microsoft.com/office/drawing/2014/main" id="{5FF32897-D699-4EF8-97BB-81B42CDC2DD0}"/>
-                  </a:ext>
-                </a:extLst>
-              </p:cNvPr>
-              <p:cNvGrpSpPr/>
-              <p:nvPr/>
-            </p:nvGrpSpPr>
-            <p:grpSpPr>
-              <a:xfrm>
-                <a:off x="66630" y="2529846"/>
-                <a:ext cx="2621537" cy="1314694"/>
-                <a:chOff x="231730" y="311793"/>
-                <a:chExt cx="2621537" cy="1314694"/>
-              </a:xfrm>
-            </p:grpSpPr>
-            <p:sp>
-              <p:nvSpPr>
-                <p:cNvPr id="40" name="Rectangle 39">
-                  <a:extLst>
-                    <a:ext uri="{FF2B5EF4-FFF2-40B4-BE49-F238E27FC236}">
-                      <a16:creationId xmlns:a16="http://schemas.microsoft.com/office/drawing/2014/main" id="{248E56DC-04D6-4514-8581-639195D6C8E4}"/>
-                    </a:ext>
-                  </a:extLst>
-                </p:cNvPr>
-                <p:cNvSpPr/>
-                <p:nvPr/>
-              </p:nvSpPr>
-              <p:spPr>
-                <a:xfrm>
-                  <a:off x="1193800" y="745954"/>
-                  <a:ext cx="1659467" cy="880533"/>
-                </a:xfrm>
-                <a:prstGeom prst="rect">
-                  <a:avLst/>
-                </a:prstGeom>
-                <a:solidFill>
-                  <a:srgbClr val="E76BF3"/>
-                </a:solidFill>
-                <a:ln>
-                  <a:solidFill>
-                    <a:schemeClr val="accent1">
-                      <a:lumMod val="75000"/>
-                    </a:schemeClr>
-                  </a:solidFill>
-                </a:ln>
-              </p:spPr>
-              <p:style>
-                <a:lnRef idx="2">
-                  <a:schemeClr val="accent5">
-                    <a:shade val="50000"/>
-                  </a:schemeClr>
-                </a:lnRef>
-                <a:fillRef idx="1">
-                  <a:schemeClr val="accent5"/>
-                </a:fillRef>
-                <a:effectRef idx="0">
-                  <a:schemeClr val="accent5"/>
-                </a:effectRef>
-                <a:fontRef idx="minor">
-                  <a:schemeClr val="lt1"/>
-                </a:fontRef>
-              </p:style>
-              <p:txBody>
-                <a:bodyPr rtlCol="0" anchor="ctr"/>
-                <a:lstStyle/>
-                <a:p>
-                  <a:pPr algn="ctr"/>
-                  <a:r>
-                    <a:rPr lang="fr-FR" sz="3200" dirty="0" err="1"/>
-                    <a:t>Humans</a:t>
-                  </a:r>
-                  <a:endParaRPr lang="fr-FR" sz="3200" dirty="0"/>
-                </a:p>
-              </p:txBody>
-            </p:sp>
-            <p:cxnSp>
-              <p:nvCxnSpPr>
-                <p:cNvPr id="41" name="Connecteur droit avec flèche 40">
-                  <a:extLst>
-                    <a:ext uri="{FF2B5EF4-FFF2-40B4-BE49-F238E27FC236}">
-                      <a16:creationId xmlns:a16="http://schemas.microsoft.com/office/drawing/2014/main" id="{084830E6-54A0-4390-B044-961F5B950BC5}"/>
-                    </a:ext>
-                  </a:extLst>
-                </p:cNvPr>
-                <p:cNvCxnSpPr/>
-                <p:nvPr/>
-              </p:nvCxnSpPr>
-              <p:spPr>
-                <a:xfrm>
-                  <a:off x="1016000" y="745067"/>
-                  <a:ext cx="0" cy="821266"/>
-                </a:xfrm>
-                <a:prstGeom prst="straightConnector1">
-                  <a:avLst/>
-                </a:prstGeom>
-                <a:ln>
-                  <a:headEnd type="triangle"/>
-                  <a:tailEnd type="triangle"/>
-                </a:ln>
-              </p:spPr>
-              <p:style>
-                <a:lnRef idx="1">
-                  <a:schemeClr val="accent1"/>
-                </a:lnRef>
-                <a:fillRef idx="0">
-                  <a:schemeClr val="accent1"/>
-                </a:fillRef>
-                <a:effectRef idx="0">
-                  <a:schemeClr val="accent1"/>
-                </a:effectRef>
-                <a:fontRef idx="minor">
-                  <a:schemeClr val="tx1"/>
-                </a:fontRef>
-              </p:style>
-            </p:cxnSp>
-            <p:sp>
-              <p:nvSpPr>
-                <p:cNvPr id="42" name="ZoneTexte 41">
-                  <a:extLst>
-                    <a:ext uri="{FF2B5EF4-FFF2-40B4-BE49-F238E27FC236}">
-                      <a16:creationId xmlns:a16="http://schemas.microsoft.com/office/drawing/2014/main" id="{E2D3ACDF-5E51-48DE-8050-87366971D5AA}"/>
-                    </a:ext>
-                  </a:extLst>
-                </p:cNvPr>
-                <p:cNvSpPr txBox="1"/>
-                <p:nvPr/>
-              </p:nvSpPr>
-              <p:spPr>
-                <a:xfrm>
-                  <a:off x="231730" y="940083"/>
-                  <a:ext cx="791636" cy="523220"/>
-                </a:xfrm>
-                <a:prstGeom prst="rect">
-                  <a:avLst/>
-                </a:prstGeom>
-                <a:noFill/>
-              </p:spPr>
-              <p:txBody>
-                <a:bodyPr wrap="square" rtlCol="0">
-                  <a:spAutoFit/>
-                </a:bodyPr>
-                <a:lstStyle/>
-                <a:p>
-                  <a:pPr algn="ctr"/>
-                  <a:r>
-                    <a:rPr lang="fr-FR" sz="1400" dirty="0">
-                      <a:latin typeface="Arial" panose="020B0604020202020204" pitchFamily="34" charset="0"/>
-                      <a:cs typeface="Arial" panose="020B0604020202020204" pitchFamily="34" charset="0"/>
-                    </a:rPr>
-                    <a:t>12 </a:t>
-                  </a:r>
-                  <a:r>
-                    <a:rPr lang="fr-FR" sz="1400" dirty="0" err="1">
-                      <a:latin typeface="Arial" panose="020B0604020202020204" pitchFamily="34" charset="0"/>
-                      <a:cs typeface="Arial" panose="020B0604020202020204" pitchFamily="34" charset="0"/>
-                    </a:rPr>
-                    <a:t>regions</a:t>
-                  </a:r>
-                  <a:endParaRPr lang="fr-FR" sz="1000" dirty="0">
-                    <a:latin typeface="Arial" panose="020B0604020202020204" pitchFamily="34" charset="0"/>
-                    <a:cs typeface="Arial" panose="020B0604020202020204" pitchFamily="34" charset="0"/>
-                  </a:endParaRPr>
-                </a:p>
-              </p:txBody>
-            </p:sp>
-            <p:cxnSp>
-              <p:nvCxnSpPr>
-                <p:cNvPr id="43" name="Connecteur droit avec flèche 42">
-                  <a:extLst>
-                    <a:ext uri="{FF2B5EF4-FFF2-40B4-BE49-F238E27FC236}">
-                      <a16:creationId xmlns:a16="http://schemas.microsoft.com/office/drawing/2014/main" id="{46455CAF-F801-4643-BB0E-28BC07737614}"/>
-                    </a:ext>
-                  </a:extLst>
-                </p:cNvPr>
-                <p:cNvCxnSpPr>
-                  <a:cxnSpLocks/>
-                </p:cNvCxnSpPr>
-                <p:nvPr/>
-              </p:nvCxnSpPr>
-              <p:spPr>
-                <a:xfrm>
-                  <a:off x="1193800" y="592667"/>
-                  <a:ext cx="1659467" cy="0"/>
-                </a:xfrm>
-                <a:prstGeom prst="straightConnector1">
-                  <a:avLst/>
-                </a:prstGeom>
-                <a:ln>
-                  <a:headEnd type="triangle"/>
-                  <a:tailEnd type="triangle"/>
-                </a:ln>
-              </p:spPr>
-              <p:style>
-                <a:lnRef idx="1">
-                  <a:schemeClr val="accent1"/>
-                </a:lnRef>
-                <a:fillRef idx="0">
-                  <a:schemeClr val="accent1"/>
-                </a:fillRef>
-                <a:effectRef idx="0">
-                  <a:schemeClr val="accent1"/>
-                </a:effectRef>
-                <a:fontRef idx="minor">
-                  <a:schemeClr val="tx1"/>
-                </a:fontRef>
-              </p:style>
-            </p:cxnSp>
-            <p:sp>
-              <p:nvSpPr>
-                <p:cNvPr id="44" name="ZoneTexte 43">
-                  <a:extLst>
-                    <a:ext uri="{FF2B5EF4-FFF2-40B4-BE49-F238E27FC236}">
-                      <a16:creationId xmlns:a16="http://schemas.microsoft.com/office/drawing/2014/main" id="{7669819F-8761-4D86-96A1-CF36AFE272B8}"/>
-                    </a:ext>
-                  </a:extLst>
-                </p:cNvPr>
-                <p:cNvSpPr txBox="1"/>
-                <p:nvPr/>
-              </p:nvSpPr>
-              <p:spPr>
-                <a:xfrm>
-                  <a:off x="1525018" y="311793"/>
-                  <a:ext cx="1143000" cy="307777"/>
-                </a:xfrm>
-                <a:prstGeom prst="rect">
-                  <a:avLst/>
-                </a:prstGeom>
-                <a:noFill/>
-              </p:spPr>
-              <p:txBody>
-                <a:bodyPr wrap="square" rtlCol="0">
-                  <a:spAutoFit/>
-                </a:bodyPr>
-                <a:lstStyle/>
-                <a:p>
-                  <a:r>
-                    <a:rPr lang="fr-FR" sz="900" dirty="0">
-                      <a:latin typeface="Arial" panose="020B0604020202020204" pitchFamily="34" charset="0"/>
-                      <a:cs typeface="Arial" panose="020B0604020202020204" pitchFamily="34" charset="0"/>
-                    </a:rPr>
-                    <a:t> </a:t>
-                  </a:r>
-                  <a:r>
-                    <a:rPr lang="fr-FR" sz="1400" dirty="0">
-                      <a:latin typeface="Arial" panose="020B0604020202020204" pitchFamily="34" charset="0"/>
-                      <a:cs typeface="Arial" panose="020B0604020202020204" pitchFamily="34" charset="0"/>
-                    </a:rPr>
-                    <a:t>2 fPC1</a:t>
-                  </a:r>
-                  <a:endParaRPr lang="fr-FR" sz="900" dirty="0">
-                    <a:latin typeface="Arial" panose="020B0604020202020204" pitchFamily="34" charset="0"/>
-                    <a:cs typeface="Arial" panose="020B0604020202020204" pitchFamily="34" charset="0"/>
-                  </a:endParaRPr>
-                </a:p>
-              </p:txBody>
-            </p:sp>
-          </p:grpSp>
-          <p:grpSp>
-            <p:nvGrpSpPr>
-              <p:cNvPr id="2" name="Groupe 1">
-                <a:extLst>
-                  <a:ext uri="{FF2B5EF4-FFF2-40B4-BE49-F238E27FC236}">
-                    <a16:creationId xmlns:a16="http://schemas.microsoft.com/office/drawing/2014/main" id="{E15AC3C4-F2BD-4AAE-8051-3253D6A9CC25}"/>
-                  </a:ext>
-                </a:extLst>
-              </p:cNvPr>
-              <p:cNvGrpSpPr/>
-              <p:nvPr/>
-            </p:nvGrpSpPr>
-            <p:grpSpPr>
-              <a:xfrm>
-                <a:off x="3198285" y="355310"/>
-                <a:ext cx="7730062" cy="5580709"/>
-                <a:chOff x="3198285" y="355310"/>
-                <a:chExt cx="7730062" cy="5580709"/>
-              </a:xfrm>
-            </p:grpSpPr>
-            <p:grpSp>
-              <p:nvGrpSpPr>
-                <p:cNvPr id="13" name="Groupe 12">
-                  <a:extLst>
-                    <a:ext uri="{FF2B5EF4-FFF2-40B4-BE49-F238E27FC236}">
-                      <a16:creationId xmlns:a16="http://schemas.microsoft.com/office/drawing/2014/main" id="{8FA7A248-7FC3-4B2D-92F7-169FBE8F2955}"/>
-                    </a:ext>
-                  </a:extLst>
-                </p:cNvPr>
-                <p:cNvGrpSpPr/>
-                <p:nvPr/>
-              </p:nvGrpSpPr>
-              <p:grpSpPr>
-                <a:xfrm>
-                  <a:off x="7651747" y="4329002"/>
-                  <a:ext cx="2912026" cy="1333622"/>
-                  <a:chOff x="698499" y="343434"/>
-                  <a:chExt cx="2912026" cy="1333622"/>
-                </a:xfrm>
-              </p:grpSpPr>
-              <p:sp>
-                <p:nvSpPr>
-                  <p:cNvPr id="4" name="Rectangle 3">
-                    <a:extLst>
-                      <a:ext uri="{FF2B5EF4-FFF2-40B4-BE49-F238E27FC236}">
-                        <a16:creationId xmlns:a16="http://schemas.microsoft.com/office/drawing/2014/main" id="{A992EBD8-A7E1-44AD-8244-ED10E8F0F5D1}"/>
-                      </a:ext>
-                    </a:extLst>
-                  </p:cNvPr>
-                  <p:cNvSpPr/>
-                  <p:nvPr/>
-                </p:nvSpPr>
-                <p:spPr>
-                  <a:xfrm>
-                    <a:off x="1642531" y="796523"/>
-                    <a:ext cx="1659467" cy="880533"/>
-                  </a:xfrm>
-                  <a:prstGeom prst="rect">
-                    <a:avLst/>
-                  </a:prstGeom>
-                  <a:solidFill>
-                    <a:srgbClr val="A3A500"/>
-                  </a:solidFill>
-                  <a:ln>
-                    <a:solidFill>
-                      <a:schemeClr val="accent1">
-                        <a:lumMod val="75000"/>
-                      </a:schemeClr>
-                    </a:solidFill>
-                  </a:ln>
-                </p:spPr>
-                <p:style>
-                  <a:lnRef idx="2">
-                    <a:schemeClr val="accent5">
-                      <a:shade val="50000"/>
-                    </a:schemeClr>
-                  </a:lnRef>
-                  <a:fillRef idx="1">
-                    <a:schemeClr val="accent5"/>
-                  </a:fillRef>
-                  <a:effectRef idx="0">
-                    <a:schemeClr val="accent5"/>
-                  </a:effectRef>
-                  <a:fontRef idx="minor">
-                    <a:schemeClr val="lt1"/>
-                  </a:fontRef>
-                </p:style>
-                <p:txBody>
-                  <a:bodyPr rtlCol="0" anchor="ctr"/>
-                  <a:lstStyle/>
-                  <a:p>
-                    <a:pPr algn="ctr"/>
-                    <a:r>
-                      <a:rPr lang="fr-FR" sz="3200" dirty="0"/>
-                      <a:t>AMC</a:t>
-                    </a:r>
-                  </a:p>
-                </p:txBody>
-              </p:sp>
-              <p:cxnSp>
-                <p:nvCxnSpPr>
-                  <p:cNvPr id="6" name="Connecteur droit avec flèche 5">
-                    <a:extLst>
-                      <a:ext uri="{FF2B5EF4-FFF2-40B4-BE49-F238E27FC236}">
-                        <a16:creationId xmlns:a16="http://schemas.microsoft.com/office/drawing/2014/main" id="{1CCE6BEB-83CF-4A23-892E-0D37934134D9}"/>
-                      </a:ext>
-                    </a:extLst>
-                  </p:cNvPr>
-                  <p:cNvCxnSpPr/>
-                  <p:nvPr/>
-                </p:nvCxnSpPr>
-                <p:spPr>
-                  <a:xfrm>
-                    <a:off x="1509181" y="826156"/>
-                    <a:ext cx="0" cy="821266"/>
-                  </a:xfrm>
-                  <a:prstGeom prst="straightConnector1">
-                    <a:avLst/>
-                  </a:prstGeom>
-                  <a:ln>
-                    <a:headEnd type="triangle"/>
-                    <a:tailEnd type="triangle"/>
-                  </a:ln>
-                </p:spPr>
-                <p:style>
-                  <a:lnRef idx="1">
-                    <a:schemeClr val="accent1"/>
-                  </a:lnRef>
-                  <a:fillRef idx="0">
-                    <a:schemeClr val="accent1"/>
-                  </a:fillRef>
-                  <a:effectRef idx="0">
-                    <a:schemeClr val="accent1"/>
-                  </a:effectRef>
-                  <a:fontRef idx="minor">
-                    <a:schemeClr val="tx1"/>
-                  </a:fontRef>
-                </p:style>
-              </p:cxnSp>
-              <p:sp>
-                <p:nvSpPr>
-                  <p:cNvPr id="7" name="ZoneTexte 6">
-                    <a:extLst>
-                      <a:ext uri="{FF2B5EF4-FFF2-40B4-BE49-F238E27FC236}">
-                        <a16:creationId xmlns:a16="http://schemas.microsoft.com/office/drawing/2014/main" id="{EB67AE6F-4EE1-48A0-979B-153EF4E1F202}"/>
-                      </a:ext>
-                    </a:extLst>
-                  </p:cNvPr>
-                  <p:cNvSpPr txBox="1"/>
-                  <p:nvPr/>
-                </p:nvSpPr>
-                <p:spPr>
-                  <a:xfrm>
-                    <a:off x="698499" y="1146338"/>
-                    <a:ext cx="817031" cy="523220"/>
-                  </a:xfrm>
-                  <a:prstGeom prst="rect">
-                    <a:avLst/>
-                  </a:prstGeom>
-                  <a:noFill/>
-                </p:spPr>
-                <p:txBody>
-                  <a:bodyPr wrap="square" rtlCol="0">
-                    <a:spAutoFit/>
-                  </a:bodyPr>
-                  <a:lstStyle/>
-                  <a:p>
-                    <a:pPr algn="ctr"/>
-                    <a:r>
-                      <a:rPr lang="fr-FR" sz="1400" dirty="0">
-                        <a:latin typeface="Arial" panose="020B0604020202020204" pitchFamily="34" charset="0"/>
-                        <a:cs typeface="Arial" panose="020B0604020202020204" pitchFamily="34" charset="0"/>
-                      </a:rPr>
-                      <a:t>12 </a:t>
-                    </a:r>
-                    <a:r>
-                      <a:rPr lang="fr-FR" sz="1400" dirty="0" err="1">
-                        <a:latin typeface="Arial" panose="020B0604020202020204" pitchFamily="34" charset="0"/>
-                        <a:cs typeface="Arial" panose="020B0604020202020204" pitchFamily="34" charset="0"/>
-                      </a:rPr>
-                      <a:t>regions</a:t>
-                    </a:r>
-                    <a:endParaRPr lang="fr-FR" sz="1400" dirty="0">
-                      <a:latin typeface="Arial" panose="020B0604020202020204" pitchFamily="34" charset="0"/>
-                      <a:cs typeface="Arial" panose="020B0604020202020204" pitchFamily="34" charset="0"/>
-                    </a:endParaRPr>
-                  </a:p>
-                </p:txBody>
-              </p:sp>
-              <p:cxnSp>
-                <p:nvCxnSpPr>
-                  <p:cNvPr id="8" name="Connecteur droit avec flèche 7">
-                    <a:extLst>
-                      <a:ext uri="{FF2B5EF4-FFF2-40B4-BE49-F238E27FC236}">
-                        <a16:creationId xmlns:a16="http://schemas.microsoft.com/office/drawing/2014/main" id="{F6841A1E-B5FD-421C-A88D-FBFFC872847E}"/>
-                      </a:ext>
-                    </a:extLst>
-                  </p:cNvPr>
-                  <p:cNvCxnSpPr>
-                    <a:cxnSpLocks/>
-                  </p:cNvCxnSpPr>
-                  <p:nvPr/>
-                </p:nvCxnSpPr>
-                <p:spPr>
-                  <a:xfrm>
-                    <a:off x="1642531" y="639534"/>
-                    <a:ext cx="1659467" cy="0"/>
-                  </a:xfrm>
-                  <a:prstGeom prst="straightConnector1">
-                    <a:avLst/>
-                  </a:prstGeom>
-                  <a:ln>
-                    <a:headEnd type="triangle"/>
-                    <a:tailEnd type="triangle"/>
-                  </a:ln>
-                </p:spPr>
-                <p:style>
-                  <a:lnRef idx="1">
-                    <a:schemeClr val="accent1"/>
-                  </a:lnRef>
-                  <a:fillRef idx="0">
-                    <a:schemeClr val="accent1"/>
-                  </a:fillRef>
-                  <a:effectRef idx="0">
-                    <a:schemeClr val="accent1"/>
-                  </a:effectRef>
-                  <a:fontRef idx="minor">
-                    <a:schemeClr val="tx1"/>
-                  </a:fontRef>
-                </p:style>
-              </p:cxnSp>
-              <p:sp>
-                <p:nvSpPr>
-                  <p:cNvPr id="12" name="ZoneTexte 11">
-                    <a:extLst>
-                      <a:ext uri="{FF2B5EF4-FFF2-40B4-BE49-F238E27FC236}">
-                        <a16:creationId xmlns:a16="http://schemas.microsoft.com/office/drawing/2014/main" id="{5A5AE3FC-E219-4516-97BF-34B08481C6E7}"/>
-                      </a:ext>
-                    </a:extLst>
-                  </p:cNvPr>
-                  <p:cNvSpPr txBox="1"/>
-                  <p:nvPr/>
-                </p:nvSpPr>
-                <p:spPr>
-                  <a:xfrm>
-                    <a:off x="2053673" y="343434"/>
-                    <a:ext cx="1556852" cy="307777"/>
-                  </a:xfrm>
-                  <a:prstGeom prst="rect">
-                    <a:avLst/>
-                  </a:prstGeom>
-                  <a:noFill/>
-                </p:spPr>
-                <p:txBody>
-                  <a:bodyPr wrap="square" rtlCol="0">
-                    <a:spAutoFit/>
-                  </a:bodyPr>
-                  <a:lstStyle/>
-                  <a:p>
-                    <a:r>
-                      <a:rPr lang="fr-FR" sz="1400" dirty="0">
-                        <a:latin typeface="Arial" panose="020B0604020202020204" pitchFamily="34" charset="0"/>
-                        <a:cs typeface="Arial" panose="020B0604020202020204" pitchFamily="34" charset="0"/>
-                      </a:rPr>
-                      <a:t>  2 fPC1</a:t>
-                    </a:r>
-                  </a:p>
-                </p:txBody>
-              </p:sp>
-            </p:grpSp>
-            <p:grpSp>
-              <p:nvGrpSpPr>
-                <p:cNvPr id="14" name="Groupe 13">
-                  <a:extLst>
-                    <a:ext uri="{FF2B5EF4-FFF2-40B4-BE49-F238E27FC236}">
-                      <a16:creationId xmlns:a16="http://schemas.microsoft.com/office/drawing/2014/main" id="{01CD2FC3-B72C-406A-A028-AF99F36A7492}"/>
-                    </a:ext>
-                  </a:extLst>
-                </p:cNvPr>
-                <p:cNvGrpSpPr/>
-                <p:nvPr/>
-              </p:nvGrpSpPr>
-              <p:grpSpPr>
-                <a:xfrm>
-                  <a:off x="3747518" y="355310"/>
-                  <a:ext cx="3057565" cy="1300608"/>
-                  <a:chOff x="246551" y="324992"/>
-                  <a:chExt cx="3057565" cy="1300608"/>
-                </a:xfrm>
-              </p:grpSpPr>
-              <p:sp>
-                <p:nvSpPr>
-                  <p:cNvPr id="15" name="Rectangle 14">
-                    <a:extLst>
-                      <a:ext uri="{FF2B5EF4-FFF2-40B4-BE49-F238E27FC236}">
-                        <a16:creationId xmlns:a16="http://schemas.microsoft.com/office/drawing/2014/main" id="{1A0C2064-6A4C-4691-9C1F-4AF6ECF3E904}"/>
-                      </a:ext>
-                    </a:extLst>
-                  </p:cNvPr>
-                  <p:cNvSpPr/>
-                  <p:nvPr/>
-                </p:nvSpPr>
-                <p:spPr>
-                  <a:xfrm>
-                    <a:off x="1193800" y="745067"/>
-                    <a:ext cx="1659466" cy="880533"/>
-                  </a:xfrm>
-                  <a:prstGeom prst="rect">
-                    <a:avLst/>
-                  </a:prstGeom>
-                  <a:solidFill>
-                    <a:srgbClr val="00B0F6"/>
-                  </a:solidFill>
-                  <a:ln>
-                    <a:solidFill>
-                      <a:schemeClr val="accent1">
-                        <a:lumMod val="75000"/>
-                      </a:schemeClr>
-                    </a:solidFill>
-                  </a:ln>
-                </p:spPr>
-                <p:style>
-                  <a:lnRef idx="2">
-                    <a:schemeClr val="accent5">
-                      <a:shade val="50000"/>
-                    </a:schemeClr>
-                  </a:lnRef>
-                  <a:fillRef idx="1">
-                    <a:schemeClr val="accent5"/>
-                  </a:fillRef>
-                  <a:effectRef idx="0">
-                    <a:schemeClr val="accent5"/>
-                  </a:effectRef>
-                  <a:fontRef idx="minor">
-                    <a:schemeClr val="lt1"/>
-                  </a:fontRef>
-                </p:style>
-                <p:txBody>
-                  <a:bodyPr rtlCol="0" anchor="ctr"/>
-                  <a:lstStyle/>
-                  <a:p>
-                    <a:pPr algn="ctr"/>
-                    <a:r>
-                      <a:rPr lang="fr-FR" sz="3200" dirty="0"/>
-                      <a:t>Animals</a:t>
-                    </a:r>
-                  </a:p>
-                </p:txBody>
-              </p:sp>
-              <p:cxnSp>
-                <p:nvCxnSpPr>
-                  <p:cNvPr id="16" name="Connecteur droit avec flèche 15">
-                    <a:extLst>
-                      <a:ext uri="{FF2B5EF4-FFF2-40B4-BE49-F238E27FC236}">
-                        <a16:creationId xmlns:a16="http://schemas.microsoft.com/office/drawing/2014/main" id="{8DCCD066-A17B-4729-B96B-9B814A7F2EEE}"/>
-                      </a:ext>
-                    </a:extLst>
-                  </p:cNvPr>
-                  <p:cNvCxnSpPr/>
-                  <p:nvPr/>
-                </p:nvCxnSpPr>
-                <p:spPr>
-                  <a:xfrm>
-                    <a:off x="1016000" y="745067"/>
-                    <a:ext cx="0" cy="821266"/>
-                  </a:xfrm>
-                  <a:prstGeom prst="straightConnector1">
-                    <a:avLst/>
-                  </a:prstGeom>
-                  <a:ln>
-                    <a:headEnd type="triangle"/>
-                    <a:tailEnd type="triangle"/>
-                  </a:ln>
-                </p:spPr>
-                <p:style>
-                  <a:lnRef idx="1">
-                    <a:schemeClr val="accent1"/>
-                  </a:lnRef>
-                  <a:fillRef idx="0">
-                    <a:schemeClr val="accent1"/>
-                  </a:fillRef>
-                  <a:effectRef idx="0">
-                    <a:schemeClr val="accent1"/>
-                  </a:effectRef>
-                  <a:fontRef idx="minor">
-                    <a:schemeClr val="tx1"/>
-                  </a:fontRef>
-                </p:style>
-              </p:cxnSp>
-              <p:sp>
-                <p:nvSpPr>
-                  <p:cNvPr id="17" name="ZoneTexte 16">
-                    <a:extLst>
-                      <a:ext uri="{FF2B5EF4-FFF2-40B4-BE49-F238E27FC236}">
-                        <a16:creationId xmlns:a16="http://schemas.microsoft.com/office/drawing/2014/main" id="{DF24B1BC-32B2-4473-8BDF-0E2AC86AA40D}"/>
-                      </a:ext>
-                    </a:extLst>
-                  </p:cNvPr>
-                  <p:cNvSpPr txBox="1"/>
-                  <p:nvPr/>
-                </p:nvSpPr>
-                <p:spPr>
-                  <a:xfrm>
-                    <a:off x="246551" y="974823"/>
-                    <a:ext cx="769449" cy="523220"/>
-                  </a:xfrm>
-                  <a:prstGeom prst="rect">
-                    <a:avLst/>
-                  </a:prstGeom>
-                  <a:noFill/>
-                </p:spPr>
-                <p:txBody>
-                  <a:bodyPr wrap="square" rtlCol="0">
-                    <a:spAutoFit/>
-                  </a:bodyPr>
-                  <a:lstStyle/>
-                  <a:p>
-                    <a:pPr algn="ctr"/>
-                    <a:r>
-                      <a:rPr lang="fr-FR" sz="1400" dirty="0">
-                        <a:latin typeface="Arial" panose="020B0604020202020204" pitchFamily="34" charset="0"/>
-                        <a:cs typeface="Arial" panose="020B0604020202020204" pitchFamily="34" charset="0"/>
-                      </a:rPr>
-                      <a:t>12 </a:t>
-                    </a:r>
-                    <a:r>
-                      <a:rPr lang="fr-FR" sz="1400" dirty="0" err="1">
-                        <a:latin typeface="Arial" panose="020B0604020202020204" pitchFamily="34" charset="0"/>
-                        <a:cs typeface="Arial" panose="020B0604020202020204" pitchFamily="34" charset="0"/>
-                      </a:rPr>
-                      <a:t>regions</a:t>
-                    </a:r>
-                    <a:endParaRPr lang="fr-FR" sz="1400" dirty="0">
-                      <a:latin typeface="Arial" panose="020B0604020202020204" pitchFamily="34" charset="0"/>
-                      <a:cs typeface="Arial" panose="020B0604020202020204" pitchFamily="34" charset="0"/>
-                    </a:endParaRPr>
-                  </a:p>
-                </p:txBody>
-              </p:sp>
-              <p:cxnSp>
-                <p:nvCxnSpPr>
-                  <p:cNvPr id="18" name="Connecteur droit avec flèche 17">
-                    <a:extLst>
-                      <a:ext uri="{FF2B5EF4-FFF2-40B4-BE49-F238E27FC236}">
-                        <a16:creationId xmlns:a16="http://schemas.microsoft.com/office/drawing/2014/main" id="{A9A21EDF-20DA-443C-B3BB-94EE1CBD5D7F}"/>
-                      </a:ext>
-                    </a:extLst>
-                  </p:cNvPr>
-                  <p:cNvCxnSpPr>
-                    <a:cxnSpLocks/>
-                  </p:cNvCxnSpPr>
-                  <p:nvPr/>
-                </p:nvCxnSpPr>
-                <p:spPr>
-                  <a:xfrm>
-                    <a:off x="1193800" y="592667"/>
-                    <a:ext cx="1659467" cy="0"/>
-                  </a:xfrm>
-                  <a:prstGeom prst="straightConnector1">
-                    <a:avLst/>
-                  </a:prstGeom>
-                  <a:ln>
-                    <a:headEnd type="triangle"/>
-                    <a:tailEnd type="triangle"/>
-                  </a:ln>
-                </p:spPr>
-                <p:style>
-                  <a:lnRef idx="1">
-                    <a:schemeClr val="accent1"/>
-                  </a:lnRef>
-                  <a:fillRef idx="0">
-                    <a:schemeClr val="accent1"/>
-                  </a:fillRef>
-                  <a:effectRef idx="0">
-                    <a:schemeClr val="accent1"/>
-                  </a:effectRef>
-                  <a:fontRef idx="minor">
-                    <a:schemeClr val="tx1"/>
-                  </a:fontRef>
-                </p:style>
-              </p:cxnSp>
-              <p:sp>
-                <p:nvSpPr>
-                  <p:cNvPr id="19" name="ZoneTexte 18">
-                    <a:extLst>
-                      <a:ext uri="{FF2B5EF4-FFF2-40B4-BE49-F238E27FC236}">
-                        <a16:creationId xmlns:a16="http://schemas.microsoft.com/office/drawing/2014/main" id="{24F942E7-77C6-41D5-80C5-4A51D8C705B2}"/>
-                      </a:ext>
-                    </a:extLst>
-                  </p:cNvPr>
-                  <p:cNvSpPr txBox="1"/>
-                  <p:nvPr/>
-                </p:nvSpPr>
-                <p:spPr>
-                  <a:xfrm>
-                    <a:off x="1386415" y="324992"/>
-                    <a:ext cx="1917701" cy="307777"/>
-                  </a:xfrm>
-                  <a:prstGeom prst="rect">
-                    <a:avLst/>
-                  </a:prstGeom>
-                  <a:noFill/>
-                </p:spPr>
-                <p:txBody>
-                  <a:bodyPr wrap="square" rtlCol="0">
-                    <a:spAutoFit/>
-                  </a:bodyPr>
-                  <a:lstStyle/>
-                  <a:p>
-                    <a:r>
-                      <a:rPr lang="fr-FR" sz="900" dirty="0">
-                        <a:latin typeface="Arial" panose="020B0604020202020204" pitchFamily="34" charset="0"/>
-                        <a:cs typeface="Arial" panose="020B0604020202020204" pitchFamily="34" charset="0"/>
-                      </a:rPr>
-                      <a:t> </a:t>
-                    </a:r>
-                    <a:r>
-                      <a:rPr lang="fr-FR" sz="1400" dirty="0">
-                        <a:latin typeface="Arial" panose="020B0604020202020204" pitchFamily="34" charset="0"/>
-                        <a:cs typeface="Arial" panose="020B0604020202020204" pitchFamily="34" charset="0"/>
-                      </a:rPr>
-                      <a:t> 4 fPC1</a:t>
-                    </a:r>
-                    <a:endParaRPr lang="fr-FR" sz="900" dirty="0">
-                      <a:latin typeface="Arial" panose="020B0604020202020204" pitchFamily="34" charset="0"/>
-                      <a:cs typeface="Arial" panose="020B0604020202020204" pitchFamily="34" charset="0"/>
-                    </a:endParaRPr>
-                  </a:p>
-                </p:txBody>
-              </p:sp>
-            </p:grpSp>
-            <p:grpSp>
-              <p:nvGrpSpPr>
-                <p:cNvPr id="33" name="Groupe 32">
-                  <a:extLst>
-                    <a:ext uri="{FF2B5EF4-FFF2-40B4-BE49-F238E27FC236}">
-                      <a16:creationId xmlns:a16="http://schemas.microsoft.com/office/drawing/2014/main" id="{B744D23B-2E94-47F7-96A7-4BA7E6FB0089}"/>
-                    </a:ext>
-                  </a:extLst>
-                </p:cNvPr>
-                <p:cNvGrpSpPr/>
-                <p:nvPr/>
-              </p:nvGrpSpPr>
-              <p:grpSpPr>
-                <a:xfrm>
-                  <a:off x="3358602" y="4587922"/>
-                  <a:ext cx="3865579" cy="1348097"/>
-                  <a:chOff x="-231265" y="277503"/>
-                  <a:chExt cx="3865579" cy="1348097"/>
-                </a:xfrm>
-              </p:grpSpPr>
-              <p:sp>
-                <p:nvSpPr>
-                  <p:cNvPr id="34" name="Rectangle 33">
-                    <a:extLst>
-                      <a:ext uri="{FF2B5EF4-FFF2-40B4-BE49-F238E27FC236}">
-                        <a16:creationId xmlns:a16="http://schemas.microsoft.com/office/drawing/2014/main" id="{E7ABEB32-5092-4FCF-BF63-D0B007B38D7B}"/>
-                      </a:ext>
-                    </a:extLst>
-                  </p:cNvPr>
-                  <p:cNvSpPr/>
-                  <p:nvPr/>
-                </p:nvSpPr>
-                <p:spPr>
-                  <a:xfrm>
-                    <a:off x="863600" y="745067"/>
-                    <a:ext cx="2770714" cy="880533"/>
-                  </a:xfrm>
-                  <a:prstGeom prst="rect">
-                    <a:avLst/>
-                  </a:prstGeom>
-                  <a:solidFill>
-                    <a:srgbClr val="00BF7D"/>
-                  </a:solidFill>
-                  <a:ln>
-                    <a:solidFill>
-                      <a:schemeClr val="accent1">
-                        <a:lumMod val="75000"/>
-                      </a:schemeClr>
-                    </a:solidFill>
-                  </a:ln>
-                </p:spPr>
-                <p:style>
-                  <a:lnRef idx="2">
-                    <a:schemeClr val="accent5">
-                      <a:shade val="50000"/>
-                    </a:schemeClr>
-                  </a:lnRef>
-                  <a:fillRef idx="1">
-                    <a:schemeClr val="accent5"/>
-                  </a:fillRef>
-                  <a:effectRef idx="0">
-                    <a:schemeClr val="accent5"/>
-                  </a:effectRef>
-                  <a:fontRef idx="minor">
-                    <a:schemeClr val="lt1"/>
-                  </a:fontRef>
-                </p:style>
-                <p:txBody>
-                  <a:bodyPr rtlCol="0" anchor="ctr"/>
-                  <a:lstStyle/>
-                  <a:p>
-                    <a:pPr algn="ctr"/>
-                    <a:r>
-                      <a:rPr lang="fr-FR" sz="3200" dirty="0"/>
-                      <a:t>Environnement</a:t>
-                    </a:r>
-                  </a:p>
-                </p:txBody>
-              </p:sp>
-              <p:cxnSp>
-                <p:nvCxnSpPr>
-                  <p:cNvPr id="35" name="Connecteur droit avec flèche 34">
-                    <a:extLst>
-                      <a:ext uri="{FF2B5EF4-FFF2-40B4-BE49-F238E27FC236}">
-                        <a16:creationId xmlns:a16="http://schemas.microsoft.com/office/drawing/2014/main" id="{497DCD8A-A1A8-48BB-8426-10C4F231FD9E}"/>
-                      </a:ext>
-                    </a:extLst>
-                  </p:cNvPr>
-                  <p:cNvCxnSpPr/>
-                  <p:nvPr/>
-                </p:nvCxnSpPr>
-                <p:spPr>
-                  <a:xfrm>
-                    <a:off x="635551" y="774700"/>
-                    <a:ext cx="0" cy="821266"/>
-                  </a:xfrm>
-                  <a:prstGeom prst="straightConnector1">
-                    <a:avLst/>
-                  </a:prstGeom>
-                  <a:ln>
-                    <a:headEnd type="triangle"/>
-                    <a:tailEnd type="triangle"/>
-                  </a:ln>
-                </p:spPr>
-                <p:style>
-                  <a:lnRef idx="1">
-                    <a:schemeClr val="accent1"/>
-                  </a:lnRef>
-                  <a:fillRef idx="0">
-                    <a:schemeClr val="accent1"/>
-                  </a:fillRef>
-                  <a:effectRef idx="0">
-                    <a:schemeClr val="accent1"/>
-                  </a:effectRef>
-                  <a:fontRef idx="minor">
-                    <a:schemeClr val="tx1"/>
-                  </a:fontRef>
-                </p:style>
-              </p:cxnSp>
-              <p:sp>
-                <p:nvSpPr>
-                  <p:cNvPr id="36" name="ZoneTexte 35">
-                    <a:extLst>
-                      <a:ext uri="{FF2B5EF4-FFF2-40B4-BE49-F238E27FC236}">
-                        <a16:creationId xmlns:a16="http://schemas.microsoft.com/office/drawing/2014/main" id="{041529AD-512E-41E1-AC44-DD17CB7DDF2F}"/>
-                      </a:ext>
-                    </a:extLst>
-                  </p:cNvPr>
-                  <p:cNvSpPr txBox="1"/>
-                  <p:nvPr/>
-                </p:nvSpPr>
-                <p:spPr>
-                  <a:xfrm>
-                    <a:off x="-231265" y="923723"/>
-                    <a:ext cx="858349" cy="523220"/>
-                  </a:xfrm>
-                  <a:prstGeom prst="rect">
-                    <a:avLst/>
-                  </a:prstGeom>
-                  <a:noFill/>
-                </p:spPr>
-                <p:txBody>
-                  <a:bodyPr wrap="square" rtlCol="0">
-                    <a:spAutoFit/>
-                  </a:bodyPr>
-                  <a:lstStyle/>
-                  <a:p>
-                    <a:pPr algn="ctr"/>
-                    <a:r>
-                      <a:rPr lang="fr-FR" sz="1400" dirty="0">
-                        <a:latin typeface="Arial" panose="020B0604020202020204" pitchFamily="34" charset="0"/>
-                        <a:cs typeface="Arial" panose="020B0604020202020204" pitchFamily="34" charset="0"/>
-                      </a:rPr>
-                      <a:t>12 </a:t>
-                    </a:r>
-                    <a:r>
-                      <a:rPr lang="fr-FR" sz="1400" dirty="0" err="1">
-                        <a:latin typeface="Arial" panose="020B0604020202020204" pitchFamily="34" charset="0"/>
-                        <a:cs typeface="Arial" panose="020B0604020202020204" pitchFamily="34" charset="0"/>
-                      </a:rPr>
-                      <a:t>regions</a:t>
-                    </a:r>
-                    <a:endParaRPr lang="fr-FR" sz="1400" dirty="0">
-                      <a:latin typeface="Arial" panose="020B0604020202020204" pitchFamily="34" charset="0"/>
-                      <a:cs typeface="Arial" panose="020B0604020202020204" pitchFamily="34" charset="0"/>
-                    </a:endParaRPr>
-                  </a:p>
-                </p:txBody>
-              </p:sp>
-              <p:cxnSp>
-                <p:nvCxnSpPr>
-                  <p:cNvPr id="37" name="Connecteur droit avec flèche 36">
-                    <a:extLst>
-                      <a:ext uri="{FF2B5EF4-FFF2-40B4-BE49-F238E27FC236}">
-                        <a16:creationId xmlns:a16="http://schemas.microsoft.com/office/drawing/2014/main" id="{ECA53E8D-6A3F-421D-87CA-AAC798F82B86}"/>
-                      </a:ext>
-                    </a:extLst>
-                  </p:cNvPr>
-                  <p:cNvCxnSpPr>
-                    <a:cxnSpLocks/>
-                  </p:cNvCxnSpPr>
-                  <p:nvPr/>
-                </p:nvCxnSpPr>
-                <p:spPr>
-                  <a:xfrm>
-                    <a:off x="863600" y="592667"/>
-                    <a:ext cx="2770714" cy="0"/>
-                  </a:xfrm>
-                  <a:prstGeom prst="straightConnector1">
-                    <a:avLst/>
-                  </a:prstGeom>
-                  <a:ln>
-                    <a:headEnd type="triangle"/>
-                    <a:tailEnd type="triangle"/>
-                  </a:ln>
-                </p:spPr>
-                <p:style>
-                  <a:lnRef idx="1">
-                    <a:schemeClr val="accent1"/>
-                  </a:lnRef>
-                  <a:fillRef idx="0">
-                    <a:schemeClr val="accent1"/>
-                  </a:fillRef>
-                  <a:effectRef idx="0">
-                    <a:schemeClr val="accent1"/>
-                  </a:effectRef>
-                  <a:fontRef idx="minor">
-                    <a:schemeClr val="tx1"/>
-                  </a:fontRef>
-                </p:style>
-              </p:cxnSp>
-              <p:sp>
-                <p:nvSpPr>
-                  <p:cNvPr id="38" name="ZoneTexte 37">
-                    <a:extLst>
-                      <a:ext uri="{FF2B5EF4-FFF2-40B4-BE49-F238E27FC236}">
-                        <a16:creationId xmlns:a16="http://schemas.microsoft.com/office/drawing/2014/main" id="{9ACF325C-B7E2-4AF5-968E-3C71B3EBB07D}"/>
-                      </a:ext>
-                    </a:extLst>
-                  </p:cNvPr>
-                  <p:cNvSpPr txBox="1"/>
-                  <p:nvPr/>
-                </p:nvSpPr>
-                <p:spPr>
-                  <a:xfrm>
-                    <a:off x="1985474" y="277503"/>
-                    <a:ext cx="1143000" cy="307777"/>
-                  </a:xfrm>
-                  <a:prstGeom prst="rect">
-                    <a:avLst/>
-                  </a:prstGeom>
-                  <a:noFill/>
-                </p:spPr>
-                <p:txBody>
-                  <a:bodyPr wrap="square" rtlCol="0">
-                    <a:spAutoFit/>
-                  </a:bodyPr>
-                  <a:lstStyle/>
-                  <a:p>
-                    <a:r>
-                      <a:rPr lang="fr-FR" sz="900" dirty="0">
-                        <a:latin typeface="Arial" panose="020B0604020202020204" pitchFamily="34" charset="0"/>
-                        <a:cs typeface="Arial" panose="020B0604020202020204" pitchFamily="34" charset="0"/>
-                      </a:rPr>
-                      <a:t> </a:t>
-                    </a:r>
-                    <a:r>
-                      <a:rPr lang="fr-FR" sz="1400" dirty="0">
-                        <a:latin typeface="Arial" panose="020B0604020202020204" pitchFamily="34" charset="0"/>
-                        <a:cs typeface="Arial" panose="020B0604020202020204" pitchFamily="34" charset="0"/>
-                      </a:rPr>
-                      <a:t> 2 fPC1</a:t>
-                    </a:r>
-                    <a:endParaRPr lang="fr-FR" sz="900" dirty="0">
-                      <a:latin typeface="Arial" panose="020B0604020202020204" pitchFamily="34" charset="0"/>
-                      <a:cs typeface="Arial" panose="020B0604020202020204" pitchFamily="34" charset="0"/>
-                    </a:endParaRPr>
-                  </a:p>
-                </p:txBody>
-              </p:sp>
-            </p:grpSp>
-            <p:sp>
-              <p:nvSpPr>
-                <p:cNvPr id="55" name="Ellipse 54">
-                  <a:extLst>
-                    <a:ext uri="{FF2B5EF4-FFF2-40B4-BE49-F238E27FC236}">
-                      <a16:creationId xmlns:a16="http://schemas.microsoft.com/office/drawing/2014/main" id="{74A41B7F-8B14-4868-99CF-8907F89937AE}"/>
-                    </a:ext>
-                  </a:extLst>
-                </p:cNvPr>
-                <p:cNvSpPr/>
-                <p:nvPr/>
-              </p:nvSpPr>
-              <p:spPr>
-                <a:xfrm>
-                  <a:off x="5202767" y="2152553"/>
-                  <a:ext cx="643466" cy="558798"/>
-                </a:xfrm>
-                <a:prstGeom prst="ellipse">
-                  <a:avLst/>
-                </a:prstGeom>
-                <a:solidFill>
-                  <a:schemeClr val="bg2"/>
-                </a:solidFill>
-                <a:ln>
-                  <a:solidFill>
-                    <a:schemeClr val="tx1"/>
-                  </a:solidFill>
-                </a:ln>
-              </p:spPr>
-              <p:style>
-                <a:lnRef idx="2">
-                  <a:schemeClr val="accent3">
-                    <a:shade val="50000"/>
-                  </a:schemeClr>
-                </a:lnRef>
-                <a:fillRef idx="1">
-                  <a:schemeClr val="accent3"/>
-                </a:fillRef>
-                <a:effectRef idx="0">
-                  <a:schemeClr val="accent3"/>
-                </a:effectRef>
-                <a:fontRef idx="minor">
-                  <a:schemeClr val="lt1"/>
-                </a:fontRef>
-              </p:style>
-              <p:txBody>
-                <a:bodyPr rtlCol="0" anchor="ctr"/>
-                <a:lstStyle/>
-                <a:p>
-                  <a:pPr algn="ctr"/>
-                  <a:r>
-                    <a:rPr lang="fr-FR" sz="2800" dirty="0">
-                      <a:solidFill>
-                        <a:schemeClr val="tx1"/>
-                      </a:solidFill>
-                    </a:rPr>
-                    <a:t>t</a:t>
-                  </a:r>
-                  <a:r>
-                    <a:rPr lang="fr-FR" sz="2800" baseline="-25000" dirty="0">
-                      <a:solidFill>
-                        <a:schemeClr val="tx1"/>
-                      </a:solidFill>
-                    </a:rPr>
-                    <a:t>2</a:t>
-                  </a:r>
-                </a:p>
-              </p:txBody>
-            </p:sp>
-            <p:sp>
-              <p:nvSpPr>
-                <p:cNvPr id="56" name="Ellipse 55">
-                  <a:extLst>
-                    <a:ext uri="{FF2B5EF4-FFF2-40B4-BE49-F238E27FC236}">
-                      <a16:creationId xmlns:a16="http://schemas.microsoft.com/office/drawing/2014/main" id="{89B56BEC-32A7-401A-9A46-9877A785C0F8}"/>
-                    </a:ext>
-                  </a:extLst>
-                </p:cNvPr>
-                <p:cNvSpPr/>
-                <p:nvPr/>
-              </p:nvSpPr>
-              <p:spPr>
-                <a:xfrm>
-                  <a:off x="3198285" y="3076302"/>
-                  <a:ext cx="643466" cy="558798"/>
-                </a:xfrm>
-                <a:prstGeom prst="ellipse">
-                  <a:avLst/>
-                </a:prstGeom>
-                <a:solidFill>
-                  <a:schemeClr val="bg2"/>
-                </a:solidFill>
-                <a:ln>
-                  <a:solidFill>
-                    <a:schemeClr val="tx1"/>
-                  </a:solidFill>
-                </a:ln>
-              </p:spPr>
-              <p:style>
-                <a:lnRef idx="2">
-                  <a:schemeClr val="accent3">
-                    <a:shade val="50000"/>
-                  </a:schemeClr>
-                </a:lnRef>
-                <a:fillRef idx="1">
-                  <a:schemeClr val="accent3"/>
-                </a:fillRef>
-                <a:effectRef idx="0">
-                  <a:schemeClr val="accent3"/>
-                </a:effectRef>
-                <a:fontRef idx="minor">
-                  <a:schemeClr val="lt1"/>
-                </a:fontRef>
-              </p:style>
-              <p:txBody>
-                <a:bodyPr rtlCol="0" anchor="ctr"/>
-                <a:lstStyle/>
-                <a:p>
-                  <a:pPr algn="ctr"/>
-                  <a:r>
-                    <a:rPr lang="fr-FR" sz="2800" dirty="0">
-                      <a:solidFill>
-                        <a:schemeClr val="tx1"/>
-                      </a:solidFill>
-                    </a:rPr>
-                    <a:t>t</a:t>
-                  </a:r>
-                  <a:r>
-                    <a:rPr lang="fr-FR" sz="2800" baseline="-25000" dirty="0">
-                      <a:solidFill>
-                        <a:schemeClr val="tx1"/>
-                      </a:solidFill>
-                    </a:rPr>
-                    <a:t>4</a:t>
-                  </a:r>
-                </a:p>
-              </p:txBody>
-            </p:sp>
-            <p:grpSp>
-              <p:nvGrpSpPr>
-                <p:cNvPr id="60" name="Groupe 59">
-                  <a:extLst>
-                    <a:ext uri="{FF2B5EF4-FFF2-40B4-BE49-F238E27FC236}">
-                      <a16:creationId xmlns:a16="http://schemas.microsoft.com/office/drawing/2014/main" id="{FDCA1811-6CFC-4654-8487-35124C8C3764}"/>
-                    </a:ext>
-                  </a:extLst>
-                </p:cNvPr>
-                <p:cNvGrpSpPr/>
-                <p:nvPr/>
-              </p:nvGrpSpPr>
-              <p:grpSpPr>
-                <a:xfrm>
-                  <a:off x="9059332" y="1632143"/>
-                  <a:ext cx="1869015" cy="1344248"/>
-                  <a:chOff x="289985" y="281352"/>
-                  <a:chExt cx="1869015" cy="1344248"/>
-                </a:xfrm>
-              </p:grpSpPr>
-              <p:sp>
-                <p:nvSpPr>
-                  <p:cNvPr id="61" name="Rectangle 60">
-                    <a:extLst>
-                      <a:ext uri="{FF2B5EF4-FFF2-40B4-BE49-F238E27FC236}">
-                        <a16:creationId xmlns:a16="http://schemas.microsoft.com/office/drawing/2014/main" id="{37E09C4B-2FA3-4D73-A1BA-DC779677F558}"/>
-                      </a:ext>
-                    </a:extLst>
-                  </p:cNvPr>
-                  <p:cNvSpPr/>
-                  <p:nvPr/>
-                </p:nvSpPr>
-                <p:spPr>
-                  <a:xfrm>
-                    <a:off x="1193800" y="745067"/>
-                    <a:ext cx="529167" cy="880533"/>
-                  </a:xfrm>
-                  <a:prstGeom prst="rect">
-                    <a:avLst/>
-                  </a:prstGeom>
-                  <a:solidFill>
-                    <a:srgbClr val="F8766D"/>
-                  </a:solidFill>
-                  <a:ln/>
-                </p:spPr>
-                <p:style>
-                  <a:lnRef idx="2">
-                    <a:schemeClr val="accent2"/>
-                  </a:lnRef>
-                  <a:fillRef idx="1">
-                    <a:schemeClr val="lt1"/>
-                  </a:fillRef>
-                  <a:effectRef idx="0">
-                    <a:schemeClr val="accent2"/>
-                  </a:effectRef>
-                  <a:fontRef idx="minor">
-                    <a:schemeClr val="dk1"/>
-                  </a:fontRef>
-                </p:style>
-                <p:txBody>
-                  <a:bodyPr rtlCol="0" anchor="ctr"/>
-                  <a:lstStyle/>
-                  <a:p>
-                    <a:pPr algn="ctr"/>
-                    <a:r>
-                      <a:rPr lang="fr-FR" sz="3200" dirty="0"/>
-                      <a:t>Y</a:t>
-                    </a:r>
-                  </a:p>
-                </p:txBody>
-              </p:sp>
-              <p:cxnSp>
-                <p:nvCxnSpPr>
-                  <p:cNvPr id="62" name="Connecteur droit avec flèche 61">
-                    <a:extLst>
-                      <a:ext uri="{FF2B5EF4-FFF2-40B4-BE49-F238E27FC236}">
-                        <a16:creationId xmlns:a16="http://schemas.microsoft.com/office/drawing/2014/main" id="{E12D763A-03B0-440C-A97F-B619A2E669E6}"/>
-                      </a:ext>
-                    </a:extLst>
-                  </p:cNvPr>
-                  <p:cNvCxnSpPr/>
-                  <p:nvPr/>
-                </p:nvCxnSpPr>
-                <p:spPr>
-                  <a:xfrm>
-                    <a:off x="1016000" y="745067"/>
-                    <a:ext cx="0" cy="821266"/>
-                  </a:xfrm>
-                  <a:prstGeom prst="straightConnector1">
-                    <a:avLst/>
-                  </a:prstGeom>
-                  <a:ln>
-                    <a:headEnd type="triangle"/>
-                    <a:tailEnd type="triangle"/>
-                  </a:ln>
-                </p:spPr>
-                <p:style>
-                  <a:lnRef idx="1">
-                    <a:schemeClr val="accent1"/>
-                  </a:lnRef>
-                  <a:fillRef idx="0">
-                    <a:schemeClr val="accent1"/>
-                  </a:fillRef>
-                  <a:effectRef idx="0">
-                    <a:schemeClr val="accent1"/>
-                  </a:effectRef>
-                  <a:fontRef idx="minor">
-                    <a:schemeClr val="tx1"/>
-                  </a:fontRef>
-                </p:style>
-              </p:cxnSp>
-              <p:sp>
-                <p:nvSpPr>
-                  <p:cNvPr id="63" name="ZoneTexte 62">
-                    <a:extLst>
-                      <a:ext uri="{FF2B5EF4-FFF2-40B4-BE49-F238E27FC236}">
-                        <a16:creationId xmlns:a16="http://schemas.microsoft.com/office/drawing/2014/main" id="{967EAD35-89EE-4B20-AD20-08F5793FF116}"/>
-                      </a:ext>
-                    </a:extLst>
-                  </p:cNvPr>
-                  <p:cNvSpPr txBox="1"/>
-                  <p:nvPr/>
-                </p:nvSpPr>
-                <p:spPr>
-                  <a:xfrm>
-                    <a:off x="289985" y="872591"/>
-                    <a:ext cx="814915" cy="523220"/>
-                  </a:xfrm>
-                  <a:prstGeom prst="rect">
-                    <a:avLst/>
-                  </a:prstGeom>
-                  <a:noFill/>
-                </p:spPr>
-                <p:txBody>
-                  <a:bodyPr wrap="square" rtlCol="0">
-                    <a:spAutoFit/>
-                  </a:bodyPr>
-                  <a:lstStyle/>
-                  <a:p>
-                    <a:pPr algn="ctr"/>
-                    <a:r>
-                      <a:rPr lang="fr-FR" sz="1400" dirty="0">
-                        <a:latin typeface="Arial" panose="020B0604020202020204" pitchFamily="34" charset="0"/>
-                        <a:cs typeface="Arial" panose="020B0604020202020204" pitchFamily="34" charset="0"/>
-                      </a:rPr>
-                      <a:t>12 </a:t>
-                    </a:r>
-                    <a:r>
-                      <a:rPr lang="fr-FR" sz="1400" dirty="0" err="1">
-                        <a:latin typeface="Arial" panose="020B0604020202020204" pitchFamily="34" charset="0"/>
-                        <a:cs typeface="Arial" panose="020B0604020202020204" pitchFamily="34" charset="0"/>
-                      </a:rPr>
-                      <a:t>regions</a:t>
-                    </a:r>
-                    <a:endParaRPr lang="fr-FR" sz="900" dirty="0">
-                      <a:latin typeface="Arial" panose="020B0604020202020204" pitchFamily="34" charset="0"/>
-                      <a:cs typeface="Arial" panose="020B0604020202020204" pitchFamily="34" charset="0"/>
-                    </a:endParaRPr>
-                  </a:p>
-                </p:txBody>
-              </p:sp>
-              <p:cxnSp>
-                <p:nvCxnSpPr>
-                  <p:cNvPr id="64" name="Connecteur droit avec flèche 63">
-                    <a:extLst>
-                      <a:ext uri="{FF2B5EF4-FFF2-40B4-BE49-F238E27FC236}">
-                        <a16:creationId xmlns:a16="http://schemas.microsoft.com/office/drawing/2014/main" id="{EE032EF4-A1DC-4DAF-A752-EFFBCF8E5108}"/>
-                      </a:ext>
-                    </a:extLst>
-                  </p:cNvPr>
-                  <p:cNvCxnSpPr>
-                    <a:cxnSpLocks/>
-                  </p:cNvCxnSpPr>
-                  <p:nvPr/>
-                </p:nvCxnSpPr>
-                <p:spPr>
-                  <a:xfrm>
-                    <a:off x="1193800" y="592667"/>
-                    <a:ext cx="529167" cy="0"/>
-                  </a:xfrm>
-                  <a:prstGeom prst="straightConnector1">
-                    <a:avLst/>
-                  </a:prstGeom>
-                  <a:ln>
-                    <a:headEnd type="triangle"/>
-                    <a:tailEnd type="triangle"/>
-                  </a:ln>
-                </p:spPr>
-                <p:style>
-                  <a:lnRef idx="1">
-                    <a:schemeClr val="accent1"/>
-                  </a:lnRef>
-                  <a:fillRef idx="0">
-                    <a:schemeClr val="accent1"/>
-                  </a:fillRef>
-                  <a:effectRef idx="0">
-                    <a:schemeClr val="accent1"/>
-                  </a:effectRef>
-                  <a:fontRef idx="minor">
-                    <a:schemeClr val="tx1"/>
-                  </a:fontRef>
-                </p:style>
-              </p:cxnSp>
-              <p:sp>
-                <p:nvSpPr>
-                  <p:cNvPr id="65" name="ZoneTexte 64">
-                    <a:extLst>
-                      <a:ext uri="{FF2B5EF4-FFF2-40B4-BE49-F238E27FC236}">
-                        <a16:creationId xmlns:a16="http://schemas.microsoft.com/office/drawing/2014/main" id="{489AD634-96B9-4903-B1A4-7391D77279AC}"/>
-                      </a:ext>
-                    </a:extLst>
-                  </p:cNvPr>
-                  <p:cNvSpPr txBox="1"/>
-                  <p:nvPr/>
-                </p:nvSpPr>
-                <p:spPr>
-                  <a:xfrm>
-                    <a:off x="1016000" y="281352"/>
-                    <a:ext cx="1143000" cy="307777"/>
-                  </a:xfrm>
-                  <a:prstGeom prst="rect">
-                    <a:avLst/>
-                  </a:prstGeom>
-                  <a:noFill/>
-                </p:spPr>
-                <p:txBody>
-                  <a:bodyPr wrap="square" rtlCol="0">
-                    <a:spAutoFit/>
-                  </a:bodyPr>
-                  <a:lstStyle/>
-                  <a:p>
-                    <a:r>
-                      <a:rPr lang="fr-FR" sz="900" dirty="0">
-                        <a:latin typeface="Arial" panose="020B0604020202020204" pitchFamily="34" charset="0"/>
-                        <a:cs typeface="Arial" panose="020B0604020202020204" pitchFamily="34" charset="0"/>
-                      </a:rPr>
-                      <a:t> </a:t>
-                    </a:r>
-                    <a:r>
-                      <a:rPr lang="fr-FR" sz="1400" dirty="0">
-                        <a:latin typeface="Arial" panose="020B0604020202020204" pitchFamily="34" charset="0"/>
-                        <a:cs typeface="Arial" panose="020B0604020202020204" pitchFamily="34" charset="0"/>
-                      </a:rPr>
-                      <a:t> 1 fPC1</a:t>
-                    </a:r>
-                    <a:endParaRPr lang="fr-FR" sz="900" dirty="0">
-                      <a:latin typeface="Arial" panose="020B0604020202020204" pitchFamily="34" charset="0"/>
-                      <a:cs typeface="Arial" panose="020B0604020202020204" pitchFamily="34" charset="0"/>
-                    </a:endParaRPr>
-                  </a:p>
-                </p:txBody>
-              </p:sp>
-            </p:grpSp>
-            <p:sp>
-              <p:nvSpPr>
-                <p:cNvPr id="83" name="Ellipse 82">
-                  <a:extLst>
-                    <a:ext uri="{FF2B5EF4-FFF2-40B4-BE49-F238E27FC236}">
-                      <a16:creationId xmlns:a16="http://schemas.microsoft.com/office/drawing/2014/main" id="{C1842BC6-A26B-41CC-9940-91F9885286AD}"/>
-                    </a:ext>
-                  </a:extLst>
-                </p:cNvPr>
-                <p:cNvSpPr/>
-                <p:nvPr/>
-              </p:nvSpPr>
-              <p:spPr>
-                <a:xfrm>
-                  <a:off x="5202767" y="3939906"/>
-                  <a:ext cx="643466" cy="558798"/>
-                </a:xfrm>
-                <a:prstGeom prst="ellipse">
-                  <a:avLst/>
-                </a:prstGeom>
-                <a:solidFill>
-                  <a:schemeClr val="bg2"/>
-                </a:solidFill>
-                <a:ln>
-                  <a:solidFill>
-                    <a:schemeClr val="tx1"/>
-                  </a:solidFill>
-                </a:ln>
-              </p:spPr>
-              <p:style>
-                <a:lnRef idx="2">
-                  <a:schemeClr val="accent3">
-                    <a:shade val="50000"/>
-                  </a:schemeClr>
-                </a:lnRef>
-                <a:fillRef idx="1">
-                  <a:schemeClr val="accent3"/>
-                </a:fillRef>
-                <a:effectRef idx="0">
-                  <a:schemeClr val="accent3"/>
-                </a:effectRef>
-                <a:fontRef idx="minor">
-                  <a:schemeClr val="lt1"/>
-                </a:fontRef>
-              </p:style>
-              <p:txBody>
-                <a:bodyPr rtlCol="0" anchor="ctr"/>
-                <a:lstStyle/>
-                <a:p>
-                  <a:pPr algn="ctr"/>
-                  <a:r>
-                    <a:rPr lang="fr-FR" sz="2800" dirty="0">
-                      <a:solidFill>
-                        <a:schemeClr val="tx1"/>
-                      </a:solidFill>
-                    </a:rPr>
-                    <a:t>t</a:t>
-                  </a:r>
-                  <a:r>
-                    <a:rPr lang="fr-FR" sz="2800" baseline="-25000" dirty="0">
-                      <a:solidFill>
-                        <a:schemeClr val="tx1"/>
-                      </a:solidFill>
-                    </a:rPr>
-                    <a:t>3</a:t>
-                  </a:r>
-                </a:p>
-              </p:txBody>
-            </p:sp>
-            <p:sp>
-              <p:nvSpPr>
-                <p:cNvPr id="86" name="Ellipse 85">
-                  <a:extLst>
-                    <a:ext uri="{FF2B5EF4-FFF2-40B4-BE49-F238E27FC236}">
-                      <a16:creationId xmlns:a16="http://schemas.microsoft.com/office/drawing/2014/main" id="{A614A312-4AE6-4A69-8B72-B20545BF2321}"/>
-                    </a:ext>
-                  </a:extLst>
-                </p:cNvPr>
-                <p:cNvSpPr/>
-                <p:nvPr/>
-              </p:nvSpPr>
-              <p:spPr>
-                <a:xfrm>
-                  <a:off x="8147048" y="3465767"/>
-                  <a:ext cx="643466" cy="558798"/>
-                </a:xfrm>
-                <a:prstGeom prst="ellipse">
-                  <a:avLst/>
-                </a:prstGeom>
-                <a:solidFill>
-                  <a:schemeClr val="bg2"/>
-                </a:solidFill>
-                <a:ln>
-                  <a:solidFill>
-                    <a:schemeClr val="tx1"/>
-                  </a:solidFill>
-                </a:ln>
-              </p:spPr>
-              <p:style>
-                <a:lnRef idx="2">
-                  <a:schemeClr val="accent3">
-                    <a:shade val="50000"/>
-                  </a:schemeClr>
-                </a:lnRef>
-                <a:fillRef idx="1">
-                  <a:schemeClr val="accent3"/>
-                </a:fillRef>
-                <a:effectRef idx="0">
-                  <a:schemeClr val="accent3"/>
-                </a:effectRef>
-                <a:fontRef idx="minor">
-                  <a:schemeClr val="lt1"/>
-                </a:fontRef>
-              </p:style>
-              <p:txBody>
-                <a:bodyPr rtlCol="0" anchor="ctr"/>
-                <a:lstStyle/>
-                <a:p>
-                  <a:pPr algn="ctr"/>
-                  <a:r>
-                    <a:rPr lang="fr-FR" sz="2800" dirty="0">
-                      <a:solidFill>
-                        <a:schemeClr val="tx1"/>
-                      </a:solidFill>
-                    </a:rPr>
-                    <a:t>t</a:t>
-                  </a:r>
-                  <a:r>
-                    <a:rPr lang="fr-FR" sz="2800" baseline="-25000" dirty="0">
-                      <a:solidFill>
-                        <a:schemeClr val="tx1"/>
-                      </a:solidFill>
-                    </a:rPr>
-                    <a:t>1</a:t>
-                  </a:r>
-                </a:p>
-              </p:txBody>
-            </p:sp>
-            <p:cxnSp>
-              <p:nvCxnSpPr>
-                <p:cNvPr id="101" name="Connecteur droit avec flèche 100">
-                  <a:extLst>
-                    <a:ext uri="{FF2B5EF4-FFF2-40B4-BE49-F238E27FC236}">
-                      <a16:creationId xmlns:a16="http://schemas.microsoft.com/office/drawing/2014/main" id="{6D6723AA-2943-4961-9FD5-220254AAEDD0}"/>
-                    </a:ext>
-                  </a:extLst>
-                </p:cNvPr>
-                <p:cNvCxnSpPr>
-                  <a:cxnSpLocks/>
-                  <a:stCxn id="56" idx="6"/>
-                  <a:endCxn id="86" idx="2"/>
-                </p:cNvCxnSpPr>
-                <p:nvPr/>
-              </p:nvCxnSpPr>
-              <p:spPr>
-                <a:xfrm>
-                  <a:off x="3841751" y="3355701"/>
-                  <a:ext cx="4305297" cy="389465"/>
-                </a:xfrm>
-                <a:prstGeom prst="straightConnector1">
-                  <a:avLst/>
-                </a:prstGeom>
-                <a:ln>
-                  <a:tailEnd type="triangle"/>
-                </a:ln>
-              </p:spPr>
-              <p:style>
-                <a:lnRef idx="1">
-                  <a:schemeClr val="dk1"/>
-                </a:lnRef>
-                <a:fillRef idx="0">
-                  <a:schemeClr val="dk1"/>
-                </a:fillRef>
-                <a:effectRef idx="0">
-                  <a:schemeClr val="dk1"/>
-                </a:effectRef>
-                <a:fontRef idx="minor">
-                  <a:schemeClr val="tx1"/>
-                </a:fontRef>
-              </p:style>
-            </p:cxnSp>
-            <p:cxnSp>
-              <p:nvCxnSpPr>
-                <p:cNvPr id="104" name="Connecteur droit avec flèche 103">
-                  <a:extLst>
-                    <a:ext uri="{FF2B5EF4-FFF2-40B4-BE49-F238E27FC236}">
-                      <a16:creationId xmlns:a16="http://schemas.microsoft.com/office/drawing/2014/main" id="{4F173E60-0876-487C-A09D-58F4FD00B860}"/>
-                    </a:ext>
-                  </a:extLst>
-                </p:cNvPr>
-                <p:cNvCxnSpPr>
-                  <a:cxnSpLocks/>
-                  <a:stCxn id="83" idx="6"/>
-                  <a:endCxn id="86" idx="3"/>
-                </p:cNvCxnSpPr>
-                <p:nvPr/>
-              </p:nvCxnSpPr>
-              <p:spPr>
-                <a:xfrm flipV="1">
-                  <a:off x="5846233" y="3942731"/>
-                  <a:ext cx="2395048" cy="276574"/>
-                </a:xfrm>
-                <a:prstGeom prst="straightConnector1">
-                  <a:avLst/>
-                </a:prstGeom>
-                <a:ln>
-                  <a:tailEnd type="triangle"/>
-                </a:ln>
-              </p:spPr>
-              <p:style>
-                <a:lnRef idx="1">
-                  <a:schemeClr val="dk1"/>
-                </a:lnRef>
-                <a:fillRef idx="0">
-                  <a:schemeClr val="dk1"/>
-                </a:fillRef>
-                <a:effectRef idx="0">
-                  <a:schemeClr val="dk1"/>
-                </a:effectRef>
-                <a:fontRef idx="minor">
-                  <a:schemeClr val="tx1"/>
-                </a:fontRef>
-              </p:style>
-            </p:cxnSp>
-            <p:cxnSp>
-              <p:nvCxnSpPr>
-                <p:cNvPr id="105" name="Connecteur droit avec flèche 104">
-                  <a:extLst>
-                    <a:ext uri="{FF2B5EF4-FFF2-40B4-BE49-F238E27FC236}">
-                      <a16:creationId xmlns:a16="http://schemas.microsoft.com/office/drawing/2014/main" id="{535EA614-6159-464F-AC2B-AFB341605941}"/>
-                    </a:ext>
-                  </a:extLst>
-                </p:cNvPr>
-                <p:cNvCxnSpPr>
-                  <a:cxnSpLocks/>
-                  <a:stCxn id="86" idx="0"/>
-                  <a:endCxn id="112" idx="4"/>
-                </p:cNvCxnSpPr>
-                <p:nvPr/>
-              </p:nvCxnSpPr>
-              <p:spPr>
-                <a:xfrm flipV="1">
-                  <a:off x="8468781" y="2777001"/>
-                  <a:ext cx="249766" cy="688766"/>
-                </a:xfrm>
-                <a:prstGeom prst="straightConnector1">
-                  <a:avLst/>
-                </a:prstGeom>
-                <a:ln>
-                  <a:tailEnd type="triangle"/>
-                </a:ln>
-              </p:spPr>
-              <p:style>
-                <a:lnRef idx="1">
-                  <a:schemeClr val="dk1"/>
-                </a:lnRef>
-                <a:fillRef idx="0">
-                  <a:schemeClr val="dk1"/>
-                </a:fillRef>
-                <a:effectRef idx="0">
-                  <a:schemeClr val="dk1"/>
-                </a:effectRef>
-                <a:fontRef idx="minor">
-                  <a:schemeClr val="tx1"/>
-                </a:fontRef>
-              </p:style>
-            </p:cxnSp>
-            <p:sp>
-              <p:nvSpPr>
-                <p:cNvPr id="112" name="Ellipse 111">
-                  <a:extLst>
-                    <a:ext uri="{FF2B5EF4-FFF2-40B4-BE49-F238E27FC236}">
-                      <a16:creationId xmlns:a16="http://schemas.microsoft.com/office/drawing/2014/main" id="{493842CD-0665-4A27-9432-1B5D4CD35AA8}"/>
-                    </a:ext>
-                  </a:extLst>
-                </p:cNvPr>
-                <p:cNvSpPr/>
-                <p:nvPr/>
-              </p:nvSpPr>
-              <p:spPr>
-                <a:xfrm>
-                  <a:off x="8396814" y="2218203"/>
-                  <a:ext cx="643466" cy="558798"/>
-                </a:xfrm>
-                <a:prstGeom prst="ellipse">
-                  <a:avLst/>
-                </a:prstGeom>
-                <a:solidFill>
-                  <a:schemeClr val="bg2"/>
-                </a:solidFill>
-                <a:ln>
-                  <a:solidFill>
-                    <a:schemeClr val="tx1"/>
-                  </a:solidFill>
-                </a:ln>
-              </p:spPr>
-              <p:style>
-                <a:lnRef idx="2">
-                  <a:schemeClr val="accent3">
-                    <a:shade val="50000"/>
-                  </a:schemeClr>
-                </a:lnRef>
-                <a:fillRef idx="1">
-                  <a:schemeClr val="accent3"/>
-                </a:fillRef>
-                <a:effectRef idx="0">
-                  <a:schemeClr val="accent3"/>
-                </a:effectRef>
-                <a:fontRef idx="minor">
-                  <a:schemeClr val="lt1"/>
-                </a:fontRef>
-              </p:style>
-              <p:txBody>
-                <a:bodyPr rtlCol="0" anchor="ctr"/>
-                <a:lstStyle/>
-                <a:p>
-                  <a:pPr algn="ctr"/>
-                  <a:r>
-                    <a:rPr lang="fr-FR" sz="2800" dirty="0" err="1">
-                      <a:solidFill>
-                        <a:schemeClr val="tx1"/>
-                      </a:solidFill>
-                    </a:rPr>
-                    <a:t>t</a:t>
-                  </a:r>
-                  <a:r>
-                    <a:rPr lang="fr-FR" sz="2800" baseline="-25000" dirty="0" err="1">
-                      <a:solidFill>
-                        <a:schemeClr val="tx1"/>
-                      </a:solidFill>
-                    </a:rPr>
-                    <a:t>y</a:t>
-                  </a:r>
-                  <a:endParaRPr lang="fr-FR" sz="2800" baseline="-25000" dirty="0">
-                    <a:solidFill>
-                      <a:schemeClr val="tx1"/>
-                    </a:solidFill>
-                  </a:endParaRPr>
-                </a:p>
-              </p:txBody>
-            </p:sp>
-            <p:cxnSp>
-              <p:nvCxnSpPr>
-                <p:cNvPr id="115" name="Connecteur droit avec flèche 114">
-                  <a:extLst>
-                    <a:ext uri="{FF2B5EF4-FFF2-40B4-BE49-F238E27FC236}">
-                      <a16:creationId xmlns:a16="http://schemas.microsoft.com/office/drawing/2014/main" id="{C55FE631-DE36-4001-953D-547F103476B8}"/>
-                    </a:ext>
-                  </a:extLst>
-                </p:cNvPr>
-                <p:cNvCxnSpPr>
-                  <a:cxnSpLocks/>
-                  <a:stCxn id="55" idx="7"/>
-                  <a:endCxn id="112" idx="2"/>
-                </p:cNvCxnSpPr>
-                <p:nvPr/>
-              </p:nvCxnSpPr>
-              <p:spPr>
-                <a:xfrm>
-                  <a:off x="5752000" y="2234387"/>
-                  <a:ext cx="2644814" cy="263215"/>
-                </a:xfrm>
-                <a:prstGeom prst="straightConnector1">
-                  <a:avLst/>
-                </a:prstGeom>
-                <a:ln>
-                  <a:tailEnd type="triangle"/>
-                </a:ln>
-              </p:spPr>
-              <p:style>
-                <a:lnRef idx="1">
-                  <a:schemeClr val="dk1"/>
-                </a:lnRef>
-                <a:fillRef idx="0">
-                  <a:schemeClr val="dk1"/>
-                </a:fillRef>
-                <a:effectRef idx="0">
-                  <a:schemeClr val="dk1"/>
-                </a:effectRef>
-                <a:fontRef idx="minor">
-                  <a:schemeClr val="tx1"/>
-                </a:fontRef>
-              </p:style>
-            </p:cxnSp>
-            <p:cxnSp>
-              <p:nvCxnSpPr>
-                <p:cNvPr id="119" name="Connecteur droit avec flèche 118">
-                  <a:extLst>
-                    <a:ext uri="{FF2B5EF4-FFF2-40B4-BE49-F238E27FC236}">
-                      <a16:creationId xmlns:a16="http://schemas.microsoft.com/office/drawing/2014/main" id="{22B5DE84-1C10-45BC-BAEB-F2A2D97E6B8A}"/>
-                    </a:ext>
-                  </a:extLst>
-                </p:cNvPr>
-                <p:cNvCxnSpPr>
-                  <a:cxnSpLocks/>
-                  <a:stCxn id="56" idx="6"/>
-                </p:cNvCxnSpPr>
-                <p:nvPr/>
-              </p:nvCxnSpPr>
-              <p:spPr>
-                <a:xfrm flipV="1">
-                  <a:off x="3841751" y="2692227"/>
-                  <a:ext cx="4654546" cy="663474"/>
-                </a:xfrm>
-                <a:prstGeom prst="straightConnector1">
-                  <a:avLst/>
-                </a:prstGeom>
-                <a:ln>
-                  <a:tailEnd type="triangle"/>
-                </a:ln>
-              </p:spPr>
-              <p:style>
-                <a:lnRef idx="1">
-                  <a:schemeClr val="dk1"/>
-                </a:lnRef>
-                <a:fillRef idx="0">
-                  <a:schemeClr val="dk1"/>
-                </a:fillRef>
-                <a:effectRef idx="0">
-                  <a:schemeClr val="dk1"/>
-                </a:effectRef>
-                <a:fontRef idx="minor">
-                  <a:schemeClr val="tx1"/>
-                </a:fontRef>
-              </p:style>
-            </p:cxnSp>
-            <p:cxnSp>
-              <p:nvCxnSpPr>
-                <p:cNvPr id="122" name="Connecteur droit avec flèche 121">
-                  <a:extLst>
-                    <a:ext uri="{FF2B5EF4-FFF2-40B4-BE49-F238E27FC236}">
-                      <a16:creationId xmlns:a16="http://schemas.microsoft.com/office/drawing/2014/main" id="{6A96B123-4EE6-4AEA-9FBE-4ACC354255C2}"/>
-                    </a:ext>
-                  </a:extLst>
-                </p:cNvPr>
-                <p:cNvCxnSpPr>
-                  <a:cxnSpLocks/>
-                  <a:stCxn id="83" idx="7"/>
-                  <a:endCxn id="112" idx="3"/>
-                </p:cNvCxnSpPr>
-                <p:nvPr/>
-              </p:nvCxnSpPr>
-              <p:spPr>
-                <a:xfrm flipV="1">
-                  <a:off x="5752000" y="2695167"/>
-                  <a:ext cx="2739047" cy="1326573"/>
-                </a:xfrm>
-                <a:prstGeom prst="straightConnector1">
-                  <a:avLst/>
-                </a:prstGeom>
-                <a:ln>
-                  <a:tailEnd type="triangle"/>
-                </a:ln>
-              </p:spPr>
-              <p:style>
-                <a:lnRef idx="1">
-                  <a:schemeClr val="dk1"/>
-                </a:lnRef>
-                <a:fillRef idx="0">
-                  <a:schemeClr val="dk1"/>
-                </a:fillRef>
-                <a:effectRef idx="0">
-                  <a:schemeClr val="dk1"/>
-                </a:effectRef>
-                <a:fontRef idx="minor">
-                  <a:schemeClr val="tx1"/>
-                </a:fontRef>
-              </p:style>
-            </p:cxnSp>
-          </p:grpSp>
-        </p:grpSp>
+            <a:prstGeom prst="roundRect">
+              <a:avLst/>
+            </a:prstGeom>
+            <a:solidFill>
+              <a:schemeClr val="accent6">
+                <a:lumMod val="20000"/>
+                <a:lumOff val="80000"/>
+              </a:schemeClr>
+            </a:solidFill>
+            <a:ln>
+              <a:solidFill>
+                <a:schemeClr val="tx1"/>
+              </a:solidFill>
+            </a:ln>
+          </p:spPr>
+          <p:style>
+            <a:lnRef idx="2">
+              <a:schemeClr val="accent1">
+                <a:shade val="50000"/>
+              </a:schemeClr>
+            </a:lnRef>
+            <a:fillRef idx="1">
+              <a:schemeClr val="accent1"/>
+            </a:fillRef>
+            <a:effectRef idx="0">
+              <a:schemeClr val="accent1"/>
+            </a:effectRef>
+            <a:fontRef idx="minor">
+              <a:schemeClr val="lt1"/>
+            </a:fontRef>
+          </p:style>
+          <p:txBody>
+            <a:bodyPr rtlCol="0" anchor="ctr"/>
+            <a:lstStyle/>
+            <a:p>
+              <a:pPr algn="ctr"/>
+              <a:endParaRPr lang="fr-FR"/>
+            </a:p>
+          </p:txBody>
+        </p:sp>
+        <p:sp>
+          <p:nvSpPr>
+            <p:cNvPr id="170" name="Rectangle : coins arrondis 169">
+              <a:extLst>
+                <a:ext uri="{FF2B5EF4-FFF2-40B4-BE49-F238E27FC236}">
+                  <a16:creationId xmlns:a16="http://schemas.microsoft.com/office/drawing/2014/main" id="{D35A0705-F9A3-40D0-AD5B-8E72D1BAA697}"/>
+                </a:ext>
+              </a:extLst>
+            </p:cNvPr>
+            <p:cNvSpPr/>
+            <p:nvPr/>
+          </p:nvSpPr>
+          <p:spPr>
+            <a:xfrm>
+              <a:off x="4056246" y="1478891"/>
+              <a:ext cx="8007984" cy="4913520"/>
+            </a:xfrm>
+            <a:prstGeom prst="roundRect">
+              <a:avLst/>
+            </a:prstGeom>
+            <a:solidFill>
+              <a:schemeClr val="accent4">
+                <a:lumMod val="40000"/>
+                <a:lumOff val="60000"/>
+              </a:schemeClr>
+            </a:solidFill>
+            <a:ln>
+              <a:solidFill>
+                <a:schemeClr val="tx1"/>
+              </a:solidFill>
+            </a:ln>
+          </p:spPr>
+          <p:style>
+            <a:lnRef idx="2">
+              <a:schemeClr val="accent1">
+                <a:shade val="50000"/>
+              </a:schemeClr>
+            </a:lnRef>
+            <a:fillRef idx="1">
+              <a:schemeClr val="accent1"/>
+            </a:fillRef>
+            <a:effectRef idx="0">
+              <a:schemeClr val="accent1"/>
+            </a:effectRef>
+            <a:fontRef idx="minor">
+              <a:schemeClr val="lt1"/>
+            </a:fontRef>
+          </p:style>
+          <p:txBody>
+            <a:bodyPr rtlCol="0" anchor="ctr"/>
+            <a:lstStyle/>
+            <a:p>
+              <a:pPr algn="ctr"/>
+              <a:endParaRPr lang="fr-FR"/>
+            </a:p>
+          </p:txBody>
+        </p:sp>
+        <p:sp>
+          <p:nvSpPr>
+            <p:cNvPr id="168" name="Rectangle : coins arrondis 167">
+              <a:extLst>
+                <a:ext uri="{FF2B5EF4-FFF2-40B4-BE49-F238E27FC236}">
+                  <a16:creationId xmlns:a16="http://schemas.microsoft.com/office/drawing/2014/main" id="{FAA98E94-FD1C-49C0-B147-2776164F35B8}"/>
+                </a:ext>
+              </a:extLst>
+            </p:cNvPr>
+            <p:cNvSpPr/>
+            <p:nvPr/>
+          </p:nvSpPr>
+          <p:spPr>
+            <a:xfrm>
+              <a:off x="5585812" y="2315985"/>
+              <a:ext cx="6380119" cy="3895439"/>
+            </a:xfrm>
+            <a:prstGeom prst="roundRect">
+              <a:avLst/>
+            </a:prstGeom>
+            <a:solidFill>
+              <a:schemeClr val="accent1">
+                <a:lumMod val="20000"/>
+                <a:lumOff val="80000"/>
+              </a:schemeClr>
+            </a:solidFill>
+            <a:ln>
+              <a:solidFill>
+                <a:schemeClr val="tx1"/>
+              </a:solidFill>
+            </a:ln>
+          </p:spPr>
+          <p:style>
+            <a:lnRef idx="2">
+              <a:schemeClr val="accent1">
+                <a:shade val="50000"/>
+              </a:schemeClr>
+            </a:lnRef>
+            <a:fillRef idx="1">
+              <a:schemeClr val="accent1"/>
+            </a:fillRef>
+            <a:effectRef idx="0">
+              <a:schemeClr val="accent1"/>
+            </a:effectRef>
+            <a:fontRef idx="minor">
+              <a:schemeClr val="lt1"/>
+            </a:fontRef>
+          </p:style>
+          <p:txBody>
+            <a:bodyPr rtlCol="0" anchor="ctr"/>
+            <a:lstStyle/>
+            <a:p>
+              <a:pPr algn="ctr"/>
+              <a:endParaRPr lang="fr-FR"/>
+            </a:p>
+          </p:txBody>
+        </p:sp>
         <p:cxnSp>
           <p:nvCxnSpPr>
-            <p:cNvPr id="10" name="Connecteur droit avec flèche 9">
+            <p:cNvPr id="143" name="Connecteur droit avec flèche 142">
               <a:extLst>
                 <a:ext uri="{FF2B5EF4-FFF2-40B4-BE49-F238E27FC236}">
-                  <a16:creationId xmlns:a16="http://schemas.microsoft.com/office/drawing/2014/main" id="{F3837C4B-EF0F-4E06-82E7-4ECCC3ED23F7}"/>
+                  <a16:creationId xmlns:a16="http://schemas.microsoft.com/office/drawing/2014/main" id="{0B3F70F5-D918-426B-B228-2B546B70CB17}"/>
                 </a:ext>
               </a:extLst>
             </p:cNvPr>
             <p:cNvCxnSpPr>
-              <a:stCxn id="56" idx="0"/>
-              <a:endCxn id="55" idx="2"/>
+              <a:cxnSpLocks/>
             </p:cNvCxnSpPr>
             <p:nvPr/>
           </p:nvCxnSpPr>
           <p:spPr>
-            <a:xfrm flipV="1">
-              <a:off x="3520018" y="2431952"/>
-              <a:ext cx="1682749" cy="644350"/>
+            <a:xfrm flipH="1">
+              <a:off x="3521765" y="4004345"/>
+              <a:ext cx="2755280" cy="0"/>
             </a:xfrm>
             <a:prstGeom prst="straightConnector1">
               <a:avLst/>
             </a:prstGeom>
-            <a:ln>
+            <a:ln w="12700">
               <a:tailEnd type="triangle"/>
             </a:ln>
           </p:spPr>
@@ -7542,28 +5776,27 @@
         </p:cxnSp>
         <p:cxnSp>
           <p:nvCxnSpPr>
-            <p:cNvPr id="20" name="Connecteur droit avec flèche 19">
+            <p:cNvPr id="141" name="Connecteur droit avec flèche 140">
               <a:extLst>
                 <a:ext uri="{FF2B5EF4-FFF2-40B4-BE49-F238E27FC236}">
-                  <a16:creationId xmlns:a16="http://schemas.microsoft.com/office/drawing/2014/main" id="{C76F8430-8FE8-4A8E-B9E3-55CC544E2A39}"/>
+                  <a16:creationId xmlns:a16="http://schemas.microsoft.com/office/drawing/2014/main" id="{3CB78C43-3873-4592-8903-A46A395A9323}"/>
                 </a:ext>
               </a:extLst>
             </p:cNvPr>
             <p:cNvCxnSpPr>
-              <a:stCxn id="55" idx="3"/>
-              <a:endCxn id="56" idx="7"/>
+              <a:cxnSpLocks/>
             </p:cNvCxnSpPr>
             <p:nvPr/>
           </p:nvCxnSpPr>
           <p:spPr>
             <a:xfrm flipH="1">
-              <a:off x="3747518" y="2629517"/>
-              <a:ext cx="1549482" cy="528619"/>
+              <a:off x="3521765" y="4330117"/>
+              <a:ext cx="4613194" cy="0"/>
             </a:xfrm>
             <a:prstGeom prst="straightConnector1">
               <a:avLst/>
             </a:prstGeom>
-            <a:ln>
+            <a:ln w="12700">
               <a:tailEnd type="triangle"/>
             </a:ln>
           </p:spPr>
@@ -7584,28 +5817,3076 @@
         </p:cxnSp>
         <p:cxnSp>
           <p:nvCxnSpPr>
-            <p:cNvPr id="22" name="Connecteur droit avec flèche 21">
+            <p:cNvPr id="140" name="Connecteur droit avec flèche 139">
               <a:extLst>
                 <a:ext uri="{FF2B5EF4-FFF2-40B4-BE49-F238E27FC236}">
-                  <a16:creationId xmlns:a16="http://schemas.microsoft.com/office/drawing/2014/main" id="{336756FC-FCB2-4490-8690-356296E3CF66}"/>
+                  <a16:creationId xmlns:a16="http://schemas.microsoft.com/office/drawing/2014/main" id="{73029A34-46ED-415E-82F3-C36C6D75CA23}"/>
                 </a:ext>
               </a:extLst>
             </p:cNvPr>
             <p:cNvCxnSpPr>
-              <a:stCxn id="55" idx="4"/>
-              <a:endCxn id="83" idx="0"/>
+              <a:cxnSpLocks/>
             </p:cNvCxnSpPr>
             <p:nvPr/>
           </p:nvCxnSpPr>
           <p:spPr>
+            <a:xfrm flipH="1">
+              <a:off x="3521765" y="4437776"/>
+              <a:ext cx="6708894" cy="0"/>
+            </a:xfrm>
+            <a:prstGeom prst="straightConnector1">
+              <a:avLst/>
+            </a:prstGeom>
+            <a:ln w="12700">
+              <a:tailEnd type="triangle"/>
+            </a:ln>
+          </p:spPr>
+          <p:style>
+            <a:lnRef idx="1">
+              <a:schemeClr val="dk1"/>
+            </a:lnRef>
+            <a:fillRef idx="0">
+              <a:schemeClr val="dk1"/>
+            </a:fillRef>
+            <a:effectRef idx="0">
+              <a:schemeClr val="dk1"/>
+            </a:effectRef>
+            <a:fontRef idx="minor">
+              <a:schemeClr val="tx1"/>
+            </a:fontRef>
+          </p:style>
+        </p:cxnSp>
+        <p:sp>
+          <p:nvSpPr>
+            <p:cNvPr id="61" name="Rectangle 60">
+              <a:extLst>
+                <a:ext uri="{FF2B5EF4-FFF2-40B4-BE49-F238E27FC236}">
+                  <a16:creationId xmlns:a16="http://schemas.microsoft.com/office/drawing/2014/main" id="{37E09C4B-2FA3-4D73-A1BA-DC779677F558}"/>
+                </a:ext>
+              </a:extLst>
+            </p:cNvPr>
+            <p:cNvSpPr/>
+            <p:nvPr/>
+          </p:nvSpPr>
+          <p:spPr>
             <a:xfrm>
-              <a:off x="5524500" y="2711351"/>
-              <a:ext cx="0" cy="1228555"/>
+              <a:off x="3162124" y="5429980"/>
+              <a:ext cx="433313" cy="576538"/>
+            </a:xfrm>
+            <a:prstGeom prst="rect">
+              <a:avLst/>
+            </a:prstGeom>
+            <a:solidFill>
+              <a:srgbClr val="F8766D"/>
+            </a:solidFill>
+            <a:ln>
+              <a:solidFill>
+                <a:schemeClr val="tx1"/>
+              </a:solidFill>
+            </a:ln>
+          </p:spPr>
+          <p:style>
+            <a:lnRef idx="2">
+              <a:schemeClr val="accent2"/>
+            </a:lnRef>
+            <a:fillRef idx="1">
+              <a:schemeClr val="lt1"/>
+            </a:fillRef>
+            <a:effectRef idx="0">
+              <a:schemeClr val="accent2"/>
+            </a:effectRef>
+            <a:fontRef idx="minor">
+              <a:schemeClr val="dk1"/>
+            </a:fontRef>
+          </p:style>
+          <p:txBody>
+            <a:bodyPr rtlCol="0" anchor="ctr"/>
+            <a:lstStyle/>
+            <a:p>
+              <a:pPr algn="ctr"/>
+              <a:r>
+                <a:rPr lang="fr-FR" dirty="0"/>
+                <a:t>Y</a:t>
+              </a:r>
+            </a:p>
+          </p:txBody>
+        </p:sp>
+        <p:sp>
+          <p:nvSpPr>
+            <p:cNvPr id="5" name="Rectangle 4">
+              <a:extLst>
+                <a:ext uri="{FF2B5EF4-FFF2-40B4-BE49-F238E27FC236}">
+                  <a16:creationId xmlns:a16="http://schemas.microsoft.com/office/drawing/2014/main" id="{3605D84A-2275-447A-B2FE-518A62536785}"/>
+                </a:ext>
+              </a:extLst>
+            </p:cNvPr>
+            <p:cNvSpPr/>
+            <p:nvPr/>
+          </p:nvSpPr>
+          <p:spPr>
+            <a:xfrm>
+              <a:off x="3256812" y="3724709"/>
+              <a:ext cx="243936" cy="855681"/>
+            </a:xfrm>
+            <a:prstGeom prst="rect">
+              <a:avLst/>
+            </a:prstGeom>
+            <a:solidFill>
+              <a:srgbClr val="F8766D"/>
+            </a:solidFill>
+            <a:ln>
+              <a:solidFill>
+                <a:schemeClr val="tx1"/>
+              </a:solidFill>
+            </a:ln>
+          </p:spPr>
+          <p:style>
+            <a:lnRef idx="2">
+              <a:schemeClr val="accent1">
+                <a:shade val="50000"/>
+              </a:schemeClr>
+            </a:lnRef>
+            <a:fillRef idx="1">
+              <a:schemeClr val="accent1"/>
+            </a:fillRef>
+            <a:effectRef idx="0">
+              <a:schemeClr val="accent1"/>
+            </a:effectRef>
+            <a:fontRef idx="minor">
+              <a:schemeClr val="lt1"/>
+            </a:fontRef>
+          </p:style>
+          <p:txBody>
+            <a:bodyPr rtlCol="0" anchor="ctr"/>
+            <a:lstStyle/>
+            <a:p>
+              <a:pPr algn="ctr"/>
+              <a:endParaRPr lang="fr-FR"/>
+            </a:p>
+          </p:txBody>
+        </p:sp>
+        <p:cxnSp>
+          <p:nvCxnSpPr>
+            <p:cNvPr id="25" name="Connecteur droit avec flèche 24">
+              <a:extLst>
+                <a:ext uri="{FF2B5EF4-FFF2-40B4-BE49-F238E27FC236}">
+                  <a16:creationId xmlns:a16="http://schemas.microsoft.com/office/drawing/2014/main" id="{12A9E897-405A-42DD-8742-1B333DB11497}"/>
+                </a:ext>
+              </a:extLst>
+            </p:cNvPr>
+            <p:cNvCxnSpPr/>
+            <p:nvPr/>
+          </p:nvCxnSpPr>
+          <p:spPr>
+            <a:xfrm>
+              <a:off x="3500748" y="4580387"/>
+              <a:ext cx="0" cy="849591"/>
             </a:xfrm>
             <a:prstGeom prst="straightConnector1">
               <a:avLst/>
             </a:prstGeom>
             <a:ln>
+              <a:solidFill>
+                <a:schemeClr val="tx1"/>
+              </a:solidFill>
+              <a:tailEnd type="triangle"/>
+            </a:ln>
+          </p:spPr>
+          <p:style>
+            <a:lnRef idx="1">
+              <a:schemeClr val="accent1"/>
+            </a:lnRef>
+            <a:fillRef idx="0">
+              <a:schemeClr val="accent1"/>
+            </a:fillRef>
+            <a:effectRef idx="0">
+              <a:schemeClr val="accent1"/>
+            </a:effectRef>
+            <a:fontRef idx="minor">
+              <a:schemeClr val="tx1"/>
+            </a:fontRef>
+          </p:style>
+        </p:cxnSp>
+        <p:cxnSp>
+          <p:nvCxnSpPr>
+            <p:cNvPr id="29" name="Connecteur droit avec flèche 28">
+              <a:extLst>
+                <a:ext uri="{FF2B5EF4-FFF2-40B4-BE49-F238E27FC236}">
+                  <a16:creationId xmlns:a16="http://schemas.microsoft.com/office/drawing/2014/main" id="{DD907B86-105C-4E8C-B2D4-94499C4951B2}"/>
+                </a:ext>
+              </a:extLst>
+            </p:cNvPr>
+            <p:cNvCxnSpPr/>
+            <p:nvPr/>
+          </p:nvCxnSpPr>
+          <p:spPr>
+            <a:xfrm flipV="1">
+              <a:off x="3256812" y="4557521"/>
+              <a:ext cx="0" cy="849591"/>
+            </a:xfrm>
+            <a:prstGeom prst="straightConnector1">
+              <a:avLst/>
+            </a:prstGeom>
+            <a:ln>
+              <a:solidFill>
+                <a:schemeClr val="tx1"/>
+              </a:solidFill>
+              <a:tailEnd type="triangle"/>
+            </a:ln>
+          </p:spPr>
+          <p:style>
+            <a:lnRef idx="1">
+              <a:schemeClr val="accent1"/>
+            </a:lnRef>
+            <a:fillRef idx="0">
+              <a:schemeClr val="accent1"/>
+            </a:fillRef>
+            <a:effectRef idx="0">
+              <a:schemeClr val="accent1"/>
+            </a:effectRef>
+            <a:fontRef idx="minor">
+              <a:schemeClr val="tx1"/>
+            </a:fontRef>
+          </p:style>
+        </p:cxnSp>
+        <mc:AlternateContent xmlns:mc="http://schemas.openxmlformats.org/markup-compatibility/2006">
+          <mc:Choice xmlns:a14="http://schemas.microsoft.com/office/drawing/2010/main" Requires="a14">
+            <p:sp>
+              <p:nvSpPr>
+                <p:cNvPr id="52" name="ZoneTexte 51">
+                  <a:extLst>
+                    <a:ext uri="{FF2B5EF4-FFF2-40B4-BE49-F238E27FC236}">
+                      <a16:creationId xmlns:a16="http://schemas.microsoft.com/office/drawing/2014/main" id="{2C7B82E9-F977-48C0-B0A4-AEAB6BDFEAA3}"/>
+                    </a:ext>
+                  </a:extLst>
+                </p:cNvPr>
+                <p:cNvSpPr txBox="1"/>
+                <p:nvPr/>
+              </p:nvSpPr>
+              <p:spPr>
+                <a:xfrm>
+                  <a:off x="2926476" y="4820516"/>
+                  <a:ext cx="322049" cy="369332"/>
+                </a:xfrm>
+                <a:prstGeom prst="rect">
+                  <a:avLst/>
+                </a:prstGeom>
+                <a:noFill/>
+              </p:spPr>
+              <p:txBody>
+                <a:bodyPr wrap="square" rtlCol="0">
+                  <a:spAutoFit/>
+                </a:bodyPr>
+                <a:lstStyle/>
+                <a:p>
+                  <a14:m>
+                    <m:oMathPara xmlns:m="http://schemas.openxmlformats.org/officeDocument/2006/math">
+                      <m:oMathParaPr>
+                        <m:jc m:val="centerGroup"/>
+                      </m:oMathParaPr>
+                      <m:oMath xmlns:m="http://schemas.openxmlformats.org/officeDocument/2006/math">
+                        <m:r>
+                          <a:rPr lang="fr-FR" b="0" i="1" smtClean="0">
+                            <a:solidFill>
+                              <a:srgbClr val="F8766D"/>
+                            </a:solidFill>
+                            <a:latin typeface="Cambria Math" panose="02040503050406030204" pitchFamily="18" charset="0"/>
+                          </a:rPr>
+                          <m:t>𝑤</m:t>
+                        </m:r>
+                      </m:oMath>
+                    </m:oMathPara>
+                  </a14:m>
+                  <a:endParaRPr lang="fr-FR" dirty="0">
+                    <a:solidFill>
+                      <a:srgbClr val="F8766D"/>
+                    </a:solidFill>
+                  </a:endParaRPr>
+                </a:p>
+              </p:txBody>
+            </p:sp>
+          </mc:Choice>
+          <mc:Fallback>
+            <p:sp>
+              <p:nvSpPr>
+                <p:cNvPr id="52" name="ZoneTexte 51">
+                  <a:extLst>
+                    <a:ext uri="{FF2B5EF4-FFF2-40B4-BE49-F238E27FC236}">
+                      <a16:creationId xmlns:a16="http://schemas.microsoft.com/office/drawing/2014/main" id="{2C7B82E9-F977-48C0-B0A4-AEAB6BDFEAA3}"/>
+                    </a:ext>
+                  </a:extLst>
+                </p:cNvPr>
+                <p:cNvSpPr txBox="1">
+                  <a:spLocks noRot="1" noChangeAspect="1" noMove="1" noResize="1" noEditPoints="1" noAdjustHandles="1" noChangeArrowheads="1" noChangeShapeType="1" noTextEdit="1"/>
+                </p:cNvSpPr>
+                <p:nvPr/>
+              </p:nvSpPr>
+              <p:spPr>
+                <a:xfrm>
+                  <a:off x="2926476" y="4820516"/>
+                  <a:ext cx="322049" cy="369332"/>
+                </a:xfrm>
+                <a:prstGeom prst="rect">
+                  <a:avLst/>
+                </a:prstGeom>
+                <a:blipFill>
+                  <a:blip r:embed="rId2"/>
+                  <a:stretch>
+                    <a:fillRect/>
+                  </a:stretch>
+                </a:blipFill>
+              </p:spPr>
+              <p:txBody>
+                <a:bodyPr/>
+                <a:lstStyle/>
+                <a:p>
+                  <a:r>
+                    <a:rPr lang="fr-FR">
+                      <a:noFill/>
+                    </a:rPr>
+                    <a:t> </a:t>
+                  </a:r>
+                </a:p>
+              </p:txBody>
+            </p:sp>
+          </mc:Fallback>
+        </mc:AlternateContent>
+        <mc:AlternateContent xmlns:mc="http://schemas.openxmlformats.org/markup-compatibility/2006">
+          <mc:Choice xmlns:a14="http://schemas.microsoft.com/office/drawing/2010/main" Requires="a14">
+            <p:sp>
+              <p:nvSpPr>
+                <p:cNvPr id="97" name="ZoneTexte 96">
+                  <a:extLst>
+                    <a:ext uri="{FF2B5EF4-FFF2-40B4-BE49-F238E27FC236}">
+                      <a16:creationId xmlns:a16="http://schemas.microsoft.com/office/drawing/2014/main" id="{34B60274-D60F-4ACC-B60C-54117510C3ED}"/>
+                    </a:ext>
+                  </a:extLst>
+                </p:cNvPr>
+                <p:cNvSpPr txBox="1"/>
+                <p:nvPr/>
+              </p:nvSpPr>
+              <p:spPr>
+                <a:xfrm>
+                  <a:off x="3521765" y="4856050"/>
+                  <a:ext cx="322049" cy="369332"/>
+                </a:xfrm>
+                <a:prstGeom prst="rect">
+                  <a:avLst/>
+                </a:prstGeom>
+                <a:noFill/>
+              </p:spPr>
+              <p:txBody>
+                <a:bodyPr wrap="square" rtlCol="0">
+                  <a:spAutoFit/>
+                </a:bodyPr>
+                <a:lstStyle/>
+                <a:p>
+                  <a14:m>
+                    <m:oMathPara xmlns:m="http://schemas.openxmlformats.org/officeDocument/2006/math">
+                      <m:oMathParaPr>
+                        <m:jc m:val="centerGroup"/>
+                      </m:oMathParaPr>
+                      <m:oMath xmlns:m="http://schemas.openxmlformats.org/officeDocument/2006/math">
+                        <m:r>
+                          <a:rPr lang="fr-FR" b="0" i="1" smtClean="0">
+                            <a:solidFill>
+                              <a:srgbClr val="F8766D"/>
+                            </a:solidFill>
+                            <a:latin typeface="Cambria Math" panose="02040503050406030204" pitchFamily="18" charset="0"/>
+                          </a:rPr>
+                          <m:t>𝑐</m:t>
+                        </m:r>
+                      </m:oMath>
+                    </m:oMathPara>
+                  </a14:m>
+                  <a:endParaRPr lang="fr-FR" dirty="0">
+                    <a:solidFill>
+                      <a:srgbClr val="F8766D"/>
+                    </a:solidFill>
+                  </a:endParaRPr>
+                </a:p>
+              </p:txBody>
+            </p:sp>
+          </mc:Choice>
+          <mc:Fallback>
+            <p:sp>
+              <p:nvSpPr>
+                <p:cNvPr id="97" name="ZoneTexte 96">
+                  <a:extLst>
+                    <a:ext uri="{FF2B5EF4-FFF2-40B4-BE49-F238E27FC236}">
+                      <a16:creationId xmlns:a16="http://schemas.microsoft.com/office/drawing/2014/main" id="{34B60274-D60F-4ACC-B60C-54117510C3ED}"/>
+                    </a:ext>
+                  </a:extLst>
+                </p:cNvPr>
+                <p:cNvSpPr txBox="1">
+                  <a:spLocks noRot="1" noChangeAspect="1" noMove="1" noResize="1" noEditPoints="1" noAdjustHandles="1" noChangeArrowheads="1" noChangeShapeType="1" noTextEdit="1"/>
+                </p:cNvSpPr>
+                <p:nvPr/>
+              </p:nvSpPr>
+              <p:spPr>
+                <a:xfrm>
+                  <a:off x="3521765" y="4856050"/>
+                  <a:ext cx="322049" cy="369332"/>
+                </a:xfrm>
+                <a:prstGeom prst="rect">
+                  <a:avLst/>
+                </a:prstGeom>
+                <a:blipFill>
+                  <a:blip r:embed="rId3"/>
+                  <a:stretch>
+                    <a:fillRect/>
+                  </a:stretch>
+                </a:blipFill>
+              </p:spPr>
+              <p:txBody>
+                <a:bodyPr/>
+                <a:lstStyle/>
+                <a:p>
+                  <a:r>
+                    <a:rPr lang="fr-FR">
+                      <a:noFill/>
+                    </a:rPr>
+                    <a:t> </a:t>
+                  </a:r>
+                </a:p>
+              </p:txBody>
+            </p:sp>
+          </mc:Fallback>
+        </mc:AlternateContent>
+        <p:sp>
+          <p:nvSpPr>
+            <p:cNvPr id="53" name="Accolade ouvrante 52">
+              <a:extLst>
+                <a:ext uri="{FF2B5EF4-FFF2-40B4-BE49-F238E27FC236}">
+                  <a16:creationId xmlns:a16="http://schemas.microsoft.com/office/drawing/2014/main" id="{A964BEA8-A939-45AC-A5D7-B91899431824}"/>
+                </a:ext>
+              </a:extLst>
+            </p:cNvPr>
+            <p:cNvSpPr/>
+            <p:nvPr/>
+          </p:nvSpPr>
+          <p:spPr>
+            <a:xfrm>
+              <a:off x="2418144" y="4700133"/>
+              <a:ext cx="274884" cy="1459690"/>
+            </a:xfrm>
+            <a:prstGeom prst="leftBrace">
+              <a:avLst/>
+            </a:prstGeom>
+          </p:spPr>
+          <p:style>
+            <a:lnRef idx="1">
+              <a:schemeClr val="dk1"/>
+            </a:lnRef>
+            <a:fillRef idx="0">
+              <a:schemeClr val="dk1"/>
+            </a:fillRef>
+            <a:effectRef idx="0">
+              <a:schemeClr val="dk1"/>
+            </a:effectRef>
+            <a:fontRef idx="minor">
+              <a:schemeClr val="tx1"/>
+            </a:fontRef>
+          </p:style>
+          <p:txBody>
+            <a:bodyPr rtlCol="0" anchor="ctr"/>
+            <a:lstStyle/>
+            <a:p>
+              <a:pPr algn="ctr"/>
+              <a:endParaRPr lang="fr-FR"/>
+            </a:p>
+          </p:txBody>
+        </p:sp>
+        <p:grpSp>
+          <p:nvGrpSpPr>
+            <p:cNvPr id="164" name="Groupe 163">
+              <a:extLst>
+                <a:ext uri="{FF2B5EF4-FFF2-40B4-BE49-F238E27FC236}">
+                  <a16:creationId xmlns:a16="http://schemas.microsoft.com/office/drawing/2014/main" id="{2113862A-43EC-4766-9BAA-7E4B3F7E6DE9}"/>
+                </a:ext>
+              </a:extLst>
+            </p:cNvPr>
+            <p:cNvGrpSpPr/>
+            <p:nvPr/>
+          </p:nvGrpSpPr>
+          <p:grpSpPr>
+            <a:xfrm>
+              <a:off x="117446" y="4700133"/>
+              <a:ext cx="2108245" cy="1971418"/>
+              <a:chOff x="109245" y="4546829"/>
+              <a:chExt cx="2108245" cy="1971418"/>
+            </a:xfrm>
+          </p:grpSpPr>
+          <p:sp>
+            <p:nvSpPr>
+              <p:cNvPr id="54" name="Rectangle 53">
+                <a:extLst>
+                  <a:ext uri="{FF2B5EF4-FFF2-40B4-BE49-F238E27FC236}">
+                    <a16:creationId xmlns:a16="http://schemas.microsoft.com/office/drawing/2014/main" id="{02F02582-5B4C-43FE-9CE1-FCACB813AB07}"/>
+                  </a:ext>
+                </a:extLst>
+              </p:cNvPr>
+              <p:cNvSpPr/>
+              <p:nvPr/>
+            </p:nvSpPr>
+            <p:spPr>
+              <a:xfrm>
+                <a:off x="109245" y="4546829"/>
+                <a:ext cx="2108245" cy="1971418"/>
+              </a:xfrm>
+              <a:prstGeom prst="rect">
+                <a:avLst/>
+              </a:prstGeom>
+              <a:solidFill>
+                <a:schemeClr val="accent4">
+                  <a:lumMod val="20000"/>
+                  <a:lumOff val="80000"/>
+                </a:schemeClr>
+              </a:solidFill>
+              <a:ln>
+                <a:solidFill>
+                  <a:schemeClr val="tx1"/>
+                </a:solidFill>
+              </a:ln>
+            </p:spPr>
+            <p:style>
+              <a:lnRef idx="2">
+                <a:schemeClr val="accent1">
+                  <a:shade val="50000"/>
+                </a:schemeClr>
+              </a:lnRef>
+              <a:fillRef idx="1">
+                <a:schemeClr val="accent1"/>
+              </a:fillRef>
+              <a:effectRef idx="0">
+                <a:schemeClr val="accent1"/>
+              </a:effectRef>
+              <a:fontRef idx="minor">
+                <a:schemeClr val="lt1"/>
+              </a:fontRef>
+            </p:style>
+            <p:txBody>
+              <a:bodyPr rtlCol="0" anchor="ctr"/>
+              <a:lstStyle/>
+              <a:p>
+                <a:pPr algn="ctr"/>
+                <a:endParaRPr lang="fr-FR"/>
+              </a:p>
+            </p:txBody>
+          </p:sp>
+          <mc:AlternateContent xmlns:mc="http://schemas.openxmlformats.org/markup-compatibility/2006">
+            <mc:Choice xmlns:a14="http://schemas.microsoft.com/office/drawing/2010/main" Requires="a14">
+              <p:sp>
+                <p:nvSpPr>
+                  <p:cNvPr id="57" name="ZoneTexte 56">
+                    <a:extLst>
+                      <a:ext uri="{FF2B5EF4-FFF2-40B4-BE49-F238E27FC236}">
+                        <a16:creationId xmlns:a16="http://schemas.microsoft.com/office/drawing/2014/main" id="{370D6FAF-FB02-48C3-92DE-E0AA5746C308}"/>
+                      </a:ext>
+                    </a:extLst>
+                  </p:cNvPr>
+                  <p:cNvSpPr txBox="1"/>
+                  <p:nvPr/>
+                </p:nvSpPr>
+                <p:spPr>
+                  <a:xfrm>
+                    <a:off x="207540" y="4574292"/>
+                    <a:ext cx="1903054" cy="1826013"/>
+                  </a:xfrm>
+                  <a:prstGeom prst="rect">
+                    <a:avLst/>
+                  </a:prstGeom>
+                  <a:noFill/>
+                </p:spPr>
+                <p:txBody>
+                  <a:bodyPr wrap="square" rtlCol="0">
+                    <a:spAutoFit/>
+                  </a:bodyPr>
+                  <a:lstStyle/>
+                  <a:p>
+                    <a:pPr algn="ctr"/>
+                    <a:r>
+                      <a:rPr lang="fr-FR" sz="1050" u="sng" dirty="0"/>
+                      <a:t>Measurment model:</a:t>
+                    </a:r>
+                    <a:r>
+                      <a:rPr lang="fr-FR" sz="1050" dirty="0"/>
+                      <a:t> </a:t>
+                    </a:r>
+                    <a:r>
+                      <a:rPr lang="fr-FR" sz="1050" dirty="0" err="1"/>
+                      <a:t>from</a:t>
+                    </a:r>
+                    <a:r>
+                      <a:rPr lang="fr-FR" sz="1050" dirty="0"/>
+                      <a:t> original fPC1 to latent variables (VL) and vice-versa</a:t>
+                    </a:r>
+                    <a:br>
+                      <a:rPr lang="fr-FR" sz="1050" dirty="0"/>
+                    </a:br>
+                    <a:br>
+                      <a:rPr lang="fr-FR" sz="1050" dirty="0"/>
+                    </a:br>
+                    <a:r>
+                      <a:rPr lang="fr-FR" sz="1050" dirty="0" err="1"/>
+                      <a:t>example</a:t>
+                    </a:r>
+                    <a:r>
+                      <a:rPr lang="fr-FR" sz="1050" dirty="0"/>
+                      <a:t> </a:t>
+                    </a:r>
+                    <a:r>
+                      <a:rPr lang="fr-FR" sz="1050" dirty="0" err="1"/>
+                      <a:t>with</a:t>
+                    </a:r>
+                    <a:r>
+                      <a:rPr lang="fr-FR" sz="1050" dirty="0"/>
+                      <a:t> </a:t>
+                    </a:r>
+                    <a:r>
+                      <a:rPr lang="fr-FR" sz="1050" dirty="0" err="1">
+                        <a:solidFill>
+                          <a:srgbClr val="E76BF3"/>
+                        </a:solidFill>
+                      </a:rPr>
+                      <a:t>Humans</a:t>
+                    </a:r>
+                    <a:r>
+                      <a:rPr lang="fr-FR" sz="1050" dirty="0"/>
+                      <a:t> block</a:t>
+                    </a:r>
+                  </a:p>
+                  <a:p>
+                    <a:pPr algn="ctr"/>
+                    <a:endParaRPr lang="fr-FR" sz="1050" u="sng" dirty="0"/>
+                  </a:p>
+                  <a:p>
+                    <a:pPr algn="ctr"/>
+                    <a14:m>
+                      <m:oMathPara xmlns:m="http://schemas.openxmlformats.org/officeDocument/2006/math">
+                        <m:oMathParaPr>
+                          <m:jc m:val="centerGroup"/>
+                        </m:oMathParaPr>
+                        <m:oMath xmlns:m="http://schemas.openxmlformats.org/officeDocument/2006/math">
+                          <m:d>
+                            <m:dPr>
+                              <m:begChr m:val="{"/>
+                              <m:endChr m:val=""/>
+                              <m:ctrlPr>
+                                <a:rPr lang="fr-FR" sz="1050" i="1" smtClean="0">
+                                  <a:latin typeface="Cambria Math" panose="02040503050406030204" pitchFamily="18" charset="0"/>
+                                </a:rPr>
+                              </m:ctrlPr>
+                            </m:dPr>
+                            <m:e>
+                              <m:eqArr>
+                                <m:eqArrPr>
+                                  <m:ctrlPr>
+                                    <a:rPr lang="fr-FR" sz="1050" i="1" smtClean="0">
+                                      <a:latin typeface="Cambria Math" panose="02040503050406030204" pitchFamily="18" charset="0"/>
+                                    </a:rPr>
+                                  </m:ctrlPr>
+                                </m:eqArrPr>
+                                <m:e>
+                                  <m:sSub>
+                                    <m:sSubPr>
+                                      <m:ctrlPr>
+                                        <a:rPr lang="fr-FR" sz="1050" i="1" smtClean="0">
+                                          <a:solidFill>
+                                            <a:srgbClr val="E76BF3"/>
+                                          </a:solidFill>
+                                          <a:latin typeface="Cambria Math" panose="02040503050406030204" pitchFamily="18" charset="0"/>
+                                        </a:rPr>
+                                      </m:ctrlPr>
+                                    </m:sSubPr>
+                                    <m:e>
+                                      <m:r>
+                                        <a:rPr lang="fr-FR" sz="1050" b="0" i="1" smtClean="0">
+                                          <a:solidFill>
+                                            <a:srgbClr val="E76BF3"/>
+                                          </a:solidFill>
+                                          <a:latin typeface="Cambria Math" panose="02040503050406030204" pitchFamily="18" charset="0"/>
+                                        </a:rPr>
+                                        <m:t>𝑉𝐿</m:t>
+                                      </m:r>
+                                    </m:e>
+                                    <m:sub>
+                                      <m:r>
+                                        <a:rPr lang="fr-FR" sz="1050" b="0" i="1" smtClean="0">
+                                          <a:solidFill>
+                                            <a:srgbClr val="E76BF3"/>
+                                          </a:solidFill>
+                                          <a:latin typeface="Cambria Math" panose="02040503050406030204" pitchFamily="18" charset="0"/>
+                                        </a:rPr>
+                                        <m:t>𝐻𝑢𝑚𝑎𝑛𝑠</m:t>
+                                      </m:r>
+                                    </m:sub>
+                                  </m:sSub>
+                                  <m:r>
+                                    <a:rPr lang="fr-FR" sz="1050" b="0" i="1" smtClean="0">
+                                      <a:latin typeface="Cambria Math" panose="02040503050406030204" pitchFamily="18" charset="0"/>
+                                    </a:rPr>
+                                    <m:t>= </m:t>
+                                  </m:r>
+                                  <m:nary>
+                                    <m:naryPr>
+                                      <m:chr m:val="∑"/>
+                                      <m:ctrlPr>
+                                        <a:rPr lang="fr-FR" sz="1050" b="0" i="1" smtClean="0">
+                                          <a:latin typeface="Cambria Math" panose="02040503050406030204" pitchFamily="18" charset="0"/>
+                                        </a:rPr>
+                                      </m:ctrlPr>
+                                    </m:naryPr>
+                                    <m:sub>
+                                      <m:r>
+                                        <m:rPr>
+                                          <m:brk m:alnAt="23"/>
+                                        </m:rPr>
+                                        <a:rPr lang="fr-FR" sz="1050" b="0" i="1" smtClean="0">
+                                          <a:latin typeface="Cambria Math" panose="02040503050406030204" pitchFamily="18" charset="0"/>
+                                        </a:rPr>
+                                        <m:t>𝑖</m:t>
+                                      </m:r>
+                                      <m:r>
+                                        <a:rPr lang="fr-FR" sz="1050" b="0" i="1" smtClean="0">
+                                          <a:latin typeface="Cambria Math" panose="02040503050406030204" pitchFamily="18" charset="0"/>
+                                        </a:rPr>
+                                        <m:t>=1</m:t>
+                                      </m:r>
+                                    </m:sub>
+                                    <m:sup>
+                                      <m:r>
+                                        <a:rPr lang="fr-FR" sz="1050" b="0" i="1" smtClean="0">
+                                          <a:latin typeface="Cambria Math" panose="02040503050406030204" pitchFamily="18" charset="0"/>
+                                        </a:rPr>
+                                        <m:t>𝑝</m:t>
+                                      </m:r>
+                                    </m:sup>
+                                    <m:e>
+                                      <m:sSub>
+                                        <m:sSubPr>
+                                          <m:ctrlPr>
+                                            <a:rPr lang="fr-FR" sz="1050" b="0" i="1" smtClean="0">
+                                              <a:solidFill>
+                                                <a:srgbClr val="E76BF3"/>
+                                              </a:solidFill>
+                                              <a:latin typeface="Cambria Math" panose="02040503050406030204" pitchFamily="18" charset="0"/>
+                                            </a:rPr>
+                                          </m:ctrlPr>
+                                        </m:sSubPr>
+                                        <m:e>
+                                          <m:r>
+                                            <a:rPr lang="fr-FR" sz="1050" b="0" i="1" smtClean="0">
+                                              <a:solidFill>
+                                                <a:srgbClr val="E76BF3"/>
+                                              </a:solidFill>
+                                              <a:latin typeface="Cambria Math" panose="02040503050406030204" pitchFamily="18" charset="0"/>
+                                            </a:rPr>
+                                            <m:t>𝑤</m:t>
+                                          </m:r>
+                                        </m:e>
+                                        <m:sub>
+                                          <m:r>
+                                            <a:rPr lang="fr-FR" sz="1050" b="0" i="1" smtClean="0">
+                                              <a:solidFill>
+                                                <a:srgbClr val="E76BF3"/>
+                                              </a:solidFill>
+                                              <a:latin typeface="Cambria Math" panose="02040503050406030204" pitchFamily="18" charset="0"/>
+                                            </a:rPr>
+                                            <m:t>𝑖</m:t>
+                                          </m:r>
+                                        </m:sub>
+                                      </m:sSub>
+                                      <m:sSub>
+                                        <m:sSubPr>
+                                          <m:ctrlPr>
+                                            <a:rPr lang="fr-FR" sz="1050" b="0" i="1" smtClean="0">
+                                              <a:solidFill>
+                                                <a:srgbClr val="E76BF3"/>
+                                              </a:solidFill>
+                                              <a:latin typeface="Cambria Math" panose="02040503050406030204" pitchFamily="18" charset="0"/>
+                                            </a:rPr>
+                                          </m:ctrlPr>
+                                        </m:sSubPr>
+                                        <m:e>
+                                          <m:r>
+                                            <a:rPr lang="fr-FR" sz="1050" b="0" i="1" smtClean="0">
+                                              <a:solidFill>
+                                                <a:srgbClr val="E76BF3"/>
+                                              </a:solidFill>
+                                              <a:latin typeface="Cambria Math" panose="02040503050406030204" pitchFamily="18" charset="0"/>
+                                            </a:rPr>
+                                            <m:t>𝑓𝑃𝐶</m:t>
+                                          </m:r>
+                                          <m:r>
+                                            <a:rPr lang="fr-FR" sz="1050" b="0" i="1" smtClean="0">
+                                              <a:solidFill>
+                                                <a:srgbClr val="E76BF3"/>
+                                              </a:solidFill>
+                                              <a:latin typeface="Cambria Math" panose="02040503050406030204" pitchFamily="18" charset="0"/>
+                                            </a:rPr>
+                                            <m:t>1</m:t>
+                                          </m:r>
+                                        </m:e>
+                                        <m:sub>
+                                          <m:r>
+                                            <a:rPr lang="fr-FR" sz="1050" b="0" i="1" smtClean="0">
+                                              <a:solidFill>
+                                                <a:srgbClr val="E76BF3"/>
+                                              </a:solidFill>
+                                              <a:latin typeface="Cambria Math" panose="02040503050406030204" pitchFamily="18" charset="0"/>
+                                            </a:rPr>
+                                            <m:t>𝑖</m:t>
+                                          </m:r>
+                                        </m:sub>
+                                      </m:sSub>
+                                    </m:e>
+                                  </m:nary>
+                                </m:e>
+                                <m:e>
+                                  <m:sSub>
+                                    <m:sSubPr>
+                                      <m:ctrlPr>
+                                        <a:rPr lang="fr-FR" sz="1050" i="1" smtClean="0">
+                                          <a:solidFill>
+                                            <a:srgbClr val="E76BF3"/>
+                                          </a:solidFill>
+                                          <a:latin typeface="Cambria Math" panose="02040503050406030204" pitchFamily="18" charset="0"/>
+                                        </a:rPr>
+                                      </m:ctrlPr>
+                                    </m:sSubPr>
+                                    <m:e>
+                                      <m:r>
+                                        <a:rPr lang="fr-FR" sz="1050" b="0" i="1" smtClean="0">
+                                          <a:solidFill>
+                                            <a:srgbClr val="E76BF3"/>
+                                          </a:solidFill>
+                                          <a:latin typeface="Cambria Math" panose="02040503050406030204" pitchFamily="18" charset="0"/>
+                                        </a:rPr>
+                                        <m:t>𝑓𝑃𝐶</m:t>
+                                      </m:r>
+                                      <m:r>
+                                        <a:rPr lang="fr-FR" sz="1050" b="0" i="1" smtClean="0">
+                                          <a:solidFill>
+                                            <a:srgbClr val="E76BF3"/>
+                                          </a:solidFill>
+                                          <a:latin typeface="Cambria Math" panose="02040503050406030204" pitchFamily="18" charset="0"/>
+                                        </a:rPr>
+                                        <m:t>1</m:t>
+                                      </m:r>
+                                    </m:e>
+                                    <m:sub>
+                                      <m:r>
+                                        <a:rPr lang="fr-FR" sz="1050" b="0" i="1" smtClean="0">
+                                          <a:solidFill>
+                                            <a:srgbClr val="E76BF3"/>
+                                          </a:solidFill>
+                                          <a:latin typeface="Cambria Math" panose="02040503050406030204" pitchFamily="18" charset="0"/>
+                                        </a:rPr>
+                                        <m:t>𝑖</m:t>
+                                      </m:r>
+                                    </m:sub>
+                                  </m:sSub>
+                                  <m:r>
+                                    <a:rPr lang="fr-FR" sz="1050" b="0" i="1" smtClean="0">
+                                      <a:latin typeface="Cambria Math" panose="02040503050406030204" pitchFamily="18" charset="0"/>
+                                    </a:rPr>
+                                    <m:t>=</m:t>
+                                  </m:r>
+                                  <m:sSub>
+                                    <m:sSubPr>
+                                      <m:ctrlPr>
+                                        <a:rPr lang="fr-FR" sz="1050" b="0" i="1" smtClean="0">
+                                          <a:solidFill>
+                                            <a:srgbClr val="E76BF3"/>
+                                          </a:solidFill>
+                                          <a:latin typeface="Cambria Math" panose="02040503050406030204" pitchFamily="18" charset="0"/>
+                                        </a:rPr>
+                                      </m:ctrlPr>
+                                    </m:sSubPr>
+                                    <m:e>
+                                      <m:r>
+                                        <a:rPr lang="fr-FR" sz="1050" b="0" i="1" smtClean="0">
+                                          <a:solidFill>
+                                            <a:srgbClr val="E76BF3"/>
+                                          </a:solidFill>
+                                          <a:latin typeface="Cambria Math" panose="02040503050406030204" pitchFamily="18" charset="0"/>
+                                        </a:rPr>
+                                        <m:t>𝑐</m:t>
+                                      </m:r>
+                                    </m:e>
+                                    <m:sub>
+                                      <m:r>
+                                        <a:rPr lang="fr-FR" sz="1050" b="0" i="1" smtClean="0">
+                                          <a:solidFill>
+                                            <a:srgbClr val="E76BF3"/>
+                                          </a:solidFill>
+                                          <a:latin typeface="Cambria Math" panose="02040503050406030204" pitchFamily="18" charset="0"/>
+                                        </a:rPr>
+                                        <m:t>𝑖</m:t>
+                                      </m:r>
+                                    </m:sub>
+                                  </m:sSub>
+                                  <m:r>
+                                    <a:rPr lang="fr-FR" sz="1050" b="0" i="1" smtClean="0">
+                                      <a:solidFill>
+                                        <a:srgbClr val="E76BF3"/>
+                                      </a:solidFill>
+                                      <a:latin typeface="Cambria Math" panose="02040503050406030204" pitchFamily="18" charset="0"/>
+                                    </a:rPr>
+                                    <m:t>∗</m:t>
+                                  </m:r>
+                                  <m:sSub>
+                                    <m:sSubPr>
+                                      <m:ctrlPr>
+                                        <a:rPr lang="fr-FR" sz="1050" i="1">
+                                          <a:solidFill>
+                                            <a:srgbClr val="E76BF3"/>
+                                          </a:solidFill>
+                                          <a:latin typeface="Cambria Math" panose="02040503050406030204" pitchFamily="18" charset="0"/>
+                                        </a:rPr>
+                                      </m:ctrlPr>
+                                    </m:sSubPr>
+                                    <m:e>
+                                      <m:r>
+                                        <a:rPr lang="fr-FR" sz="1050" i="1">
+                                          <a:solidFill>
+                                            <a:srgbClr val="E76BF3"/>
+                                          </a:solidFill>
+                                          <a:latin typeface="Cambria Math" panose="02040503050406030204" pitchFamily="18" charset="0"/>
+                                        </a:rPr>
+                                        <m:t>𝑉𝐿</m:t>
+                                      </m:r>
+                                    </m:e>
+                                    <m:sub>
+                                      <m:r>
+                                        <a:rPr lang="fr-FR" sz="1050" i="1">
+                                          <a:solidFill>
+                                            <a:srgbClr val="E76BF3"/>
+                                          </a:solidFill>
+                                          <a:latin typeface="Cambria Math" panose="02040503050406030204" pitchFamily="18" charset="0"/>
+                                        </a:rPr>
+                                        <m:t>𝐻𝑢𝑚𝑎𝑛𝑠</m:t>
+                                      </m:r>
+                                    </m:sub>
+                                  </m:sSub>
+                                </m:e>
+                                <m:e>
+                                  <m:r>
+                                    <a:rPr lang="fr-FR" sz="1050" b="0" i="1" smtClean="0">
+                                      <a:latin typeface="Cambria Math" panose="02040503050406030204" pitchFamily="18" charset="0"/>
+                                    </a:rPr>
+                                    <m:t>…</m:t>
+                                  </m:r>
+                                </m:e>
+                              </m:eqArr>
+                            </m:e>
+                          </m:d>
+                        </m:oMath>
+                      </m:oMathPara>
+                    </a14:m>
+                    <a:endParaRPr lang="fr-FR" sz="1050" dirty="0"/>
+                  </a:p>
+                </p:txBody>
+              </p:sp>
+            </mc:Choice>
+            <mc:Fallback>
+              <p:sp>
+                <p:nvSpPr>
+                  <p:cNvPr id="57" name="ZoneTexte 56">
+                    <a:extLst>
+                      <a:ext uri="{FF2B5EF4-FFF2-40B4-BE49-F238E27FC236}">
+                        <a16:creationId xmlns:a16="http://schemas.microsoft.com/office/drawing/2014/main" id="{370D6FAF-FB02-48C3-92DE-E0AA5746C308}"/>
+                      </a:ext>
+                    </a:extLst>
+                  </p:cNvPr>
+                  <p:cNvSpPr txBox="1">
+                    <a:spLocks noRot="1" noChangeAspect="1" noMove="1" noResize="1" noEditPoints="1" noAdjustHandles="1" noChangeArrowheads="1" noChangeShapeType="1" noTextEdit="1"/>
+                  </p:cNvSpPr>
+                  <p:nvPr/>
+                </p:nvSpPr>
+                <p:spPr>
+                  <a:xfrm>
+                    <a:off x="207540" y="4574292"/>
+                    <a:ext cx="1903054" cy="1826013"/>
+                  </a:xfrm>
+                  <a:prstGeom prst="rect">
+                    <a:avLst/>
+                  </a:prstGeom>
+                  <a:blipFill>
+                    <a:blip r:embed="rId4"/>
+                    <a:stretch>
+                      <a:fillRect/>
+                    </a:stretch>
+                  </a:blipFill>
+                </p:spPr>
+                <p:txBody>
+                  <a:bodyPr/>
+                  <a:lstStyle/>
+                  <a:p>
+                    <a:r>
+                      <a:rPr lang="fr-FR">
+                        <a:noFill/>
+                      </a:rPr>
+                      <a:t> </a:t>
+                    </a:r>
+                  </a:p>
+                </p:txBody>
+              </p:sp>
+            </mc:Fallback>
+          </mc:AlternateContent>
+        </p:grpSp>
+        <p:sp>
+          <p:nvSpPr>
+            <p:cNvPr id="59" name="ZoneTexte 58">
+              <a:extLst>
+                <a:ext uri="{FF2B5EF4-FFF2-40B4-BE49-F238E27FC236}">
+                  <a16:creationId xmlns:a16="http://schemas.microsoft.com/office/drawing/2014/main" id="{023AF70D-67A1-4806-A53A-863848F6D5AA}"/>
+                </a:ext>
+              </a:extLst>
+            </p:cNvPr>
+            <p:cNvSpPr txBox="1"/>
+            <p:nvPr/>
+          </p:nvSpPr>
+          <p:spPr>
+            <a:xfrm>
+              <a:off x="3177511" y="3355376"/>
+              <a:ext cx="433312" cy="369332"/>
+            </a:xfrm>
+            <a:prstGeom prst="rect">
+              <a:avLst/>
+            </a:prstGeom>
+            <a:noFill/>
+          </p:spPr>
+          <p:txBody>
+            <a:bodyPr wrap="square" rtlCol="0">
+              <a:spAutoFit/>
+            </a:bodyPr>
+            <a:lstStyle/>
+            <a:p>
+              <a:r>
+                <a:rPr lang="fr-FR" dirty="0">
+                  <a:solidFill>
+                    <a:srgbClr val="F8766D"/>
+                  </a:solidFill>
+                </a:rPr>
+                <a:t>VL</a:t>
+              </a:r>
+            </a:p>
+          </p:txBody>
+        </p:sp>
+        <p:grpSp>
+          <p:nvGrpSpPr>
+            <p:cNvPr id="127" name="Groupe 126">
+              <a:extLst>
+                <a:ext uri="{FF2B5EF4-FFF2-40B4-BE49-F238E27FC236}">
+                  <a16:creationId xmlns:a16="http://schemas.microsoft.com/office/drawing/2014/main" id="{A108C9C0-BD20-43BD-909B-4D0E185BD2DB}"/>
+                </a:ext>
+              </a:extLst>
+            </p:cNvPr>
+            <p:cNvGrpSpPr/>
+            <p:nvPr/>
+          </p:nvGrpSpPr>
+          <p:grpSpPr>
+            <a:xfrm>
+              <a:off x="4157248" y="3374562"/>
+              <a:ext cx="1088464" cy="2651142"/>
+              <a:chOff x="10454789" y="3355376"/>
+              <a:chExt cx="1088464" cy="2651142"/>
+            </a:xfrm>
+          </p:grpSpPr>
+          <p:sp>
+            <p:nvSpPr>
+              <p:cNvPr id="4" name="Rectangle 3">
+                <a:extLst>
+                  <a:ext uri="{FF2B5EF4-FFF2-40B4-BE49-F238E27FC236}">
+                    <a16:creationId xmlns:a16="http://schemas.microsoft.com/office/drawing/2014/main" id="{A992EBD8-A7E1-44AD-8244-ED10E8F0F5D1}"/>
+                  </a:ext>
+                </a:extLst>
+              </p:cNvPr>
+              <p:cNvSpPr/>
+              <p:nvPr/>
+            </p:nvSpPr>
+            <p:spPr>
+              <a:xfrm>
+                <a:off x="10454789" y="5463537"/>
+                <a:ext cx="1088464" cy="542981"/>
+              </a:xfrm>
+              <a:prstGeom prst="rect">
+                <a:avLst/>
+              </a:prstGeom>
+              <a:solidFill>
+                <a:srgbClr val="A3A500"/>
+              </a:solidFill>
+              <a:ln>
+                <a:solidFill>
+                  <a:schemeClr val="tx1"/>
+                </a:solidFill>
+              </a:ln>
+            </p:spPr>
+            <p:style>
+              <a:lnRef idx="2">
+                <a:schemeClr val="accent5">
+                  <a:shade val="50000"/>
+                </a:schemeClr>
+              </a:lnRef>
+              <a:fillRef idx="1">
+                <a:schemeClr val="accent5"/>
+              </a:fillRef>
+              <a:effectRef idx="0">
+                <a:schemeClr val="accent5"/>
+              </a:effectRef>
+              <a:fontRef idx="minor">
+                <a:schemeClr val="lt1"/>
+              </a:fontRef>
+            </p:style>
+            <p:txBody>
+              <a:bodyPr rtlCol="0" anchor="ctr"/>
+              <a:lstStyle/>
+              <a:p>
+                <a:pPr algn="ctr"/>
+                <a:r>
+                  <a:rPr lang="fr-FR" dirty="0"/>
+                  <a:t>AMC</a:t>
+                </a:r>
+              </a:p>
+            </p:txBody>
+          </p:sp>
+          <p:sp>
+            <p:nvSpPr>
+              <p:cNvPr id="72" name="Rectangle 71">
+                <a:extLst>
+                  <a:ext uri="{FF2B5EF4-FFF2-40B4-BE49-F238E27FC236}">
+                    <a16:creationId xmlns:a16="http://schemas.microsoft.com/office/drawing/2014/main" id="{77EE9CD6-912B-4877-A259-386D7A86B421}"/>
+                  </a:ext>
+                </a:extLst>
+              </p:cNvPr>
+              <p:cNvSpPr/>
+              <p:nvPr/>
+            </p:nvSpPr>
+            <p:spPr>
+              <a:xfrm>
+                <a:off x="10877053" y="3724709"/>
+                <a:ext cx="243936" cy="855680"/>
+              </a:xfrm>
+              <a:prstGeom prst="rect">
+                <a:avLst/>
+              </a:prstGeom>
+              <a:solidFill>
+                <a:srgbClr val="A3A500"/>
+              </a:solidFill>
+              <a:ln>
+                <a:solidFill>
+                  <a:schemeClr val="tx1"/>
+                </a:solidFill>
+              </a:ln>
+            </p:spPr>
+            <p:style>
+              <a:lnRef idx="2">
+                <a:schemeClr val="accent1">
+                  <a:shade val="50000"/>
+                </a:schemeClr>
+              </a:lnRef>
+              <a:fillRef idx="1">
+                <a:schemeClr val="accent1"/>
+              </a:fillRef>
+              <a:effectRef idx="0">
+                <a:schemeClr val="accent1"/>
+              </a:effectRef>
+              <a:fontRef idx="minor">
+                <a:schemeClr val="lt1"/>
+              </a:fontRef>
+            </p:style>
+            <p:txBody>
+              <a:bodyPr rtlCol="0" anchor="ctr"/>
+              <a:lstStyle/>
+              <a:p>
+                <a:pPr algn="ctr"/>
+                <a:endParaRPr lang="fr-FR"/>
+              </a:p>
+            </p:txBody>
+          </p:sp>
+          <p:cxnSp>
+            <p:nvCxnSpPr>
+              <p:cNvPr id="90" name="Connecteur droit avec flèche 89">
+                <a:extLst>
+                  <a:ext uri="{FF2B5EF4-FFF2-40B4-BE49-F238E27FC236}">
+                    <a16:creationId xmlns:a16="http://schemas.microsoft.com/office/drawing/2014/main" id="{6945BB37-A1B5-4465-9C47-47BC95240F8E}"/>
+                  </a:ext>
+                </a:extLst>
+              </p:cNvPr>
+              <p:cNvCxnSpPr/>
+              <p:nvPr/>
+            </p:nvCxnSpPr>
+            <p:spPr>
+              <a:xfrm flipV="1">
+                <a:off x="10877053" y="4557520"/>
+                <a:ext cx="0" cy="849591"/>
+              </a:xfrm>
+              <a:prstGeom prst="straightConnector1">
+                <a:avLst/>
+              </a:prstGeom>
+              <a:ln>
+                <a:solidFill>
+                  <a:schemeClr val="tx1"/>
+                </a:solidFill>
+                <a:tailEnd type="triangle"/>
+              </a:ln>
+            </p:spPr>
+            <p:style>
+              <a:lnRef idx="1">
+                <a:schemeClr val="accent1"/>
+              </a:lnRef>
+              <a:fillRef idx="0">
+                <a:schemeClr val="accent1"/>
+              </a:fillRef>
+              <a:effectRef idx="0">
+                <a:schemeClr val="accent1"/>
+              </a:effectRef>
+              <a:fontRef idx="minor">
+                <a:schemeClr val="tx1"/>
+              </a:fontRef>
+            </p:style>
+          </p:cxnSp>
+          <p:cxnSp>
+            <p:nvCxnSpPr>
+              <p:cNvPr id="91" name="Connecteur droit avec flèche 90">
+                <a:extLst>
+                  <a:ext uri="{FF2B5EF4-FFF2-40B4-BE49-F238E27FC236}">
+                    <a16:creationId xmlns:a16="http://schemas.microsoft.com/office/drawing/2014/main" id="{935F8801-AA26-42C5-827A-81FCCECD5B95}"/>
+                  </a:ext>
+                </a:extLst>
+              </p:cNvPr>
+              <p:cNvCxnSpPr>
+                <a:cxnSpLocks/>
+              </p:cNvCxnSpPr>
+              <p:nvPr/>
+            </p:nvCxnSpPr>
+            <p:spPr>
+              <a:xfrm>
+                <a:off x="11120989" y="4597166"/>
+                <a:ext cx="0" cy="849591"/>
+              </a:xfrm>
+              <a:prstGeom prst="straightConnector1">
+                <a:avLst/>
+              </a:prstGeom>
+              <a:ln>
+                <a:solidFill>
+                  <a:schemeClr val="tx1"/>
+                </a:solidFill>
+                <a:tailEnd type="triangle"/>
+              </a:ln>
+            </p:spPr>
+            <p:style>
+              <a:lnRef idx="1">
+                <a:schemeClr val="accent1"/>
+              </a:lnRef>
+              <a:fillRef idx="0">
+                <a:schemeClr val="accent1"/>
+              </a:fillRef>
+              <a:effectRef idx="0">
+                <a:schemeClr val="accent1"/>
+              </a:effectRef>
+              <a:fontRef idx="minor">
+                <a:schemeClr val="tx1"/>
+              </a:fontRef>
+            </p:style>
+          </p:cxnSp>
+          <mc:AlternateContent xmlns:mc="http://schemas.openxmlformats.org/markup-compatibility/2006">
+            <mc:Choice xmlns:a14="http://schemas.microsoft.com/office/drawing/2010/main" Requires="a14">
+              <p:sp>
+                <p:nvSpPr>
+                  <p:cNvPr id="113" name="ZoneTexte 112">
+                    <a:extLst>
+                      <a:ext uri="{FF2B5EF4-FFF2-40B4-BE49-F238E27FC236}">
+                        <a16:creationId xmlns:a16="http://schemas.microsoft.com/office/drawing/2014/main" id="{475B8615-6351-4B23-A2F9-3351BD1AA9CC}"/>
+                      </a:ext>
+                    </a:extLst>
+                  </p:cNvPr>
+                  <p:cNvSpPr txBox="1"/>
+                  <p:nvPr/>
+                </p:nvSpPr>
+                <p:spPr>
+                  <a:xfrm>
+                    <a:off x="10571198" y="4856050"/>
+                    <a:ext cx="322049" cy="369332"/>
+                  </a:xfrm>
+                  <a:prstGeom prst="rect">
+                    <a:avLst/>
+                  </a:prstGeom>
+                  <a:noFill/>
+                </p:spPr>
+                <p:txBody>
+                  <a:bodyPr wrap="square" rtlCol="0">
+                    <a:spAutoFit/>
+                  </a:bodyPr>
+                  <a:lstStyle/>
+                  <a:p>
+                    <a14:m>
+                      <m:oMathPara xmlns:m="http://schemas.openxmlformats.org/officeDocument/2006/math">
+                        <m:oMathParaPr>
+                          <m:jc m:val="centerGroup"/>
+                        </m:oMathParaPr>
+                        <m:oMath xmlns:m="http://schemas.openxmlformats.org/officeDocument/2006/math">
+                          <m:r>
+                            <a:rPr lang="fr-FR" b="0" i="1" smtClean="0">
+                              <a:solidFill>
+                                <a:srgbClr val="A3A500"/>
+                              </a:solidFill>
+                              <a:latin typeface="Cambria Math" panose="02040503050406030204" pitchFamily="18" charset="0"/>
+                            </a:rPr>
+                            <m:t>𝑤</m:t>
+                          </m:r>
+                        </m:oMath>
+                      </m:oMathPara>
+                    </a14:m>
+                    <a:endParaRPr lang="fr-FR" dirty="0">
+                      <a:solidFill>
+                        <a:srgbClr val="A3A500"/>
+                      </a:solidFill>
+                    </a:endParaRPr>
+                  </a:p>
+                </p:txBody>
+              </p:sp>
+            </mc:Choice>
+            <mc:Fallback>
+              <p:sp>
+                <p:nvSpPr>
+                  <p:cNvPr id="113" name="ZoneTexte 112">
+                    <a:extLst>
+                      <a:ext uri="{FF2B5EF4-FFF2-40B4-BE49-F238E27FC236}">
+                        <a16:creationId xmlns:a16="http://schemas.microsoft.com/office/drawing/2014/main" id="{475B8615-6351-4B23-A2F9-3351BD1AA9CC}"/>
+                      </a:ext>
+                    </a:extLst>
+                  </p:cNvPr>
+                  <p:cNvSpPr txBox="1">
+                    <a:spLocks noRot="1" noChangeAspect="1" noMove="1" noResize="1" noEditPoints="1" noAdjustHandles="1" noChangeArrowheads="1" noChangeShapeType="1" noTextEdit="1"/>
+                  </p:cNvSpPr>
+                  <p:nvPr/>
+                </p:nvSpPr>
+                <p:spPr>
+                  <a:xfrm>
+                    <a:off x="10571198" y="4856050"/>
+                    <a:ext cx="322049" cy="369332"/>
+                  </a:xfrm>
+                  <a:prstGeom prst="rect">
+                    <a:avLst/>
+                  </a:prstGeom>
+                  <a:blipFill>
+                    <a:blip r:embed="rId5"/>
+                    <a:stretch>
+                      <a:fillRect/>
+                    </a:stretch>
+                  </a:blipFill>
+                </p:spPr>
+                <p:txBody>
+                  <a:bodyPr/>
+                  <a:lstStyle/>
+                  <a:p>
+                    <a:r>
+                      <a:rPr lang="fr-FR">
+                        <a:noFill/>
+                      </a:rPr>
+                      <a:t> </a:t>
+                    </a:r>
+                  </a:p>
+                </p:txBody>
+              </p:sp>
+            </mc:Fallback>
+          </mc:AlternateContent>
+          <mc:AlternateContent xmlns:mc="http://schemas.openxmlformats.org/markup-compatibility/2006">
+            <mc:Choice xmlns:a14="http://schemas.microsoft.com/office/drawing/2010/main" Requires="a14">
+              <p:sp>
+                <p:nvSpPr>
+                  <p:cNvPr id="114" name="ZoneTexte 113">
+                    <a:extLst>
+                      <a:ext uri="{FF2B5EF4-FFF2-40B4-BE49-F238E27FC236}">
+                        <a16:creationId xmlns:a16="http://schemas.microsoft.com/office/drawing/2014/main" id="{88A88D38-F5F4-49BF-99F0-1211B5058778}"/>
+                      </a:ext>
+                    </a:extLst>
+                  </p:cNvPr>
+                  <p:cNvSpPr txBox="1"/>
+                  <p:nvPr/>
+                </p:nvSpPr>
+                <p:spPr>
+                  <a:xfrm>
+                    <a:off x="11137182" y="4862260"/>
+                    <a:ext cx="322049" cy="369332"/>
+                  </a:xfrm>
+                  <a:prstGeom prst="rect">
+                    <a:avLst/>
+                  </a:prstGeom>
+                  <a:noFill/>
+                </p:spPr>
+                <p:txBody>
+                  <a:bodyPr wrap="square" rtlCol="0">
+                    <a:spAutoFit/>
+                  </a:bodyPr>
+                  <a:lstStyle/>
+                  <a:p>
+                    <a14:m>
+                      <m:oMathPara xmlns:m="http://schemas.openxmlformats.org/officeDocument/2006/math">
+                        <m:oMathParaPr>
+                          <m:jc m:val="centerGroup"/>
+                        </m:oMathParaPr>
+                        <m:oMath xmlns:m="http://schemas.openxmlformats.org/officeDocument/2006/math">
+                          <m:r>
+                            <a:rPr lang="fr-FR" b="0" i="1" smtClean="0">
+                              <a:solidFill>
+                                <a:srgbClr val="A3A500"/>
+                              </a:solidFill>
+                              <a:latin typeface="Cambria Math" panose="02040503050406030204" pitchFamily="18" charset="0"/>
+                            </a:rPr>
+                            <m:t>𝑐</m:t>
+                          </m:r>
+                        </m:oMath>
+                      </m:oMathPara>
+                    </a14:m>
+                    <a:endParaRPr lang="fr-FR" dirty="0">
+                      <a:solidFill>
+                        <a:srgbClr val="A3A500"/>
+                      </a:solidFill>
+                    </a:endParaRPr>
+                  </a:p>
+                </p:txBody>
+              </p:sp>
+            </mc:Choice>
+            <mc:Fallback>
+              <p:sp>
+                <p:nvSpPr>
+                  <p:cNvPr id="114" name="ZoneTexte 113">
+                    <a:extLst>
+                      <a:ext uri="{FF2B5EF4-FFF2-40B4-BE49-F238E27FC236}">
+                        <a16:creationId xmlns:a16="http://schemas.microsoft.com/office/drawing/2014/main" id="{88A88D38-F5F4-49BF-99F0-1211B5058778}"/>
+                      </a:ext>
+                    </a:extLst>
+                  </p:cNvPr>
+                  <p:cNvSpPr txBox="1">
+                    <a:spLocks noRot="1" noChangeAspect="1" noMove="1" noResize="1" noEditPoints="1" noAdjustHandles="1" noChangeArrowheads="1" noChangeShapeType="1" noTextEdit="1"/>
+                  </p:cNvSpPr>
+                  <p:nvPr/>
+                </p:nvSpPr>
+                <p:spPr>
+                  <a:xfrm>
+                    <a:off x="11137182" y="4862260"/>
+                    <a:ext cx="322049" cy="369332"/>
+                  </a:xfrm>
+                  <a:prstGeom prst="rect">
+                    <a:avLst/>
+                  </a:prstGeom>
+                  <a:blipFill>
+                    <a:blip r:embed="rId6"/>
+                    <a:stretch>
+                      <a:fillRect/>
+                    </a:stretch>
+                  </a:blipFill>
+                </p:spPr>
+                <p:txBody>
+                  <a:bodyPr/>
+                  <a:lstStyle/>
+                  <a:p>
+                    <a:r>
+                      <a:rPr lang="fr-FR">
+                        <a:noFill/>
+                      </a:rPr>
+                      <a:t> </a:t>
+                    </a:r>
+                  </a:p>
+                </p:txBody>
+              </p:sp>
+            </mc:Fallback>
+          </mc:AlternateContent>
+          <p:sp>
+            <p:nvSpPr>
+              <p:cNvPr id="120" name="ZoneTexte 119">
+                <a:extLst>
+                  <a:ext uri="{FF2B5EF4-FFF2-40B4-BE49-F238E27FC236}">
+                    <a16:creationId xmlns:a16="http://schemas.microsoft.com/office/drawing/2014/main" id="{34F4F719-47C3-48DD-84F1-AC93B1D768F4}"/>
+                  </a:ext>
+                </a:extLst>
+              </p:cNvPr>
+              <p:cNvSpPr txBox="1"/>
+              <p:nvPr/>
+            </p:nvSpPr>
+            <p:spPr>
+              <a:xfrm>
+                <a:off x="10793586" y="3355376"/>
+                <a:ext cx="433312" cy="369332"/>
+              </a:xfrm>
+              <a:prstGeom prst="rect">
+                <a:avLst/>
+              </a:prstGeom>
+              <a:noFill/>
+            </p:spPr>
+            <p:txBody>
+              <a:bodyPr wrap="square" rtlCol="0">
+                <a:spAutoFit/>
+              </a:bodyPr>
+              <a:lstStyle/>
+              <a:p>
+                <a:r>
+                  <a:rPr lang="fr-FR" dirty="0">
+                    <a:solidFill>
+                      <a:srgbClr val="A3A500"/>
+                    </a:solidFill>
+                  </a:rPr>
+                  <a:t>VL</a:t>
+                </a:r>
+              </a:p>
+            </p:txBody>
+          </p:sp>
+        </p:grpSp>
+        <p:grpSp>
+          <p:nvGrpSpPr>
+            <p:cNvPr id="126" name="Groupe 125">
+              <a:extLst>
+                <a:ext uri="{FF2B5EF4-FFF2-40B4-BE49-F238E27FC236}">
+                  <a16:creationId xmlns:a16="http://schemas.microsoft.com/office/drawing/2014/main" id="{A2AC77A1-A96F-4AA9-9D70-66960C2408AD}"/>
+                </a:ext>
+              </a:extLst>
+            </p:cNvPr>
+            <p:cNvGrpSpPr/>
+            <p:nvPr/>
+          </p:nvGrpSpPr>
+          <p:grpSpPr>
+            <a:xfrm>
+              <a:off x="5802201" y="3343942"/>
+              <a:ext cx="5812070" cy="2662576"/>
+              <a:chOff x="4162440" y="3343943"/>
+              <a:chExt cx="5812070" cy="2662576"/>
+            </a:xfrm>
+          </p:grpSpPr>
+          <p:cxnSp>
+            <p:nvCxnSpPr>
+              <p:cNvPr id="95" name="Connecteur droit avec flèche 94">
+                <a:extLst>
+                  <a:ext uri="{FF2B5EF4-FFF2-40B4-BE49-F238E27FC236}">
+                    <a16:creationId xmlns:a16="http://schemas.microsoft.com/office/drawing/2014/main" id="{83F75BA2-D95D-4AFE-BD3F-B585A9CCB697}"/>
+                  </a:ext>
+                </a:extLst>
+              </p:cNvPr>
+              <p:cNvCxnSpPr>
+                <a:cxnSpLocks/>
+              </p:cNvCxnSpPr>
+              <p:nvPr/>
+            </p:nvCxnSpPr>
+            <p:spPr>
+              <a:xfrm>
+                <a:off x="4881220" y="3900881"/>
+                <a:ext cx="3709678" cy="0"/>
+              </a:xfrm>
+              <a:prstGeom prst="straightConnector1">
+                <a:avLst/>
+              </a:prstGeom>
+              <a:ln>
+                <a:solidFill>
+                  <a:schemeClr val="tx1"/>
+                </a:solidFill>
+                <a:headEnd type="triangle"/>
+                <a:tailEnd type="triangle"/>
+              </a:ln>
+            </p:spPr>
+            <p:style>
+              <a:lnRef idx="1">
+                <a:schemeClr val="accent1"/>
+              </a:lnRef>
+              <a:fillRef idx="0">
+                <a:schemeClr val="accent1"/>
+              </a:fillRef>
+              <a:effectRef idx="0">
+                <a:schemeClr val="accent1"/>
+              </a:effectRef>
+              <a:fontRef idx="minor">
+                <a:schemeClr val="tx1"/>
+              </a:fontRef>
+            </p:style>
+          </p:cxnSp>
+          <p:sp>
+            <p:nvSpPr>
+              <p:cNvPr id="40" name="Rectangle 39">
+                <a:extLst>
+                  <a:ext uri="{FF2B5EF4-FFF2-40B4-BE49-F238E27FC236}">
+                    <a16:creationId xmlns:a16="http://schemas.microsoft.com/office/drawing/2014/main" id="{248E56DC-04D6-4514-8581-639195D6C8E4}"/>
+                  </a:ext>
+                </a:extLst>
+              </p:cNvPr>
+              <p:cNvSpPr/>
+              <p:nvPr/>
+            </p:nvSpPr>
+            <p:spPr>
+              <a:xfrm>
+                <a:off x="4162440" y="5429980"/>
+                <a:ext cx="1268072" cy="576538"/>
+              </a:xfrm>
+              <a:prstGeom prst="rect">
+                <a:avLst/>
+              </a:prstGeom>
+              <a:solidFill>
+                <a:srgbClr val="E76BF3"/>
+              </a:solidFill>
+              <a:ln>
+                <a:solidFill>
+                  <a:schemeClr val="tx1"/>
+                </a:solidFill>
+              </a:ln>
+            </p:spPr>
+            <p:style>
+              <a:lnRef idx="2">
+                <a:schemeClr val="accent5">
+                  <a:shade val="50000"/>
+                </a:schemeClr>
+              </a:lnRef>
+              <a:fillRef idx="1">
+                <a:schemeClr val="accent5"/>
+              </a:fillRef>
+              <a:effectRef idx="0">
+                <a:schemeClr val="accent5"/>
+              </a:effectRef>
+              <a:fontRef idx="minor">
+                <a:schemeClr val="lt1"/>
+              </a:fontRef>
+            </p:style>
+            <p:txBody>
+              <a:bodyPr rtlCol="0" anchor="ctr"/>
+              <a:lstStyle/>
+              <a:p>
+                <a:pPr algn="ctr"/>
+                <a:r>
+                  <a:rPr lang="fr-FR" dirty="0" err="1"/>
+                  <a:t>Humans</a:t>
+                </a:r>
+                <a:endParaRPr lang="fr-FR" dirty="0"/>
+              </a:p>
+            </p:txBody>
+          </p:sp>
+          <p:sp>
+            <p:nvSpPr>
+              <p:cNvPr id="15" name="Rectangle 14">
+                <a:extLst>
+                  <a:ext uri="{FF2B5EF4-FFF2-40B4-BE49-F238E27FC236}">
+                    <a16:creationId xmlns:a16="http://schemas.microsoft.com/office/drawing/2014/main" id="{1A0C2064-6A4C-4691-9C1F-4AF6ECF3E904}"/>
+                  </a:ext>
+                </a:extLst>
+              </p:cNvPr>
+              <p:cNvSpPr/>
+              <p:nvPr/>
+            </p:nvSpPr>
+            <p:spPr>
+              <a:xfrm>
+                <a:off x="5997516" y="5463537"/>
+                <a:ext cx="1335051" cy="542982"/>
+              </a:xfrm>
+              <a:prstGeom prst="rect">
+                <a:avLst/>
+              </a:prstGeom>
+              <a:solidFill>
+                <a:srgbClr val="00B0F6"/>
+              </a:solidFill>
+              <a:ln>
+                <a:solidFill>
+                  <a:schemeClr val="tx1"/>
+                </a:solidFill>
+              </a:ln>
+            </p:spPr>
+            <p:style>
+              <a:lnRef idx="2">
+                <a:schemeClr val="accent5">
+                  <a:shade val="50000"/>
+                </a:schemeClr>
+              </a:lnRef>
+              <a:fillRef idx="1">
+                <a:schemeClr val="accent5"/>
+              </a:fillRef>
+              <a:effectRef idx="0">
+                <a:schemeClr val="accent5"/>
+              </a:effectRef>
+              <a:fontRef idx="minor">
+                <a:schemeClr val="lt1"/>
+              </a:fontRef>
+            </p:style>
+            <p:txBody>
+              <a:bodyPr rtlCol="0" anchor="ctr"/>
+              <a:lstStyle/>
+              <a:p>
+                <a:pPr algn="ctr"/>
+                <a:r>
+                  <a:rPr lang="fr-FR" dirty="0"/>
+                  <a:t>Animals</a:t>
+                </a:r>
+              </a:p>
+            </p:txBody>
+          </p:sp>
+          <p:sp>
+            <p:nvSpPr>
+              <p:cNvPr id="34" name="Rectangle 33">
+                <a:extLst>
+                  <a:ext uri="{FF2B5EF4-FFF2-40B4-BE49-F238E27FC236}">
+                    <a16:creationId xmlns:a16="http://schemas.microsoft.com/office/drawing/2014/main" id="{E7ABEB32-5092-4FCF-BF63-D0B007B38D7B}"/>
+                  </a:ext>
+                </a:extLst>
+              </p:cNvPr>
+              <p:cNvSpPr/>
+              <p:nvPr/>
+            </p:nvSpPr>
+            <p:spPr>
+              <a:xfrm>
+                <a:off x="7812846" y="5463537"/>
+                <a:ext cx="2161664" cy="542982"/>
+              </a:xfrm>
+              <a:prstGeom prst="rect">
+                <a:avLst/>
+              </a:prstGeom>
+              <a:solidFill>
+                <a:srgbClr val="00BF7D"/>
+              </a:solidFill>
+              <a:ln>
+                <a:solidFill>
+                  <a:schemeClr val="tx1"/>
+                </a:solidFill>
+              </a:ln>
+            </p:spPr>
+            <p:style>
+              <a:lnRef idx="2">
+                <a:schemeClr val="accent5">
+                  <a:shade val="50000"/>
+                </a:schemeClr>
+              </a:lnRef>
+              <a:fillRef idx="1">
+                <a:schemeClr val="accent5"/>
+              </a:fillRef>
+              <a:effectRef idx="0">
+                <a:schemeClr val="accent5"/>
+              </a:effectRef>
+              <a:fontRef idx="minor">
+                <a:schemeClr val="lt1"/>
+              </a:fontRef>
+            </p:style>
+            <p:txBody>
+              <a:bodyPr rtlCol="0" anchor="ctr"/>
+              <a:lstStyle/>
+              <a:p>
+                <a:pPr algn="ctr"/>
+                <a:r>
+                  <a:rPr lang="fr-FR" dirty="0"/>
+                  <a:t>Environnement</a:t>
+                </a:r>
+              </a:p>
+            </p:txBody>
+          </p:sp>
+          <p:sp>
+            <p:nvSpPr>
+              <p:cNvPr id="69" name="Rectangle 68">
+                <a:extLst>
+                  <a:ext uri="{FF2B5EF4-FFF2-40B4-BE49-F238E27FC236}">
+                    <a16:creationId xmlns:a16="http://schemas.microsoft.com/office/drawing/2014/main" id="{98ABC3ED-1BF9-4921-AED1-8FC8BBF77941}"/>
+                  </a:ext>
+                </a:extLst>
+              </p:cNvPr>
+              <p:cNvSpPr/>
+              <p:nvPr/>
+            </p:nvSpPr>
+            <p:spPr>
+              <a:xfrm>
+                <a:off x="4637284" y="3724709"/>
+                <a:ext cx="243936" cy="855680"/>
+              </a:xfrm>
+              <a:prstGeom prst="rect">
+                <a:avLst/>
+              </a:prstGeom>
+              <a:solidFill>
+                <a:srgbClr val="E76BF3"/>
+              </a:solidFill>
+              <a:ln>
+                <a:solidFill>
+                  <a:schemeClr val="tx1"/>
+                </a:solidFill>
+              </a:ln>
+            </p:spPr>
+            <p:style>
+              <a:lnRef idx="2">
+                <a:schemeClr val="accent1">
+                  <a:shade val="50000"/>
+                </a:schemeClr>
+              </a:lnRef>
+              <a:fillRef idx="1">
+                <a:schemeClr val="accent1"/>
+              </a:fillRef>
+              <a:effectRef idx="0">
+                <a:schemeClr val="accent1"/>
+              </a:effectRef>
+              <a:fontRef idx="minor">
+                <a:schemeClr val="lt1"/>
+              </a:fontRef>
+            </p:style>
+            <p:txBody>
+              <a:bodyPr rtlCol="0" anchor="ctr"/>
+              <a:lstStyle/>
+              <a:p>
+                <a:pPr algn="ctr"/>
+                <a:endParaRPr lang="fr-FR"/>
+              </a:p>
+            </p:txBody>
+          </p:sp>
+          <p:sp>
+            <p:nvSpPr>
+              <p:cNvPr id="70" name="Rectangle 69">
+                <a:extLst>
+                  <a:ext uri="{FF2B5EF4-FFF2-40B4-BE49-F238E27FC236}">
+                    <a16:creationId xmlns:a16="http://schemas.microsoft.com/office/drawing/2014/main" id="{20777D97-E24A-4D85-9DE6-725F49D4AA09}"/>
+                  </a:ext>
+                </a:extLst>
+              </p:cNvPr>
+              <p:cNvSpPr/>
+              <p:nvPr/>
+            </p:nvSpPr>
+            <p:spPr>
+              <a:xfrm>
+                <a:off x="6495198" y="3724707"/>
+                <a:ext cx="243936" cy="855680"/>
+              </a:xfrm>
+              <a:prstGeom prst="rect">
+                <a:avLst/>
+              </a:prstGeom>
+              <a:solidFill>
+                <a:srgbClr val="00B0F6"/>
+              </a:solidFill>
+              <a:ln>
+                <a:solidFill>
+                  <a:schemeClr val="tx1"/>
+                </a:solidFill>
+              </a:ln>
+            </p:spPr>
+            <p:style>
+              <a:lnRef idx="2">
+                <a:schemeClr val="accent1">
+                  <a:shade val="50000"/>
+                </a:schemeClr>
+              </a:lnRef>
+              <a:fillRef idx="1">
+                <a:schemeClr val="accent1"/>
+              </a:fillRef>
+              <a:effectRef idx="0">
+                <a:schemeClr val="accent1"/>
+              </a:effectRef>
+              <a:fontRef idx="minor">
+                <a:schemeClr val="lt1"/>
+              </a:fontRef>
+            </p:style>
+            <p:txBody>
+              <a:bodyPr rtlCol="0" anchor="ctr"/>
+              <a:lstStyle/>
+              <a:p>
+                <a:pPr algn="ctr"/>
+                <a:endParaRPr lang="fr-FR"/>
+              </a:p>
+            </p:txBody>
+          </p:sp>
+          <p:sp>
+            <p:nvSpPr>
+              <p:cNvPr id="71" name="Rectangle 70">
+                <a:extLst>
+                  <a:ext uri="{FF2B5EF4-FFF2-40B4-BE49-F238E27FC236}">
+                    <a16:creationId xmlns:a16="http://schemas.microsoft.com/office/drawing/2014/main" id="{CE4AC301-A1BB-4E85-9FE3-D20E67F14DDE}"/>
+                  </a:ext>
+                </a:extLst>
+              </p:cNvPr>
+              <p:cNvSpPr/>
+              <p:nvPr/>
+            </p:nvSpPr>
+            <p:spPr>
+              <a:xfrm>
+                <a:off x="8597048" y="3724709"/>
+                <a:ext cx="243936" cy="855680"/>
+              </a:xfrm>
+              <a:prstGeom prst="rect">
+                <a:avLst/>
+              </a:prstGeom>
+              <a:solidFill>
+                <a:srgbClr val="00BF7D"/>
+              </a:solidFill>
+              <a:ln>
+                <a:solidFill>
+                  <a:schemeClr val="tx1"/>
+                </a:solidFill>
+              </a:ln>
+            </p:spPr>
+            <p:style>
+              <a:lnRef idx="2">
+                <a:schemeClr val="accent1">
+                  <a:shade val="50000"/>
+                </a:schemeClr>
+              </a:lnRef>
+              <a:fillRef idx="1">
+                <a:schemeClr val="accent1"/>
+              </a:fillRef>
+              <a:effectRef idx="0">
+                <a:schemeClr val="accent1"/>
+              </a:effectRef>
+              <a:fontRef idx="minor">
+                <a:schemeClr val="lt1"/>
+              </a:fontRef>
+            </p:style>
+            <p:txBody>
+              <a:bodyPr rtlCol="0" anchor="ctr"/>
+              <a:lstStyle/>
+              <a:p>
+                <a:pPr algn="ctr"/>
+                <a:endParaRPr lang="fr-FR"/>
+              </a:p>
+            </p:txBody>
+          </p:sp>
+          <p:cxnSp>
+            <p:nvCxnSpPr>
+              <p:cNvPr id="80" name="Connecteur droit avec flèche 79">
+                <a:extLst>
+                  <a:ext uri="{FF2B5EF4-FFF2-40B4-BE49-F238E27FC236}">
+                    <a16:creationId xmlns:a16="http://schemas.microsoft.com/office/drawing/2014/main" id="{24A72F1F-BBD9-4654-A0CE-470F641A5CEB}"/>
+                  </a:ext>
+                </a:extLst>
+              </p:cNvPr>
+              <p:cNvCxnSpPr/>
+              <p:nvPr/>
+            </p:nvCxnSpPr>
+            <p:spPr>
+              <a:xfrm flipV="1">
+                <a:off x="4637284" y="4557521"/>
+                <a:ext cx="0" cy="849591"/>
+              </a:xfrm>
+              <a:prstGeom prst="straightConnector1">
+                <a:avLst/>
+              </a:prstGeom>
+              <a:ln>
+                <a:solidFill>
+                  <a:schemeClr val="tx1"/>
+                </a:solidFill>
+                <a:tailEnd type="triangle"/>
+              </a:ln>
+            </p:spPr>
+            <p:style>
+              <a:lnRef idx="1">
+                <a:schemeClr val="accent1"/>
+              </a:lnRef>
+              <a:fillRef idx="0">
+                <a:schemeClr val="accent1"/>
+              </a:fillRef>
+              <a:effectRef idx="0">
+                <a:schemeClr val="accent1"/>
+              </a:effectRef>
+              <a:fontRef idx="minor">
+                <a:schemeClr val="tx1"/>
+              </a:fontRef>
+            </p:style>
+          </p:cxnSp>
+          <p:cxnSp>
+            <p:nvCxnSpPr>
+              <p:cNvPr id="81" name="Connecteur droit avec flèche 80">
+                <a:extLst>
+                  <a:ext uri="{FF2B5EF4-FFF2-40B4-BE49-F238E27FC236}">
+                    <a16:creationId xmlns:a16="http://schemas.microsoft.com/office/drawing/2014/main" id="{B8883E70-6715-4E9E-B02A-361D325C1749}"/>
+                  </a:ext>
+                </a:extLst>
+              </p:cNvPr>
+              <p:cNvCxnSpPr/>
+              <p:nvPr/>
+            </p:nvCxnSpPr>
+            <p:spPr>
+              <a:xfrm>
+                <a:off x="4881220" y="4580387"/>
+                <a:ext cx="0" cy="849591"/>
+              </a:xfrm>
+              <a:prstGeom prst="straightConnector1">
+                <a:avLst/>
+              </a:prstGeom>
+              <a:ln>
+                <a:solidFill>
+                  <a:schemeClr val="tx1"/>
+                </a:solidFill>
+                <a:tailEnd type="triangle"/>
+              </a:ln>
+            </p:spPr>
+            <p:style>
+              <a:lnRef idx="1">
+                <a:schemeClr val="accent1"/>
+              </a:lnRef>
+              <a:fillRef idx="0">
+                <a:schemeClr val="accent1"/>
+              </a:fillRef>
+              <a:effectRef idx="0">
+                <a:schemeClr val="accent1"/>
+              </a:effectRef>
+              <a:fontRef idx="minor">
+                <a:schemeClr val="tx1"/>
+              </a:fontRef>
+            </p:style>
+          </p:cxnSp>
+          <p:cxnSp>
+            <p:nvCxnSpPr>
+              <p:cNvPr id="82" name="Connecteur droit avec flèche 81">
+                <a:extLst>
+                  <a:ext uri="{FF2B5EF4-FFF2-40B4-BE49-F238E27FC236}">
+                    <a16:creationId xmlns:a16="http://schemas.microsoft.com/office/drawing/2014/main" id="{116AD4E4-0B8E-42A5-83D5-EB5D9480BDFA}"/>
+                  </a:ext>
+                </a:extLst>
+              </p:cNvPr>
+              <p:cNvCxnSpPr>
+                <a:cxnSpLocks/>
+              </p:cNvCxnSpPr>
+              <p:nvPr/>
+            </p:nvCxnSpPr>
+            <p:spPr>
+              <a:xfrm>
+                <a:off x="6739134" y="4580386"/>
+                <a:ext cx="0" cy="883150"/>
+              </a:xfrm>
+              <a:prstGeom prst="straightConnector1">
+                <a:avLst/>
+              </a:prstGeom>
+              <a:ln>
+                <a:solidFill>
+                  <a:schemeClr val="tx1"/>
+                </a:solidFill>
+                <a:tailEnd type="triangle"/>
+              </a:ln>
+            </p:spPr>
+            <p:style>
+              <a:lnRef idx="1">
+                <a:schemeClr val="accent1"/>
+              </a:lnRef>
+              <a:fillRef idx="0">
+                <a:schemeClr val="accent1"/>
+              </a:fillRef>
+              <a:effectRef idx="0">
+                <a:schemeClr val="accent1"/>
+              </a:effectRef>
+              <a:fontRef idx="minor">
+                <a:schemeClr val="tx1"/>
+              </a:fontRef>
+            </p:style>
+          </p:cxnSp>
+          <p:cxnSp>
+            <p:nvCxnSpPr>
+              <p:cNvPr id="85" name="Connecteur droit avec flèche 84">
+                <a:extLst>
+                  <a:ext uri="{FF2B5EF4-FFF2-40B4-BE49-F238E27FC236}">
+                    <a16:creationId xmlns:a16="http://schemas.microsoft.com/office/drawing/2014/main" id="{A6557664-B853-43E7-808E-FBCC772258A6}"/>
+                  </a:ext>
+                </a:extLst>
+              </p:cNvPr>
+              <p:cNvCxnSpPr>
+                <a:cxnSpLocks/>
+              </p:cNvCxnSpPr>
+              <p:nvPr/>
+            </p:nvCxnSpPr>
+            <p:spPr>
+              <a:xfrm flipV="1">
+                <a:off x="6495198" y="4546829"/>
+                <a:ext cx="0" cy="899928"/>
+              </a:xfrm>
+              <a:prstGeom prst="straightConnector1">
+                <a:avLst/>
+              </a:prstGeom>
+              <a:ln>
+                <a:solidFill>
+                  <a:schemeClr val="tx1"/>
+                </a:solidFill>
+                <a:tailEnd type="triangle"/>
+              </a:ln>
+            </p:spPr>
+            <p:style>
+              <a:lnRef idx="1">
+                <a:schemeClr val="accent1"/>
+              </a:lnRef>
+              <a:fillRef idx="0">
+                <a:schemeClr val="accent1"/>
+              </a:fillRef>
+              <a:effectRef idx="0">
+                <a:schemeClr val="accent1"/>
+              </a:effectRef>
+              <a:fontRef idx="minor">
+                <a:schemeClr val="tx1"/>
+              </a:fontRef>
+            </p:style>
+          </p:cxnSp>
+          <p:cxnSp>
+            <p:nvCxnSpPr>
+              <p:cNvPr id="87" name="Connecteur droit avec flèche 86">
+                <a:extLst>
+                  <a:ext uri="{FF2B5EF4-FFF2-40B4-BE49-F238E27FC236}">
+                    <a16:creationId xmlns:a16="http://schemas.microsoft.com/office/drawing/2014/main" id="{B8EAB4DC-09C4-4508-A9A7-7811B515ABA2}"/>
+                  </a:ext>
+                </a:extLst>
+              </p:cNvPr>
+              <p:cNvCxnSpPr>
+                <a:cxnSpLocks/>
+              </p:cNvCxnSpPr>
+              <p:nvPr/>
+            </p:nvCxnSpPr>
+            <p:spPr>
+              <a:xfrm>
+                <a:off x="8840984" y="4546828"/>
+                <a:ext cx="0" cy="883150"/>
+              </a:xfrm>
+              <a:prstGeom prst="straightConnector1">
+                <a:avLst/>
+              </a:prstGeom>
+              <a:ln>
+                <a:solidFill>
+                  <a:schemeClr val="tx1"/>
+                </a:solidFill>
+                <a:tailEnd type="triangle"/>
+              </a:ln>
+            </p:spPr>
+            <p:style>
+              <a:lnRef idx="1">
+                <a:schemeClr val="accent1"/>
+              </a:lnRef>
+              <a:fillRef idx="0">
+                <a:schemeClr val="accent1"/>
+              </a:fillRef>
+              <a:effectRef idx="0">
+                <a:schemeClr val="accent1"/>
+              </a:effectRef>
+              <a:fontRef idx="minor">
+                <a:schemeClr val="tx1"/>
+              </a:fontRef>
+            </p:style>
+          </p:cxnSp>
+          <p:cxnSp>
+            <p:nvCxnSpPr>
+              <p:cNvPr id="89" name="Connecteur droit avec flèche 88">
+                <a:extLst>
+                  <a:ext uri="{FF2B5EF4-FFF2-40B4-BE49-F238E27FC236}">
+                    <a16:creationId xmlns:a16="http://schemas.microsoft.com/office/drawing/2014/main" id="{FE2FC8B0-E513-4CE5-B30F-00A1C1EE187B}"/>
+                  </a:ext>
+                </a:extLst>
+              </p:cNvPr>
+              <p:cNvCxnSpPr>
+                <a:cxnSpLocks/>
+              </p:cNvCxnSpPr>
+              <p:nvPr/>
+            </p:nvCxnSpPr>
+            <p:spPr>
+              <a:xfrm flipV="1">
+                <a:off x="8597048" y="4546830"/>
+                <a:ext cx="0" cy="916706"/>
+              </a:xfrm>
+              <a:prstGeom prst="straightConnector1">
+                <a:avLst/>
+              </a:prstGeom>
+              <a:ln>
+                <a:solidFill>
+                  <a:schemeClr val="tx1"/>
+                </a:solidFill>
+                <a:tailEnd type="triangle"/>
+              </a:ln>
+            </p:spPr>
+            <p:style>
+              <a:lnRef idx="1">
+                <a:schemeClr val="accent1"/>
+              </a:lnRef>
+              <a:fillRef idx="0">
+                <a:schemeClr val="accent1"/>
+              </a:fillRef>
+              <a:effectRef idx="0">
+                <a:schemeClr val="accent1"/>
+              </a:effectRef>
+              <a:fontRef idx="minor">
+                <a:schemeClr val="tx1"/>
+              </a:fontRef>
+            </p:style>
+          </p:cxnSp>
+          <mc:AlternateContent xmlns:mc="http://schemas.openxmlformats.org/markup-compatibility/2006">
+            <mc:Choice xmlns:a14="http://schemas.microsoft.com/office/drawing/2010/main" Requires="a14">
+              <p:sp>
+                <p:nvSpPr>
+                  <p:cNvPr id="98" name="ZoneTexte 97">
+                    <a:extLst>
+                      <a:ext uri="{FF2B5EF4-FFF2-40B4-BE49-F238E27FC236}">
+                        <a16:creationId xmlns:a16="http://schemas.microsoft.com/office/drawing/2014/main" id="{6479AE36-C11E-40CB-B007-3F05B4468AA1}"/>
+                      </a:ext>
+                    </a:extLst>
+                  </p:cNvPr>
+                  <p:cNvSpPr txBox="1"/>
+                  <p:nvPr/>
+                </p:nvSpPr>
+                <p:spPr>
+                  <a:xfrm>
+                    <a:off x="4304257" y="4825862"/>
+                    <a:ext cx="322049" cy="369332"/>
+                  </a:xfrm>
+                  <a:prstGeom prst="rect">
+                    <a:avLst/>
+                  </a:prstGeom>
+                  <a:noFill/>
+                </p:spPr>
+                <p:txBody>
+                  <a:bodyPr wrap="square" rtlCol="0">
+                    <a:spAutoFit/>
+                  </a:bodyPr>
+                  <a:lstStyle/>
+                  <a:p>
+                    <a14:m>
+                      <m:oMathPara xmlns:m="http://schemas.openxmlformats.org/officeDocument/2006/math">
+                        <m:oMathParaPr>
+                          <m:jc m:val="centerGroup"/>
+                        </m:oMathParaPr>
+                        <m:oMath xmlns:m="http://schemas.openxmlformats.org/officeDocument/2006/math">
+                          <m:r>
+                            <a:rPr lang="fr-FR" b="0" i="1" smtClean="0">
+                              <a:solidFill>
+                                <a:srgbClr val="E76BF3"/>
+                              </a:solidFill>
+                              <a:latin typeface="Cambria Math" panose="02040503050406030204" pitchFamily="18" charset="0"/>
+                            </a:rPr>
+                            <m:t>𝑤</m:t>
+                          </m:r>
+                        </m:oMath>
+                      </m:oMathPara>
+                    </a14:m>
+                    <a:endParaRPr lang="fr-FR" dirty="0">
+                      <a:solidFill>
+                        <a:srgbClr val="E76BF3"/>
+                      </a:solidFill>
+                    </a:endParaRPr>
+                  </a:p>
+                </p:txBody>
+              </p:sp>
+            </mc:Choice>
+            <mc:Fallback>
+              <p:sp>
+                <p:nvSpPr>
+                  <p:cNvPr id="98" name="ZoneTexte 97">
+                    <a:extLst>
+                      <a:ext uri="{FF2B5EF4-FFF2-40B4-BE49-F238E27FC236}">
+                        <a16:creationId xmlns:a16="http://schemas.microsoft.com/office/drawing/2014/main" id="{6479AE36-C11E-40CB-B007-3F05B4468AA1}"/>
+                      </a:ext>
+                    </a:extLst>
+                  </p:cNvPr>
+                  <p:cNvSpPr txBox="1">
+                    <a:spLocks noRot="1" noChangeAspect="1" noMove="1" noResize="1" noEditPoints="1" noAdjustHandles="1" noChangeArrowheads="1" noChangeShapeType="1" noTextEdit="1"/>
+                  </p:cNvSpPr>
+                  <p:nvPr/>
+                </p:nvSpPr>
+                <p:spPr>
+                  <a:xfrm>
+                    <a:off x="4304257" y="4825862"/>
+                    <a:ext cx="322049" cy="369332"/>
+                  </a:xfrm>
+                  <a:prstGeom prst="rect">
+                    <a:avLst/>
+                  </a:prstGeom>
+                  <a:blipFill>
+                    <a:blip r:embed="rId7"/>
+                    <a:stretch>
+                      <a:fillRect/>
+                    </a:stretch>
+                  </a:blipFill>
+                </p:spPr>
+                <p:txBody>
+                  <a:bodyPr/>
+                  <a:lstStyle/>
+                  <a:p>
+                    <a:r>
+                      <a:rPr lang="fr-FR">
+                        <a:noFill/>
+                      </a:rPr>
+                      <a:t> </a:t>
+                    </a:r>
+                  </a:p>
+                </p:txBody>
+              </p:sp>
+            </mc:Fallback>
+          </mc:AlternateContent>
+          <mc:AlternateContent xmlns:mc="http://schemas.openxmlformats.org/markup-compatibility/2006">
+            <mc:Choice xmlns:a14="http://schemas.microsoft.com/office/drawing/2010/main" Requires="a14">
+              <p:sp>
+                <p:nvSpPr>
+                  <p:cNvPr id="106" name="ZoneTexte 105">
+                    <a:extLst>
+                      <a:ext uri="{FF2B5EF4-FFF2-40B4-BE49-F238E27FC236}">
+                        <a16:creationId xmlns:a16="http://schemas.microsoft.com/office/drawing/2014/main" id="{E60DAAF8-0F8C-448E-9D2E-CCFA9BE77BC1}"/>
+                      </a:ext>
+                    </a:extLst>
+                  </p:cNvPr>
+                  <p:cNvSpPr txBox="1"/>
+                  <p:nvPr/>
+                </p:nvSpPr>
+                <p:spPr>
+                  <a:xfrm>
+                    <a:off x="4898092" y="4837295"/>
+                    <a:ext cx="322049" cy="369332"/>
+                  </a:xfrm>
+                  <a:prstGeom prst="rect">
+                    <a:avLst/>
+                  </a:prstGeom>
+                  <a:noFill/>
+                </p:spPr>
+                <p:txBody>
+                  <a:bodyPr wrap="square" rtlCol="0">
+                    <a:spAutoFit/>
+                  </a:bodyPr>
+                  <a:lstStyle/>
+                  <a:p>
+                    <a14:m>
+                      <m:oMathPara xmlns:m="http://schemas.openxmlformats.org/officeDocument/2006/math">
+                        <m:oMathParaPr>
+                          <m:jc m:val="centerGroup"/>
+                        </m:oMathParaPr>
+                        <m:oMath xmlns:m="http://schemas.openxmlformats.org/officeDocument/2006/math">
+                          <m:r>
+                            <a:rPr lang="fr-FR" b="0" i="1" smtClean="0">
+                              <a:solidFill>
+                                <a:srgbClr val="E76BF3"/>
+                              </a:solidFill>
+                              <a:latin typeface="Cambria Math" panose="02040503050406030204" pitchFamily="18" charset="0"/>
+                            </a:rPr>
+                            <m:t>𝑐</m:t>
+                          </m:r>
+                        </m:oMath>
+                      </m:oMathPara>
+                    </a14:m>
+                    <a:endParaRPr lang="fr-FR" dirty="0">
+                      <a:solidFill>
+                        <a:srgbClr val="E76BF3"/>
+                      </a:solidFill>
+                    </a:endParaRPr>
+                  </a:p>
+                </p:txBody>
+              </p:sp>
+            </mc:Choice>
+            <mc:Fallback>
+              <p:sp>
+                <p:nvSpPr>
+                  <p:cNvPr id="106" name="ZoneTexte 105">
+                    <a:extLst>
+                      <a:ext uri="{FF2B5EF4-FFF2-40B4-BE49-F238E27FC236}">
+                        <a16:creationId xmlns:a16="http://schemas.microsoft.com/office/drawing/2014/main" id="{E60DAAF8-0F8C-448E-9D2E-CCFA9BE77BC1}"/>
+                      </a:ext>
+                    </a:extLst>
+                  </p:cNvPr>
+                  <p:cNvSpPr txBox="1">
+                    <a:spLocks noRot="1" noChangeAspect="1" noMove="1" noResize="1" noEditPoints="1" noAdjustHandles="1" noChangeArrowheads="1" noChangeShapeType="1" noTextEdit="1"/>
+                  </p:cNvSpPr>
+                  <p:nvPr/>
+                </p:nvSpPr>
+                <p:spPr>
+                  <a:xfrm>
+                    <a:off x="4898092" y="4837295"/>
+                    <a:ext cx="322049" cy="369332"/>
+                  </a:xfrm>
+                  <a:prstGeom prst="rect">
+                    <a:avLst/>
+                  </a:prstGeom>
+                  <a:blipFill>
+                    <a:blip r:embed="rId8"/>
+                    <a:stretch>
+                      <a:fillRect/>
+                    </a:stretch>
+                  </a:blipFill>
+                </p:spPr>
+                <p:txBody>
+                  <a:bodyPr/>
+                  <a:lstStyle/>
+                  <a:p>
+                    <a:r>
+                      <a:rPr lang="fr-FR">
+                        <a:noFill/>
+                      </a:rPr>
+                      <a:t> </a:t>
+                    </a:r>
+                  </a:p>
+                </p:txBody>
+              </p:sp>
+            </mc:Fallback>
+          </mc:AlternateContent>
+          <mc:AlternateContent xmlns:mc="http://schemas.openxmlformats.org/markup-compatibility/2006">
+            <mc:Choice xmlns:a14="http://schemas.microsoft.com/office/drawing/2010/main" Requires="a14">
+              <p:sp>
+                <p:nvSpPr>
+                  <p:cNvPr id="107" name="ZoneTexte 106">
+                    <a:extLst>
+                      <a:ext uri="{FF2B5EF4-FFF2-40B4-BE49-F238E27FC236}">
+                        <a16:creationId xmlns:a16="http://schemas.microsoft.com/office/drawing/2014/main" id="{66CF0EB4-E406-4E89-AD0C-6806DA68F457}"/>
+                      </a:ext>
+                    </a:extLst>
+                  </p:cNvPr>
+                  <p:cNvSpPr txBox="1"/>
+                  <p:nvPr/>
+                </p:nvSpPr>
+                <p:spPr>
+                  <a:xfrm>
+                    <a:off x="6194964" y="4797649"/>
+                    <a:ext cx="322049" cy="369332"/>
+                  </a:xfrm>
+                  <a:prstGeom prst="rect">
+                    <a:avLst/>
+                  </a:prstGeom>
+                  <a:noFill/>
+                </p:spPr>
+                <p:txBody>
+                  <a:bodyPr wrap="square" rtlCol="0">
+                    <a:spAutoFit/>
+                  </a:bodyPr>
+                  <a:lstStyle/>
+                  <a:p>
+                    <a14:m>
+                      <m:oMathPara xmlns:m="http://schemas.openxmlformats.org/officeDocument/2006/math">
+                        <m:oMathParaPr>
+                          <m:jc m:val="centerGroup"/>
+                        </m:oMathParaPr>
+                        <m:oMath xmlns:m="http://schemas.openxmlformats.org/officeDocument/2006/math">
+                          <m:r>
+                            <a:rPr lang="fr-FR" b="0" i="1" smtClean="0">
+                              <a:solidFill>
+                                <a:srgbClr val="00B0F6"/>
+                              </a:solidFill>
+                              <a:latin typeface="Cambria Math" panose="02040503050406030204" pitchFamily="18" charset="0"/>
+                            </a:rPr>
+                            <m:t>𝑤</m:t>
+                          </m:r>
+                        </m:oMath>
+                      </m:oMathPara>
+                    </a14:m>
+                    <a:endParaRPr lang="fr-FR" dirty="0">
+                      <a:solidFill>
+                        <a:srgbClr val="00B0F6"/>
+                      </a:solidFill>
+                    </a:endParaRPr>
+                  </a:p>
+                </p:txBody>
+              </p:sp>
+            </mc:Choice>
+            <mc:Fallback>
+              <p:sp>
+                <p:nvSpPr>
+                  <p:cNvPr id="107" name="ZoneTexte 106">
+                    <a:extLst>
+                      <a:ext uri="{FF2B5EF4-FFF2-40B4-BE49-F238E27FC236}">
+                        <a16:creationId xmlns:a16="http://schemas.microsoft.com/office/drawing/2014/main" id="{66CF0EB4-E406-4E89-AD0C-6806DA68F457}"/>
+                      </a:ext>
+                    </a:extLst>
+                  </p:cNvPr>
+                  <p:cNvSpPr txBox="1">
+                    <a:spLocks noRot="1" noChangeAspect="1" noMove="1" noResize="1" noEditPoints="1" noAdjustHandles="1" noChangeArrowheads="1" noChangeShapeType="1" noTextEdit="1"/>
+                  </p:cNvSpPr>
+                  <p:nvPr/>
+                </p:nvSpPr>
+                <p:spPr>
+                  <a:xfrm>
+                    <a:off x="6194964" y="4797649"/>
+                    <a:ext cx="322049" cy="369332"/>
+                  </a:xfrm>
+                  <a:prstGeom prst="rect">
+                    <a:avLst/>
+                  </a:prstGeom>
+                  <a:blipFill>
+                    <a:blip r:embed="rId9"/>
+                    <a:stretch>
+                      <a:fillRect/>
+                    </a:stretch>
+                  </a:blipFill>
+                </p:spPr>
+                <p:txBody>
+                  <a:bodyPr/>
+                  <a:lstStyle/>
+                  <a:p>
+                    <a:r>
+                      <a:rPr lang="fr-FR">
+                        <a:noFill/>
+                      </a:rPr>
+                      <a:t> </a:t>
+                    </a:r>
+                  </a:p>
+                </p:txBody>
+              </p:sp>
+            </mc:Fallback>
+          </mc:AlternateContent>
+          <mc:AlternateContent xmlns:mc="http://schemas.openxmlformats.org/markup-compatibility/2006">
+            <mc:Choice xmlns:a14="http://schemas.microsoft.com/office/drawing/2010/main" Requires="a14">
+              <p:sp>
+                <p:nvSpPr>
+                  <p:cNvPr id="108" name="ZoneTexte 107">
+                    <a:extLst>
+                      <a:ext uri="{FF2B5EF4-FFF2-40B4-BE49-F238E27FC236}">
+                        <a16:creationId xmlns:a16="http://schemas.microsoft.com/office/drawing/2014/main" id="{99721997-22D7-4E10-9274-2D7CE9452859}"/>
+                      </a:ext>
+                    </a:extLst>
+                  </p:cNvPr>
+                  <p:cNvSpPr txBox="1"/>
+                  <p:nvPr/>
+                </p:nvSpPr>
+                <p:spPr>
+                  <a:xfrm>
+                    <a:off x="6745285" y="4796903"/>
+                    <a:ext cx="322049" cy="369332"/>
+                  </a:xfrm>
+                  <a:prstGeom prst="rect">
+                    <a:avLst/>
+                  </a:prstGeom>
+                  <a:noFill/>
+                </p:spPr>
+                <p:txBody>
+                  <a:bodyPr wrap="square" rtlCol="0">
+                    <a:spAutoFit/>
+                  </a:bodyPr>
+                  <a:lstStyle/>
+                  <a:p>
+                    <a14:m>
+                      <m:oMathPara xmlns:m="http://schemas.openxmlformats.org/officeDocument/2006/math">
+                        <m:oMathParaPr>
+                          <m:jc m:val="centerGroup"/>
+                        </m:oMathParaPr>
+                        <m:oMath xmlns:m="http://schemas.openxmlformats.org/officeDocument/2006/math">
+                          <m:r>
+                            <a:rPr lang="fr-FR" b="0" i="1" smtClean="0">
+                              <a:solidFill>
+                                <a:srgbClr val="00B0F6"/>
+                              </a:solidFill>
+                              <a:latin typeface="Cambria Math" panose="02040503050406030204" pitchFamily="18" charset="0"/>
+                            </a:rPr>
+                            <m:t>𝑐</m:t>
+                          </m:r>
+                        </m:oMath>
+                      </m:oMathPara>
+                    </a14:m>
+                    <a:endParaRPr lang="fr-FR" dirty="0">
+                      <a:solidFill>
+                        <a:srgbClr val="00B0F6"/>
+                      </a:solidFill>
+                    </a:endParaRPr>
+                  </a:p>
+                </p:txBody>
+              </p:sp>
+            </mc:Choice>
+            <mc:Fallback>
+              <p:sp>
+                <p:nvSpPr>
+                  <p:cNvPr id="108" name="ZoneTexte 107">
+                    <a:extLst>
+                      <a:ext uri="{FF2B5EF4-FFF2-40B4-BE49-F238E27FC236}">
+                        <a16:creationId xmlns:a16="http://schemas.microsoft.com/office/drawing/2014/main" id="{99721997-22D7-4E10-9274-2D7CE9452859}"/>
+                      </a:ext>
+                    </a:extLst>
+                  </p:cNvPr>
+                  <p:cNvSpPr txBox="1">
+                    <a:spLocks noRot="1" noChangeAspect="1" noMove="1" noResize="1" noEditPoints="1" noAdjustHandles="1" noChangeArrowheads="1" noChangeShapeType="1" noTextEdit="1"/>
+                  </p:cNvSpPr>
+                  <p:nvPr/>
+                </p:nvSpPr>
+                <p:spPr>
+                  <a:xfrm>
+                    <a:off x="6745285" y="4796903"/>
+                    <a:ext cx="322049" cy="369332"/>
+                  </a:xfrm>
+                  <a:prstGeom prst="rect">
+                    <a:avLst/>
+                  </a:prstGeom>
+                  <a:blipFill>
+                    <a:blip r:embed="rId10"/>
+                    <a:stretch>
+                      <a:fillRect/>
+                    </a:stretch>
+                  </a:blipFill>
+                </p:spPr>
+                <p:txBody>
+                  <a:bodyPr/>
+                  <a:lstStyle/>
+                  <a:p>
+                    <a:r>
+                      <a:rPr lang="fr-FR">
+                        <a:noFill/>
+                      </a:rPr>
+                      <a:t> </a:t>
+                    </a:r>
+                  </a:p>
+                </p:txBody>
+              </p:sp>
+            </mc:Fallback>
+          </mc:AlternateContent>
+          <mc:AlternateContent xmlns:mc="http://schemas.openxmlformats.org/markup-compatibility/2006">
+            <mc:Choice xmlns:a14="http://schemas.microsoft.com/office/drawing/2010/main" Requires="a14">
+              <p:sp>
+                <p:nvSpPr>
+                  <p:cNvPr id="109" name="ZoneTexte 108">
+                    <a:extLst>
+                      <a:ext uri="{FF2B5EF4-FFF2-40B4-BE49-F238E27FC236}">
+                        <a16:creationId xmlns:a16="http://schemas.microsoft.com/office/drawing/2014/main" id="{A1529F13-3805-4C4E-BF84-B52D8FCCD555}"/>
+                      </a:ext>
+                    </a:extLst>
+                  </p:cNvPr>
+                  <p:cNvSpPr txBox="1"/>
+                  <p:nvPr/>
+                </p:nvSpPr>
+                <p:spPr>
+                  <a:xfrm>
+                    <a:off x="8268849" y="4820516"/>
+                    <a:ext cx="322049" cy="369332"/>
+                  </a:xfrm>
+                  <a:prstGeom prst="rect">
+                    <a:avLst/>
+                  </a:prstGeom>
+                  <a:noFill/>
+                </p:spPr>
+                <p:txBody>
+                  <a:bodyPr wrap="square" rtlCol="0">
+                    <a:spAutoFit/>
+                  </a:bodyPr>
+                  <a:lstStyle/>
+                  <a:p>
+                    <a14:m>
+                      <m:oMathPara xmlns:m="http://schemas.openxmlformats.org/officeDocument/2006/math">
+                        <m:oMathParaPr>
+                          <m:jc m:val="centerGroup"/>
+                        </m:oMathParaPr>
+                        <m:oMath xmlns:m="http://schemas.openxmlformats.org/officeDocument/2006/math">
+                          <m:r>
+                            <a:rPr lang="fr-FR" b="0" i="1" smtClean="0">
+                              <a:solidFill>
+                                <a:srgbClr val="00BF7D"/>
+                              </a:solidFill>
+                              <a:latin typeface="Cambria Math" panose="02040503050406030204" pitchFamily="18" charset="0"/>
+                            </a:rPr>
+                            <m:t>𝑤</m:t>
+                          </m:r>
+                        </m:oMath>
+                      </m:oMathPara>
+                    </a14:m>
+                    <a:endParaRPr lang="fr-FR" dirty="0">
+                      <a:solidFill>
+                        <a:srgbClr val="00BF7D"/>
+                      </a:solidFill>
+                    </a:endParaRPr>
+                  </a:p>
+                </p:txBody>
+              </p:sp>
+            </mc:Choice>
+            <mc:Fallback>
+              <p:sp>
+                <p:nvSpPr>
+                  <p:cNvPr id="109" name="ZoneTexte 108">
+                    <a:extLst>
+                      <a:ext uri="{FF2B5EF4-FFF2-40B4-BE49-F238E27FC236}">
+                        <a16:creationId xmlns:a16="http://schemas.microsoft.com/office/drawing/2014/main" id="{A1529F13-3805-4C4E-BF84-B52D8FCCD555}"/>
+                      </a:ext>
+                    </a:extLst>
+                  </p:cNvPr>
+                  <p:cNvSpPr txBox="1">
+                    <a:spLocks noRot="1" noChangeAspect="1" noMove="1" noResize="1" noEditPoints="1" noAdjustHandles="1" noChangeArrowheads="1" noChangeShapeType="1" noTextEdit="1"/>
+                  </p:cNvSpPr>
+                  <p:nvPr/>
+                </p:nvSpPr>
+                <p:spPr>
+                  <a:xfrm>
+                    <a:off x="8268849" y="4820516"/>
+                    <a:ext cx="322049" cy="369332"/>
+                  </a:xfrm>
+                  <a:prstGeom prst="rect">
+                    <a:avLst/>
+                  </a:prstGeom>
+                  <a:blipFill>
+                    <a:blip r:embed="rId11"/>
+                    <a:stretch>
+                      <a:fillRect/>
+                    </a:stretch>
+                  </a:blipFill>
+                </p:spPr>
+                <p:txBody>
+                  <a:bodyPr/>
+                  <a:lstStyle/>
+                  <a:p>
+                    <a:r>
+                      <a:rPr lang="fr-FR">
+                        <a:noFill/>
+                      </a:rPr>
+                      <a:t> </a:t>
+                    </a:r>
+                  </a:p>
+                </p:txBody>
+              </p:sp>
+            </mc:Fallback>
+          </mc:AlternateContent>
+          <mc:AlternateContent xmlns:mc="http://schemas.openxmlformats.org/markup-compatibility/2006">
+            <mc:Choice xmlns:a14="http://schemas.microsoft.com/office/drawing/2010/main" Requires="a14">
+              <p:sp>
+                <p:nvSpPr>
+                  <p:cNvPr id="111" name="ZoneTexte 110">
+                    <a:extLst>
+                      <a:ext uri="{FF2B5EF4-FFF2-40B4-BE49-F238E27FC236}">
+                        <a16:creationId xmlns:a16="http://schemas.microsoft.com/office/drawing/2014/main" id="{AA4DD5EC-A47E-4C4B-980C-82C1D871F80C}"/>
+                      </a:ext>
+                    </a:extLst>
+                  </p:cNvPr>
+                  <p:cNvSpPr txBox="1"/>
+                  <p:nvPr/>
+                </p:nvSpPr>
+                <p:spPr>
+                  <a:xfrm>
+                    <a:off x="8858115" y="4856049"/>
+                    <a:ext cx="288726" cy="369332"/>
+                  </a:xfrm>
+                  <a:prstGeom prst="rect">
+                    <a:avLst/>
+                  </a:prstGeom>
+                  <a:noFill/>
+                </p:spPr>
+                <p:txBody>
+                  <a:bodyPr wrap="square" rtlCol="0">
+                    <a:spAutoFit/>
+                  </a:bodyPr>
+                  <a:lstStyle/>
+                  <a:p>
+                    <a14:m>
+                      <m:oMathPara xmlns:m="http://schemas.openxmlformats.org/officeDocument/2006/math">
+                        <m:oMathParaPr>
+                          <m:jc m:val="centerGroup"/>
+                        </m:oMathParaPr>
+                        <m:oMath xmlns:m="http://schemas.openxmlformats.org/officeDocument/2006/math">
+                          <m:r>
+                            <a:rPr lang="fr-FR" b="0" i="1" smtClean="0">
+                              <a:solidFill>
+                                <a:srgbClr val="00BF7D"/>
+                              </a:solidFill>
+                              <a:latin typeface="Cambria Math" panose="02040503050406030204" pitchFamily="18" charset="0"/>
+                            </a:rPr>
+                            <m:t>𝑐</m:t>
+                          </m:r>
+                        </m:oMath>
+                      </m:oMathPara>
+                    </a14:m>
+                    <a:endParaRPr lang="fr-FR" dirty="0">
+                      <a:solidFill>
+                        <a:srgbClr val="00BF7D"/>
+                      </a:solidFill>
+                    </a:endParaRPr>
+                  </a:p>
+                </p:txBody>
+              </p:sp>
+            </mc:Choice>
+            <mc:Fallback>
+              <p:sp>
+                <p:nvSpPr>
+                  <p:cNvPr id="111" name="ZoneTexte 110">
+                    <a:extLst>
+                      <a:ext uri="{FF2B5EF4-FFF2-40B4-BE49-F238E27FC236}">
+                        <a16:creationId xmlns:a16="http://schemas.microsoft.com/office/drawing/2014/main" id="{AA4DD5EC-A47E-4C4B-980C-82C1D871F80C}"/>
+                      </a:ext>
+                    </a:extLst>
+                  </p:cNvPr>
+                  <p:cNvSpPr txBox="1">
+                    <a:spLocks noRot="1" noChangeAspect="1" noMove="1" noResize="1" noEditPoints="1" noAdjustHandles="1" noChangeArrowheads="1" noChangeShapeType="1" noTextEdit="1"/>
+                  </p:cNvSpPr>
+                  <p:nvPr/>
+                </p:nvSpPr>
+                <p:spPr>
+                  <a:xfrm>
+                    <a:off x="8858115" y="4856049"/>
+                    <a:ext cx="288726" cy="369332"/>
+                  </a:xfrm>
+                  <a:prstGeom prst="rect">
+                    <a:avLst/>
+                  </a:prstGeom>
+                  <a:blipFill>
+                    <a:blip r:embed="rId12"/>
+                    <a:stretch>
+                      <a:fillRect/>
+                    </a:stretch>
+                  </a:blipFill>
+                </p:spPr>
+                <p:txBody>
+                  <a:bodyPr/>
+                  <a:lstStyle/>
+                  <a:p>
+                    <a:r>
+                      <a:rPr lang="fr-FR">
+                        <a:noFill/>
+                      </a:rPr>
+                      <a:t> </a:t>
+                    </a:r>
+                  </a:p>
+                </p:txBody>
+              </p:sp>
+            </mc:Fallback>
+          </mc:AlternateContent>
+          <p:sp>
+            <p:nvSpPr>
+              <p:cNvPr id="116" name="ZoneTexte 115">
+                <a:extLst>
+                  <a:ext uri="{FF2B5EF4-FFF2-40B4-BE49-F238E27FC236}">
+                    <a16:creationId xmlns:a16="http://schemas.microsoft.com/office/drawing/2014/main" id="{5E66D9AD-1E3D-469B-9728-EFDA34A40406}"/>
+                  </a:ext>
+                </a:extLst>
+              </p:cNvPr>
+              <p:cNvSpPr txBox="1"/>
+              <p:nvPr/>
+            </p:nvSpPr>
+            <p:spPr>
+              <a:xfrm>
+                <a:off x="4549812" y="3365846"/>
+                <a:ext cx="433312" cy="369332"/>
+              </a:xfrm>
+              <a:prstGeom prst="rect">
+                <a:avLst/>
+              </a:prstGeom>
+              <a:noFill/>
+            </p:spPr>
+            <p:txBody>
+              <a:bodyPr wrap="square" rtlCol="0">
+                <a:spAutoFit/>
+              </a:bodyPr>
+              <a:lstStyle/>
+              <a:p>
+                <a:r>
+                  <a:rPr lang="fr-FR" dirty="0">
+                    <a:solidFill>
+                      <a:srgbClr val="E76BF3"/>
+                    </a:solidFill>
+                  </a:rPr>
+                  <a:t>VL</a:t>
+                </a:r>
+              </a:p>
+            </p:txBody>
+          </p:sp>
+          <p:sp>
+            <p:nvSpPr>
+              <p:cNvPr id="117" name="ZoneTexte 116">
+                <a:extLst>
+                  <a:ext uri="{FF2B5EF4-FFF2-40B4-BE49-F238E27FC236}">
+                    <a16:creationId xmlns:a16="http://schemas.microsoft.com/office/drawing/2014/main" id="{E87F7FDE-6BB8-488C-9EFC-A6DC53C31625}"/>
+                  </a:ext>
+                </a:extLst>
+              </p:cNvPr>
+              <p:cNvSpPr txBox="1"/>
+              <p:nvPr/>
+            </p:nvSpPr>
+            <p:spPr>
+              <a:xfrm>
+                <a:off x="6427791" y="3355376"/>
+                <a:ext cx="433312" cy="369332"/>
+              </a:xfrm>
+              <a:prstGeom prst="rect">
+                <a:avLst/>
+              </a:prstGeom>
+              <a:noFill/>
+            </p:spPr>
+            <p:txBody>
+              <a:bodyPr wrap="square" rtlCol="0">
+                <a:spAutoFit/>
+              </a:bodyPr>
+              <a:lstStyle/>
+              <a:p>
+                <a:r>
+                  <a:rPr lang="fr-FR" dirty="0">
+                    <a:solidFill>
+                      <a:srgbClr val="00B0F6"/>
+                    </a:solidFill>
+                  </a:rPr>
+                  <a:t>VL</a:t>
+                </a:r>
+              </a:p>
+            </p:txBody>
+          </p:sp>
+          <p:sp>
+            <p:nvSpPr>
+              <p:cNvPr id="118" name="ZoneTexte 117">
+                <a:extLst>
+                  <a:ext uri="{FF2B5EF4-FFF2-40B4-BE49-F238E27FC236}">
+                    <a16:creationId xmlns:a16="http://schemas.microsoft.com/office/drawing/2014/main" id="{D5C276D5-9E8E-4A5A-B531-45F42866138C}"/>
+                  </a:ext>
+                </a:extLst>
+              </p:cNvPr>
+              <p:cNvSpPr txBox="1"/>
+              <p:nvPr/>
+            </p:nvSpPr>
+            <p:spPr>
+              <a:xfrm>
+                <a:off x="8502361" y="3343943"/>
+                <a:ext cx="433311" cy="369332"/>
+              </a:xfrm>
+              <a:prstGeom prst="rect">
+                <a:avLst/>
+              </a:prstGeom>
+              <a:noFill/>
+            </p:spPr>
+            <p:txBody>
+              <a:bodyPr wrap="square" rtlCol="0">
+                <a:spAutoFit/>
+              </a:bodyPr>
+              <a:lstStyle/>
+              <a:p>
+                <a:r>
+                  <a:rPr lang="fr-FR" dirty="0">
+                    <a:solidFill>
+                      <a:srgbClr val="00BF7D"/>
+                    </a:solidFill>
+                  </a:rPr>
+                  <a:t>VL</a:t>
+                </a:r>
+              </a:p>
+            </p:txBody>
+          </p:sp>
+          <p:cxnSp>
+            <p:nvCxnSpPr>
+              <p:cNvPr id="74" name="Connecteur droit avec flèche 73">
+                <a:extLst>
+                  <a:ext uri="{FF2B5EF4-FFF2-40B4-BE49-F238E27FC236}">
+                    <a16:creationId xmlns:a16="http://schemas.microsoft.com/office/drawing/2014/main" id="{524AA70D-8B5C-494E-AF4F-B46E8EF2475E}"/>
+                  </a:ext>
+                </a:extLst>
+              </p:cNvPr>
+              <p:cNvCxnSpPr>
+                <a:cxnSpLocks/>
+                <a:stCxn id="69" idx="3"/>
+                <a:endCxn id="70" idx="1"/>
+              </p:cNvCxnSpPr>
+              <p:nvPr/>
+            </p:nvCxnSpPr>
+            <p:spPr>
+              <a:xfrm flipV="1">
+                <a:off x="4881220" y="4152547"/>
+                <a:ext cx="1613978" cy="2"/>
+              </a:xfrm>
+              <a:prstGeom prst="straightConnector1">
+                <a:avLst/>
+              </a:prstGeom>
+              <a:ln>
+                <a:solidFill>
+                  <a:schemeClr val="tx1"/>
+                </a:solidFill>
+                <a:headEnd type="triangle"/>
+                <a:tailEnd type="triangle"/>
+              </a:ln>
+            </p:spPr>
+            <p:style>
+              <a:lnRef idx="1">
+                <a:schemeClr val="accent1"/>
+              </a:lnRef>
+              <a:fillRef idx="0">
+                <a:schemeClr val="accent1"/>
+              </a:fillRef>
+              <a:effectRef idx="0">
+                <a:schemeClr val="accent1"/>
+              </a:effectRef>
+              <a:fontRef idx="minor">
+                <a:schemeClr val="tx1"/>
+              </a:fontRef>
+            </p:style>
+          </p:cxnSp>
+          <p:cxnSp>
+            <p:nvCxnSpPr>
+              <p:cNvPr id="77" name="Connecteur droit avec flèche 76">
+                <a:extLst>
+                  <a:ext uri="{FF2B5EF4-FFF2-40B4-BE49-F238E27FC236}">
+                    <a16:creationId xmlns:a16="http://schemas.microsoft.com/office/drawing/2014/main" id="{89B39AA4-2DD5-42B3-B92E-FA10F2E10E27}"/>
+                  </a:ext>
+                </a:extLst>
+              </p:cNvPr>
+              <p:cNvCxnSpPr>
+                <a:stCxn id="70" idx="3"/>
+                <a:endCxn id="71" idx="1"/>
+              </p:cNvCxnSpPr>
+              <p:nvPr/>
+            </p:nvCxnSpPr>
+            <p:spPr>
+              <a:xfrm>
+                <a:off x="6739134" y="4152547"/>
+                <a:ext cx="1857914" cy="2"/>
+              </a:xfrm>
+              <a:prstGeom prst="straightConnector1">
+                <a:avLst/>
+              </a:prstGeom>
+              <a:ln>
+                <a:headEnd type="triangle"/>
+                <a:tailEnd type="triangle"/>
+              </a:ln>
+            </p:spPr>
+            <p:style>
+              <a:lnRef idx="1">
+                <a:schemeClr val="dk1"/>
+              </a:lnRef>
+              <a:fillRef idx="0">
+                <a:schemeClr val="dk1"/>
+              </a:fillRef>
+              <a:effectRef idx="0">
+                <a:schemeClr val="dk1"/>
+              </a:effectRef>
+              <a:fontRef idx="minor">
+                <a:schemeClr val="tx1"/>
+              </a:fontRef>
+            </p:style>
+          </p:cxnSp>
+        </p:grpSp>
+        <p:cxnSp>
+          <p:nvCxnSpPr>
+            <p:cNvPr id="131" name="Connecteur : en arc 130">
+              <a:extLst>
+                <a:ext uri="{FF2B5EF4-FFF2-40B4-BE49-F238E27FC236}">
+                  <a16:creationId xmlns:a16="http://schemas.microsoft.com/office/drawing/2014/main" id="{39E2FBEE-E2C5-46BB-A288-CB1EC7EA8A2C}"/>
+                </a:ext>
+              </a:extLst>
+            </p:cNvPr>
+            <p:cNvCxnSpPr>
+              <a:stCxn id="71" idx="0"/>
+              <a:endCxn id="120" idx="2"/>
+            </p:cNvCxnSpPr>
+            <p:nvPr/>
+          </p:nvCxnSpPr>
+          <p:spPr>
+            <a:xfrm rot="16200000" flipH="1" flipV="1">
+              <a:off x="7526146" y="911263"/>
+              <a:ext cx="19186" cy="5646076"/>
+            </a:xfrm>
+            <a:prstGeom prst="curvedConnector5">
+              <a:avLst>
+                <a:gd name="adj1" fmla="val -5170426"/>
+                <a:gd name="adj2" fmla="val 49310"/>
+                <a:gd name="adj3" fmla="val -5179740"/>
+              </a:avLst>
+            </a:prstGeom>
+            <a:ln>
+              <a:solidFill>
+                <a:schemeClr val="tx1"/>
+              </a:solidFill>
+              <a:tailEnd type="triangle"/>
+            </a:ln>
+          </p:spPr>
+          <p:style>
+            <a:lnRef idx="1">
+              <a:schemeClr val="accent1"/>
+            </a:lnRef>
+            <a:fillRef idx="0">
+              <a:schemeClr val="accent1"/>
+            </a:fillRef>
+            <a:effectRef idx="0">
+              <a:schemeClr val="accent1"/>
+            </a:effectRef>
+            <a:fontRef idx="minor">
+              <a:schemeClr val="tx1"/>
+            </a:fontRef>
+          </p:style>
+        </p:cxnSp>
+        <p:cxnSp>
+          <p:nvCxnSpPr>
+            <p:cNvPr id="158" name="Connecteur droit avec flèche 157">
+              <a:extLst>
+                <a:ext uri="{FF2B5EF4-FFF2-40B4-BE49-F238E27FC236}">
+                  <a16:creationId xmlns:a16="http://schemas.microsoft.com/office/drawing/2014/main" id="{323080F3-238A-4C87-AE7F-98BB205B63DE}"/>
+                </a:ext>
+              </a:extLst>
+            </p:cNvPr>
+            <p:cNvCxnSpPr>
+              <a:cxnSpLocks/>
+            </p:cNvCxnSpPr>
+            <p:nvPr/>
+          </p:nvCxnSpPr>
+          <p:spPr>
+            <a:xfrm flipH="1">
+              <a:off x="3521766" y="4156745"/>
+              <a:ext cx="1057746" cy="0"/>
+            </a:xfrm>
+            <a:prstGeom prst="straightConnector1">
+              <a:avLst/>
+            </a:prstGeom>
+            <a:ln w="12700">
               <a:tailEnd type="triangle"/>
             </a:ln>
           </p:spPr>
@@ -7626,30 +8907,71 @@
         </p:cxnSp>
         <p:cxnSp>
           <p:nvCxnSpPr>
-            <p:cNvPr id="24" name="Connecteur droit avec flèche 23">
+            <p:cNvPr id="162" name="Connecteur : en arc 161">
               <a:extLst>
                 <a:ext uri="{FF2B5EF4-FFF2-40B4-BE49-F238E27FC236}">
-                  <a16:creationId xmlns:a16="http://schemas.microsoft.com/office/drawing/2014/main" id="{8A228844-DE5E-43D8-A7DE-DF032FAA7F41}"/>
+                  <a16:creationId xmlns:a16="http://schemas.microsoft.com/office/drawing/2014/main" id="{8C7A9578-94BF-4B64-A8DE-7155CCAA2003}"/>
                 </a:ext>
               </a:extLst>
             </p:cNvPr>
             <p:cNvCxnSpPr>
-              <a:stCxn id="83" idx="1"/>
-              <a:endCxn id="55" idx="3"/>
+              <a:stCxn id="69" idx="2"/>
+              <a:endCxn id="72" idx="2"/>
             </p:cNvCxnSpPr>
             <p:nvPr/>
           </p:nvCxnSpPr>
           <p:spPr>
-            <a:xfrm flipV="1">
-              <a:off x="5297000" y="2629517"/>
-              <a:ext cx="0" cy="1392223"/>
+            <a:xfrm rot="5400000">
+              <a:off x="5540654" y="3741215"/>
+              <a:ext cx="19187" cy="1697533"/>
             </a:xfrm>
-            <a:prstGeom prst="straightConnector1">
+            <a:prstGeom prst="curvedConnector3">
+              <a:avLst>
+                <a:gd name="adj1" fmla="val 1291432"/>
+              </a:avLst>
+            </a:prstGeom>
+            <a:ln>
+              <a:solidFill>
+                <a:schemeClr val="tx1"/>
+              </a:solidFill>
+              <a:tailEnd type="triangle"/>
+            </a:ln>
+          </p:spPr>
+          <p:style>
+            <a:lnRef idx="1">
+              <a:schemeClr val="accent1"/>
+            </a:lnRef>
+            <a:fillRef idx="0">
+              <a:schemeClr val="accent1"/>
+            </a:fillRef>
+            <a:effectRef idx="0">
+              <a:schemeClr val="accent1"/>
+            </a:effectRef>
+            <a:fontRef idx="minor">
+              <a:schemeClr val="tx1"/>
+            </a:fontRef>
+          </p:style>
+        </p:cxnSp>
+        <p:sp>
+          <p:nvSpPr>
+            <p:cNvPr id="163" name="Accolade ouvrante 162">
+              <a:extLst>
+                <a:ext uri="{FF2B5EF4-FFF2-40B4-BE49-F238E27FC236}">
+                  <a16:creationId xmlns:a16="http://schemas.microsoft.com/office/drawing/2014/main" id="{6B7CDF5E-22D6-45EC-8E9D-30E9C48C2D47}"/>
+                </a:ext>
+              </a:extLst>
+            </p:cNvPr>
+            <p:cNvSpPr/>
+            <p:nvPr/>
+          </p:nvSpPr>
+          <p:spPr>
+            <a:xfrm>
+              <a:off x="2423234" y="2499919"/>
+              <a:ext cx="269794" cy="2060004"/>
+            </a:xfrm>
+            <a:prstGeom prst="leftBrace">
               <a:avLst/>
             </a:prstGeom>
-            <a:ln>
-              <a:tailEnd type="triangle"/>
-            </a:ln>
           </p:spPr>
           <p:style>
             <a:lnRef idx="1">
@@ -7665,566 +8987,1241 @@
               <a:schemeClr val="tx1"/>
             </a:fontRef>
           </p:style>
-        </p:cxnSp>
-        <p:cxnSp>
-          <p:nvCxnSpPr>
-            <p:cNvPr id="26" name="Connecteur droit avec flèche 25">
+          <p:txBody>
+            <a:bodyPr rtlCol="0" anchor="ctr"/>
+            <a:lstStyle/>
+            <a:p>
+              <a:pPr algn="ctr"/>
+              <a:endParaRPr lang="fr-FR"/>
+            </a:p>
+          </p:txBody>
+        </p:sp>
+        <p:grpSp>
+          <p:nvGrpSpPr>
+            <p:cNvPr id="165" name="Groupe 164">
               <a:extLst>
                 <a:ext uri="{FF2B5EF4-FFF2-40B4-BE49-F238E27FC236}">
-                  <a16:creationId xmlns:a16="http://schemas.microsoft.com/office/drawing/2014/main" id="{45A9A7C0-CABE-4D22-8DA2-F0ACEDBFA7DA}"/>
+                  <a16:creationId xmlns:a16="http://schemas.microsoft.com/office/drawing/2014/main" id="{632FD922-3FE4-4977-9DC4-9FF08F578DFE}"/>
                 </a:ext>
               </a:extLst>
             </p:cNvPr>
-            <p:cNvCxnSpPr>
-              <a:stCxn id="56" idx="5"/>
-              <a:endCxn id="83" idx="2"/>
-            </p:cNvCxnSpPr>
+            <p:cNvGrpSpPr/>
             <p:nvPr/>
-          </p:nvCxnSpPr>
-          <p:spPr>
+          </p:nvGrpSpPr>
+          <p:grpSpPr>
             <a:xfrm>
-              <a:off x="3747518" y="3553266"/>
-              <a:ext cx="1455249" cy="666039"/>
+              <a:off x="127770" y="1979802"/>
+              <a:ext cx="2108245" cy="2371752"/>
+              <a:chOff x="109245" y="4546829"/>
+              <a:chExt cx="2108245" cy="1971418"/>
             </a:xfrm>
-            <a:prstGeom prst="straightConnector1">
-              <a:avLst/>
-            </a:prstGeom>
-            <a:ln>
-              <a:tailEnd type="triangle"/>
-            </a:ln>
-          </p:spPr>
-          <p:style>
-            <a:lnRef idx="1">
-              <a:schemeClr val="dk1"/>
-            </a:lnRef>
-            <a:fillRef idx="0">
-              <a:schemeClr val="dk1"/>
-            </a:fillRef>
-            <a:effectRef idx="0">
-              <a:schemeClr val="dk1"/>
-            </a:effectRef>
-            <a:fontRef idx="minor">
-              <a:schemeClr val="tx1"/>
-            </a:fontRef>
-          </p:style>
-        </p:cxnSp>
-        <p:cxnSp>
-          <p:nvCxnSpPr>
-            <p:cNvPr id="28" name="Connecteur droit avec flèche 27">
+          </p:grpSpPr>
+          <p:sp>
+            <p:nvSpPr>
+              <p:cNvPr id="166" name="Rectangle 165">
+                <a:extLst>
+                  <a:ext uri="{FF2B5EF4-FFF2-40B4-BE49-F238E27FC236}">
+                    <a16:creationId xmlns:a16="http://schemas.microsoft.com/office/drawing/2014/main" id="{FD8E0F23-DBE2-4B01-99E4-B21DE242CE1C}"/>
+                  </a:ext>
+                </a:extLst>
+              </p:cNvPr>
+              <p:cNvSpPr/>
+              <p:nvPr/>
+            </p:nvSpPr>
+            <p:spPr>
+              <a:xfrm>
+                <a:off x="109245" y="4546829"/>
+                <a:ext cx="2108245" cy="1971418"/>
+              </a:xfrm>
+              <a:prstGeom prst="rect">
+                <a:avLst/>
+              </a:prstGeom>
+              <a:solidFill>
+                <a:schemeClr val="accent4">
+                  <a:lumMod val="20000"/>
+                  <a:lumOff val="80000"/>
+                </a:schemeClr>
+              </a:solidFill>
+              <a:ln>
+                <a:solidFill>
+                  <a:schemeClr val="tx1"/>
+                </a:solidFill>
+              </a:ln>
+            </p:spPr>
+            <p:style>
+              <a:lnRef idx="2">
+                <a:schemeClr val="accent1">
+                  <a:shade val="50000"/>
+                </a:schemeClr>
+              </a:lnRef>
+              <a:fillRef idx="1">
+                <a:schemeClr val="accent1"/>
+              </a:fillRef>
+              <a:effectRef idx="0">
+                <a:schemeClr val="accent1"/>
+              </a:effectRef>
+              <a:fontRef idx="minor">
+                <a:schemeClr val="lt1"/>
+              </a:fontRef>
+            </p:style>
+            <p:txBody>
+              <a:bodyPr rtlCol="0" anchor="ctr"/>
+              <a:lstStyle/>
+              <a:p>
+                <a:pPr algn="ctr"/>
+                <a:endParaRPr lang="fr-FR"/>
+              </a:p>
+            </p:txBody>
+          </p:sp>
+          <mc:AlternateContent xmlns:mc="http://schemas.openxmlformats.org/markup-compatibility/2006">
+            <mc:Choice xmlns:a14="http://schemas.microsoft.com/office/drawing/2010/main" Requires="a14">
+              <p:sp>
+                <p:nvSpPr>
+                  <p:cNvPr id="167" name="ZoneTexte 166">
+                    <a:extLst>
+                      <a:ext uri="{FF2B5EF4-FFF2-40B4-BE49-F238E27FC236}">
+                        <a16:creationId xmlns:a16="http://schemas.microsoft.com/office/drawing/2014/main" id="{B27D330A-2795-4146-B602-D66E630B9387}"/>
+                      </a:ext>
+                    </a:extLst>
+                  </p:cNvPr>
+                  <p:cNvSpPr txBox="1"/>
+                  <p:nvPr/>
+                </p:nvSpPr>
+                <p:spPr>
+                  <a:xfrm>
+                    <a:off x="207540" y="4574292"/>
+                    <a:ext cx="1903054" cy="1848664"/>
+                  </a:xfrm>
+                  <a:prstGeom prst="rect">
+                    <a:avLst/>
+                  </a:prstGeom>
+                  <a:noFill/>
+                </p:spPr>
+                <p:txBody>
+                  <a:bodyPr wrap="square" rtlCol="0">
+                    <a:spAutoFit/>
+                  </a:bodyPr>
+                  <a:lstStyle/>
+                  <a:p>
+                    <a:pPr algn="ctr"/>
+                    <a:r>
+                      <a:rPr lang="fr-FR" sz="1050" u="sng" dirty="0"/>
+                      <a:t>Structural model:</a:t>
+                    </a:r>
+                    <a:r>
+                      <a:rPr lang="fr-FR" sz="1050" dirty="0"/>
+                      <a:t> </a:t>
+                    </a:r>
+                    <a:r>
+                      <a:rPr lang="fr-FR" sz="1050" dirty="0" err="1"/>
+                      <a:t>Between</a:t>
+                    </a:r>
+                    <a:r>
+                      <a:rPr lang="fr-FR" sz="1050" dirty="0"/>
+                      <a:t> latent variables (VL)</a:t>
+                    </a:r>
+                  </a:p>
+                  <a:p>
+                    <a:pPr algn="ctr"/>
+                    <a:endParaRPr lang="fr-FR" sz="1050" u="sng" dirty="0"/>
+                  </a:p>
+                  <a:p>
+                    <a:pPr algn="ctr"/>
+                    <a:r>
+                      <a:rPr lang="fr-FR" sz="1050" b="1" dirty="0"/>
+                      <a:t>Main model: </a:t>
+                    </a:r>
+                    <a14:m>
+                      <m:oMath xmlns:m="http://schemas.openxmlformats.org/officeDocument/2006/math">
+                        <m:r>
+                          <a:rPr lang="fr-FR" sz="1050" b="0" i="1" smtClean="0">
+                            <a:solidFill>
+                              <a:srgbClr val="F8766D"/>
+                            </a:solidFill>
+                            <a:latin typeface="Cambria Math" panose="02040503050406030204" pitchFamily="18" charset="0"/>
+                          </a:rPr>
+                          <m:t>𝑉𝐿</m:t>
+                        </m:r>
+                        <m:r>
+                          <a:rPr lang="fr-FR" sz="1050" b="0" i="1" smtClean="0">
+                            <a:solidFill>
+                              <a:srgbClr val="F8766D"/>
+                            </a:solidFill>
+                            <a:latin typeface="Cambria Math" panose="02040503050406030204" pitchFamily="18" charset="0"/>
+                          </a:rPr>
+                          <m:t>= </m:t>
+                        </m:r>
+                        <m:sSub>
+                          <m:sSubPr>
+                            <m:ctrlPr>
+                              <a:rPr lang="fr-FR" sz="1050" b="0" i="1" smtClean="0">
+                                <a:solidFill>
+                                  <a:srgbClr val="A3A500"/>
+                                </a:solidFill>
+                                <a:latin typeface="Cambria Math" panose="02040503050406030204" pitchFamily="18" charset="0"/>
+                              </a:rPr>
+                            </m:ctrlPr>
+                          </m:sSubPr>
+                          <m:e>
+                            <m:r>
+                              <a:rPr lang="fr-FR" sz="1050" b="0" i="1" smtClean="0">
+                                <a:solidFill>
+                                  <a:srgbClr val="A3A500"/>
+                                </a:solidFill>
+                                <a:latin typeface="Cambria Math" panose="02040503050406030204" pitchFamily="18" charset="0"/>
+                                <a:ea typeface="Cambria Math" panose="02040503050406030204" pitchFamily="18" charset="0"/>
+                              </a:rPr>
+                              <m:t>𝛽</m:t>
+                            </m:r>
+                          </m:e>
+                          <m:sub>
+                            <m:r>
+                              <a:rPr lang="fr-FR" sz="1050" b="0" i="1" smtClean="0">
+                                <a:solidFill>
+                                  <a:srgbClr val="A3A500"/>
+                                </a:solidFill>
+                                <a:latin typeface="Cambria Math" panose="02040503050406030204" pitchFamily="18" charset="0"/>
+                              </a:rPr>
+                              <m:t>1</m:t>
+                            </m:r>
+                          </m:sub>
+                        </m:sSub>
+                        <m:r>
+                          <a:rPr lang="fr-FR" sz="1050" b="0" i="1" smtClean="0">
+                            <a:solidFill>
+                              <a:srgbClr val="A3A500"/>
+                            </a:solidFill>
+                            <a:latin typeface="Cambria Math" panose="02040503050406030204" pitchFamily="18" charset="0"/>
+                          </a:rPr>
+                          <m:t>∗</m:t>
+                        </m:r>
+                        <m:r>
+                          <a:rPr lang="fr-FR" sz="1050" b="0" i="1" smtClean="0">
+                            <a:solidFill>
+                              <a:srgbClr val="A3A500"/>
+                            </a:solidFill>
+                            <a:latin typeface="Cambria Math" panose="02040503050406030204" pitchFamily="18" charset="0"/>
+                          </a:rPr>
+                          <m:t>𝑉𝐿</m:t>
+                        </m:r>
+                        <m:r>
+                          <a:rPr lang="fr-FR" sz="1050" b="0" i="1" smtClean="0">
+                            <a:solidFill>
+                              <a:schemeClr val="tx1"/>
+                            </a:solidFill>
+                            <a:latin typeface="Cambria Math" panose="02040503050406030204" pitchFamily="18" charset="0"/>
+                          </a:rPr>
+                          <m:t>+</m:t>
+                        </m:r>
+                        <m:sSub>
+                          <m:sSubPr>
+                            <m:ctrlPr>
+                              <a:rPr lang="fr-FR" sz="1050" i="1" smtClean="0">
+                                <a:solidFill>
+                                  <a:srgbClr val="E76BF3"/>
+                                </a:solidFill>
+                                <a:latin typeface="Cambria Math" panose="02040503050406030204" pitchFamily="18" charset="0"/>
+                              </a:rPr>
+                            </m:ctrlPr>
+                          </m:sSubPr>
+                          <m:e>
+                            <m:r>
+                              <a:rPr lang="fr-FR" sz="1050" i="1">
+                                <a:solidFill>
+                                  <a:srgbClr val="E76BF3"/>
+                                </a:solidFill>
+                                <a:latin typeface="Cambria Math" panose="02040503050406030204" pitchFamily="18" charset="0"/>
+                                <a:ea typeface="Cambria Math" panose="02040503050406030204" pitchFamily="18" charset="0"/>
+                              </a:rPr>
+                              <m:t>𝛽</m:t>
+                            </m:r>
+                          </m:e>
+                          <m:sub>
+                            <m:r>
+                              <a:rPr lang="fr-FR" sz="1050" b="0" i="1" smtClean="0">
+                                <a:solidFill>
+                                  <a:srgbClr val="E76BF3"/>
+                                </a:solidFill>
+                                <a:latin typeface="Cambria Math" panose="02040503050406030204" pitchFamily="18" charset="0"/>
+                                <a:ea typeface="Cambria Math" panose="02040503050406030204" pitchFamily="18" charset="0"/>
+                              </a:rPr>
+                              <m:t>2</m:t>
+                            </m:r>
+                          </m:sub>
+                        </m:sSub>
+                        <m:r>
+                          <a:rPr lang="fr-FR" sz="1050" i="1">
+                            <a:solidFill>
+                              <a:srgbClr val="E76BF3"/>
+                            </a:solidFill>
+                            <a:latin typeface="Cambria Math" panose="02040503050406030204" pitchFamily="18" charset="0"/>
+                          </a:rPr>
+                          <m:t>∗</m:t>
+                        </m:r>
+                        <m:r>
+                          <a:rPr lang="fr-FR" sz="1050" i="1">
+                            <a:solidFill>
+                              <a:srgbClr val="E76BF3"/>
+                            </a:solidFill>
+                            <a:latin typeface="Cambria Math" panose="02040503050406030204" pitchFamily="18" charset="0"/>
+                          </a:rPr>
+                          <m:t>𝑉𝐿</m:t>
+                        </m:r>
+                        <m:r>
+                          <a:rPr lang="fr-FR" sz="1050" b="0" i="1" smtClean="0">
+                            <a:solidFill>
+                              <a:schemeClr val="tx1"/>
+                            </a:solidFill>
+                            <a:latin typeface="Cambria Math" panose="02040503050406030204" pitchFamily="18" charset="0"/>
+                          </a:rPr>
+                          <m:t>+</m:t>
+                        </m:r>
+                        <m:sSub>
+                          <m:sSubPr>
+                            <m:ctrlPr>
+                              <a:rPr lang="fr-FR" sz="1050" i="1" smtClean="0">
+                                <a:solidFill>
+                                  <a:srgbClr val="00B0F6"/>
+                                </a:solidFill>
+                                <a:latin typeface="Cambria Math" panose="02040503050406030204" pitchFamily="18" charset="0"/>
+                              </a:rPr>
+                            </m:ctrlPr>
+                          </m:sSubPr>
+                          <m:e>
+                            <m:r>
+                              <a:rPr lang="fr-FR" sz="1050" i="1">
+                                <a:solidFill>
+                                  <a:srgbClr val="00B0F6"/>
+                                </a:solidFill>
+                                <a:latin typeface="Cambria Math" panose="02040503050406030204" pitchFamily="18" charset="0"/>
+                                <a:ea typeface="Cambria Math" panose="02040503050406030204" pitchFamily="18" charset="0"/>
+                              </a:rPr>
+                              <m:t>𝛽</m:t>
+                            </m:r>
+                          </m:e>
+                          <m:sub>
+                            <m:r>
+                              <a:rPr lang="fr-FR" sz="1050" b="0" i="1" smtClean="0">
+                                <a:solidFill>
+                                  <a:srgbClr val="00B0F6"/>
+                                </a:solidFill>
+                                <a:latin typeface="Cambria Math" panose="02040503050406030204" pitchFamily="18" charset="0"/>
+                                <a:ea typeface="Cambria Math" panose="02040503050406030204" pitchFamily="18" charset="0"/>
+                              </a:rPr>
+                              <m:t>3</m:t>
+                            </m:r>
+                          </m:sub>
+                        </m:sSub>
+                        <m:r>
+                          <a:rPr lang="fr-FR" sz="1050" i="1">
+                            <a:solidFill>
+                              <a:srgbClr val="00B0F6"/>
+                            </a:solidFill>
+                            <a:latin typeface="Cambria Math" panose="02040503050406030204" pitchFamily="18" charset="0"/>
+                          </a:rPr>
+                          <m:t>∗</m:t>
+                        </m:r>
+                        <m:r>
+                          <a:rPr lang="fr-FR" sz="1050" i="1">
+                            <a:solidFill>
+                              <a:srgbClr val="00B0F6"/>
+                            </a:solidFill>
+                            <a:latin typeface="Cambria Math" panose="02040503050406030204" pitchFamily="18" charset="0"/>
+                          </a:rPr>
+                          <m:t>𝑉𝐿</m:t>
+                        </m:r>
+                        <m:r>
+                          <a:rPr lang="fr-FR" sz="1050" b="0" i="1" smtClean="0">
+                            <a:solidFill>
+                              <a:schemeClr val="tx1"/>
+                            </a:solidFill>
+                            <a:latin typeface="Cambria Math" panose="02040503050406030204" pitchFamily="18" charset="0"/>
+                          </a:rPr>
+                          <m:t>+</m:t>
+                        </m:r>
+                        <m:sSub>
+                          <m:sSubPr>
+                            <m:ctrlPr>
+                              <a:rPr lang="fr-FR" sz="1050" i="1" smtClean="0">
+                                <a:solidFill>
+                                  <a:srgbClr val="00BF7D"/>
+                                </a:solidFill>
+                                <a:latin typeface="Cambria Math" panose="02040503050406030204" pitchFamily="18" charset="0"/>
+                              </a:rPr>
+                            </m:ctrlPr>
+                          </m:sSubPr>
+                          <m:e>
+                            <m:r>
+                              <a:rPr lang="fr-FR" sz="1050" i="1">
+                                <a:solidFill>
+                                  <a:srgbClr val="00BF7D"/>
+                                </a:solidFill>
+                                <a:latin typeface="Cambria Math" panose="02040503050406030204" pitchFamily="18" charset="0"/>
+                                <a:ea typeface="Cambria Math" panose="02040503050406030204" pitchFamily="18" charset="0"/>
+                              </a:rPr>
+                              <m:t>𝛽</m:t>
+                            </m:r>
+                          </m:e>
+                          <m:sub>
+                            <m:r>
+                              <a:rPr lang="fr-FR" sz="1050" b="0" i="1" smtClean="0">
+                                <a:solidFill>
+                                  <a:srgbClr val="00BF7D"/>
+                                </a:solidFill>
+                                <a:latin typeface="Cambria Math" panose="02040503050406030204" pitchFamily="18" charset="0"/>
+                                <a:ea typeface="Cambria Math" panose="02040503050406030204" pitchFamily="18" charset="0"/>
+                              </a:rPr>
+                              <m:t>4</m:t>
+                            </m:r>
+                          </m:sub>
+                        </m:sSub>
+                        <m:r>
+                          <a:rPr lang="fr-FR" sz="1050" i="1">
+                            <a:solidFill>
+                              <a:srgbClr val="00BF7D"/>
+                            </a:solidFill>
+                            <a:latin typeface="Cambria Math" panose="02040503050406030204" pitchFamily="18" charset="0"/>
+                          </a:rPr>
+                          <m:t>∗</m:t>
+                        </m:r>
+                        <m:r>
+                          <a:rPr lang="fr-FR" sz="1050" i="1">
+                            <a:solidFill>
+                              <a:srgbClr val="00BF7D"/>
+                            </a:solidFill>
+                            <a:latin typeface="Cambria Math" panose="02040503050406030204" pitchFamily="18" charset="0"/>
+                          </a:rPr>
+                          <m:t>𝑉𝐿</m:t>
+                        </m:r>
+                      </m:oMath>
+                    </a14:m>
+                    <a:endParaRPr lang="fr-FR" sz="1050" dirty="0"/>
+                  </a:p>
+                  <a:p>
+                    <a:pPr algn="ctr"/>
+                    <a:endParaRPr lang="fr-FR" sz="1050" dirty="0"/>
+                  </a:p>
+                  <a:p>
+                    <a:pPr algn="ctr"/>
+                    <a:r>
+                      <a:rPr lang="fr-FR" sz="1050" b="1" dirty="0"/>
+                      <a:t>AMC </a:t>
+                    </a:r>
+                    <a:r>
+                      <a:rPr lang="fr-FR" sz="1050" b="1" dirty="0" err="1"/>
+                      <a:t>submodel</a:t>
+                    </a:r>
+                    <a:r>
+                      <a:rPr lang="fr-FR" sz="1050" b="1" dirty="0"/>
+                      <a:t>:</a:t>
+                    </a:r>
+                    <a:r>
+                      <a:rPr lang="fr-FR" sz="1050" dirty="0"/>
+                      <a:t> </a:t>
+                    </a:r>
+                    <a14:m>
+                      <m:oMath xmlns:m="http://schemas.openxmlformats.org/officeDocument/2006/math">
+                        <m:r>
+                          <a:rPr lang="fr-FR" sz="1050" b="0" i="1" smtClean="0">
+                            <a:solidFill>
+                              <a:srgbClr val="A3A500"/>
+                            </a:solidFill>
+                            <a:latin typeface="Cambria Math" panose="02040503050406030204" pitchFamily="18" charset="0"/>
+                          </a:rPr>
+                          <m:t>𝑉𝐿</m:t>
+                        </m:r>
+                        <m:r>
+                          <a:rPr lang="fr-FR" sz="1050" b="0" i="1" smtClean="0">
+                            <a:solidFill>
+                              <a:srgbClr val="F8766D"/>
+                            </a:solidFill>
+                            <a:latin typeface="Cambria Math" panose="02040503050406030204" pitchFamily="18" charset="0"/>
+                          </a:rPr>
+                          <m:t>= </m:t>
+                        </m:r>
+                        <m:sSub>
+                          <m:sSubPr>
+                            <m:ctrlPr>
+                              <a:rPr lang="fr-FR" sz="1050" b="0" i="1" smtClean="0">
+                                <a:solidFill>
+                                  <a:srgbClr val="00BF7D"/>
+                                </a:solidFill>
+                                <a:latin typeface="Cambria Math" panose="02040503050406030204" pitchFamily="18" charset="0"/>
+                              </a:rPr>
+                            </m:ctrlPr>
+                          </m:sSubPr>
+                          <m:e>
+                            <m:r>
+                              <a:rPr lang="fr-FR" sz="1050" b="0" i="1" smtClean="0">
+                                <a:solidFill>
+                                  <a:srgbClr val="00BF7D"/>
+                                </a:solidFill>
+                                <a:latin typeface="Cambria Math" panose="02040503050406030204" pitchFamily="18" charset="0"/>
+                                <a:ea typeface="Cambria Math" panose="02040503050406030204" pitchFamily="18" charset="0"/>
+                              </a:rPr>
+                              <m:t>𝛽</m:t>
+                            </m:r>
+                          </m:e>
+                          <m:sub>
+                            <m:r>
+                              <a:rPr lang="fr-FR" sz="1050" b="0" i="1" smtClean="0">
+                                <a:solidFill>
+                                  <a:srgbClr val="00BF7D"/>
+                                </a:solidFill>
+                                <a:latin typeface="Cambria Math" panose="02040503050406030204" pitchFamily="18" charset="0"/>
+                              </a:rPr>
+                              <m:t>1</m:t>
+                            </m:r>
+                          </m:sub>
+                        </m:sSub>
+                        <m:r>
+                          <a:rPr lang="fr-FR" sz="1050" b="0" i="1" smtClean="0">
+                            <a:solidFill>
+                              <a:srgbClr val="00BF7D"/>
+                            </a:solidFill>
+                            <a:latin typeface="Cambria Math" panose="02040503050406030204" pitchFamily="18" charset="0"/>
+                          </a:rPr>
+                          <m:t>∗</m:t>
+                        </m:r>
+                        <m:r>
+                          <a:rPr lang="fr-FR" sz="1050" b="0" i="1" smtClean="0">
+                            <a:solidFill>
+                              <a:srgbClr val="00BF7D"/>
+                            </a:solidFill>
+                            <a:latin typeface="Cambria Math" panose="02040503050406030204" pitchFamily="18" charset="0"/>
+                          </a:rPr>
+                          <m:t>𝑉𝐿</m:t>
+                        </m:r>
+                        <m:r>
+                          <a:rPr lang="fr-FR" sz="1050" b="0" i="1" smtClean="0">
+                            <a:solidFill>
+                              <a:schemeClr val="tx1"/>
+                            </a:solidFill>
+                            <a:latin typeface="Cambria Math" panose="02040503050406030204" pitchFamily="18" charset="0"/>
+                          </a:rPr>
+                          <m:t>+</m:t>
+                        </m:r>
+                        <m:sSub>
+                          <m:sSubPr>
+                            <m:ctrlPr>
+                              <a:rPr lang="fr-FR" sz="1050" i="1" smtClean="0">
+                                <a:solidFill>
+                                  <a:srgbClr val="E76BF3"/>
+                                </a:solidFill>
+                                <a:latin typeface="Cambria Math" panose="02040503050406030204" pitchFamily="18" charset="0"/>
+                              </a:rPr>
+                            </m:ctrlPr>
+                          </m:sSubPr>
+                          <m:e>
+                            <m:r>
+                              <a:rPr lang="fr-FR" sz="1050" i="1">
+                                <a:solidFill>
+                                  <a:srgbClr val="E76BF3"/>
+                                </a:solidFill>
+                                <a:latin typeface="Cambria Math" panose="02040503050406030204" pitchFamily="18" charset="0"/>
+                                <a:ea typeface="Cambria Math" panose="02040503050406030204" pitchFamily="18" charset="0"/>
+                              </a:rPr>
+                              <m:t>𝛽</m:t>
+                            </m:r>
+                          </m:e>
+                          <m:sub>
+                            <m:r>
+                              <a:rPr lang="fr-FR" sz="1050" b="0" i="1" smtClean="0">
+                                <a:solidFill>
+                                  <a:srgbClr val="E76BF3"/>
+                                </a:solidFill>
+                                <a:latin typeface="Cambria Math" panose="02040503050406030204" pitchFamily="18" charset="0"/>
+                                <a:ea typeface="Cambria Math" panose="02040503050406030204" pitchFamily="18" charset="0"/>
+                              </a:rPr>
+                              <m:t>2</m:t>
+                            </m:r>
+                          </m:sub>
+                        </m:sSub>
+                        <m:r>
+                          <a:rPr lang="fr-FR" sz="1050" i="1">
+                            <a:solidFill>
+                              <a:srgbClr val="E76BF3"/>
+                            </a:solidFill>
+                            <a:latin typeface="Cambria Math" panose="02040503050406030204" pitchFamily="18" charset="0"/>
+                          </a:rPr>
+                          <m:t>∗</m:t>
+                        </m:r>
+                        <m:r>
+                          <a:rPr lang="fr-FR" sz="1050" i="1">
+                            <a:solidFill>
+                              <a:srgbClr val="E76BF3"/>
+                            </a:solidFill>
+                            <a:latin typeface="Cambria Math" panose="02040503050406030204" pitchFamily="18" charset="0"/>
+                          </a:rPr>
+                          <m:t>𝑉𝐿</m:t>
+                        </m:r>
+                      </m:oMath>
+                    </a14:m>
+                    <a:endParaRPr lang="fr-FR" sz="1050" dirty="0"/>
+                  </a:p>
+                  <a:p>
+                    <a:pPr algn="ctr"/>
+                    <a:endParaRPr lang="fr-FR" sz="1050" dirty="0"/>
+                  </a:p>
+                  <a:p>
+                    <a:pPr algn="ctr"/>
+                    <a:r>
+                      <a:rPr lang="fr-FR" sz="1050" b="1" dirty="0"/>
+                      <a:t>One </a:t>
+                    </a:r>
+                    <a:r>
+                      <a:rPr lang="fr-FR" sz="1050" b="1" dirty="0" err="1"/>
+                      <a:t>Health</a:t>
+                    </a:r>
+                    <a:r>
+                      <a:rPr lang="fr-FR" sz="1050" b="1" dirty="0"/>
+                      <a:t> </a:t>
+                    </a:r>
+                    <a:r>
+                      <a:rPr lang="fr-FR" sz="1050" b="1" dirty="0" err="1"/>
+                      <a:t>submodels</a:t>
+                    </a:r>
+                    <a:r>
+                      <a:rPr lang="fr-FR" sz="1050" b="1" dirty="0"/>
+                      <a:t>:</a:t>
+                    </a:r>
+                    <a:br>
+                      <a:rPr lang="fr-FR" sz="1050" b="1" dirty="0"/>
+                    </a:br>
+                    <a14:m>
+                      <m:oMathPara xmlns:m="http://schemas.openxmlformats.org/officeDocument/2006/math">
+                        <m:oMathParaPr>
+                          <m:jc m:val="centerGroup"/>
+                        </m:oMathParaPr>
+                        <m:oMath xmlns:m="http://schemas.openxmlformats.org/officeDocument/2006/math">
+                          <m:d>
+                            <m:dPr>
+                              <m:begChr m:val="{"/>
+                              <m:endChr m:val=""/>
+                              <m:ctrlPr>
+                                <a:rPr lang="fr-FR" sz="1050" b="1" i="1" smtClean="0">
+                                  <a:latin typeface="Cambria Math" panose="02040503050406030204" pitchFamily="18" charset="0"/>
+                                </a:rPr>
+                              </m:ctrlPr>
+                            </m:dPr>
+                            <m:e>
+                              <m:eqArr>
+                                <m:eqArrPr>
+                                  <m:ctrlPr>
+                                    <a:rPr lang="fr-FR" sz="1050" b="1" i="1" smtClean="0">
+                                      <a:latin typeface="Cambria Math" panose="02040503050406030204" pitchFamily="18" charset="0"/>
+                                    </a:rPr>
+                                  </m:ctrlPr>
+                                </m:eqArrPr>
+                                <m:e>
+                                  <m:r>
+                                    <a:rPr lang="fr-FR" sz="1050" i="1" smtClean="0">
+                                      <a:solidFill>
+                                        <a:srgbClr val="E76BF3"/>
+                                      </a:solidFill>
+                                      <a:latin typeface="Cambria Math" panose="02040503050406030204" pitchFamily="18" charset="0"/>
+                                    </a:rPr>
+                                    <m:t>𝑉𝐿</m:t>
+                                  </m:r>
+                                  <m:r>
+                                    <a:rPr lang="fr-FR" sz="1050" i="1">
+                                      <a:solidFill>
+                                        <a:srgbClr val="F8766D"/>
+                                      </a:solidFill>
+                                      <a:latin typeface="Cambria Math" panose="02040503050406030204" pitchFamily="18" charset="0"/>
+                                    </a:rPr>
+                                    <m:t>= </m:t>
+                                  </m:r>
+                                  <m:sSub>
+                                    <m:sSubPr>
+                                      <m:ctrlPr>
+                                        <a:rPr lang="fr-FR" sz="1050" i="1">
+                                          <a:solidFill>
+                                            <a:srgbClr val="00BF7D"/>
+                                          </a:solidFill>
+                                          <a:latin typeface="Cambria Math" panose="02040503050406030204" pitchFamily="18" charset="0"/>
+                                        </a:rPr>
+                                      </m:ctrlPr>
+                                    </m:sSubPr>
+                                    <m:e>
+                                      <m:r>
+                                        <a:rPr lang="fr-FR" sz="1050" i="1">
+                                          <a:solidFill>
+                                            <a:srgbClr val="00BF7D"/>
+                                          </a:solidFill>
+                                          <a:latin typeface="Cambria Math" panose="02040503050406030204" pitchFamily="18" charset="0"/>
+                                          <a:ea typeface="Cambria Math" panose="02040503050406030204" pitchFamily="18" charset="0"/>
+                                        </a:rPr>
+                                        <m:t>𝛽</m:t>
+                                      </m:r>
+                                    </m:e>
+                                    <m:sub>
+                                      <m:r>
+                                        <a:rPr lang="fr-FR" sz="1050" i="1">
+                                          <a:solidFill>
+                                            <a:srgbClr val="00BF7D"/>
+                                          </a:solidFill>
+                                          <a:latin typeface="Cambria Math" panose="02040503050406030204" pitchFamily="18" charset="0"/>
+                                        </a:rPr>
+                                        <m:t>1</m:t>
+                                      </m:r>
+                                    </m:sub>
+                                  </m:sSub>
+                                  <m:r>
+                                    <a:rPr lang="fr-FR" sz="1050" i="1">
+                                      <a:solidFill>
+                                        <a:srgbClr val="00BF7D"/>
+                                      </a:solidFill>
+                                      <a:latin typeface="Cambria Math" panose="02040503050406030204" pitchFamily="18" charset="0"/>
+                                    </a:rPr>
+                                    <m:t>∗</m:t>
+                                  </m:r>
+                                  <m:r>
+                                    <a:rPr lang="fr-FR" sz="1050" i="1">
+                                      <a:solidFill>
+                                        <a:srgbClr val="00BF7D"/>
+                                      </a:solidFill>
+                                      <a:latin typeface="Cambria Math" panose="02040503050406030204" pitchFamily="18" charset="0"/>
+                                    </a:rPr>
+                                    <m:t>𝑉𝐿</m:t>
+                                  </m:r>
+                                  <m:r>
+                                    <a:rPr lang="fr-FR" sz="1050" i="1">
+                                      <a:latin typeface="Cambria Math" panose="02040503050406030204" pitchFamily="18" charset="0"/>
+                                    </a:rPr>
+                                    <m:t>+</m:t>
+                                  </m:r>
+                                  <m:sSub>
+                                    <m:sSubPr>
+                                      <m:ctrlPr>
+                                        <a:rPr lang="fr-FR" sz="1050" i="1" smtClean="0">
+                                          <a:solidFill>
+                                            <a:srgbClr val="00B0F6"/>
+                                          </a:solidFill>
+                                          <a:latin typeface="Cambria Math" panose="02040503050406030204" pitchFamily="18" charset="0"/>
+                                        </a:rPr>
+                                      </m:ctrlPr>
+                                    </m:sSubPr>
+                                    <m:e>
+                                      <m:r>
+                                        <a:rPr lang="fr-FR" sz="1050" i="1">
+                                          <a:solidFill>
+                                            <a:srgbClr val="00B0F6"/>
+                                          </a:solidFill>
+                                          <a:latin typeface="Cambria Math" panose="02040503050406030204" pitchFamily="18" charset="0"/>
+                                          <a:ea typeface="Cambria Math" panose="02040503050406030204" pitchFamily="18" charset="0"/>
+                                        </a:rPr>
+                                        <m:t>𝛽</m:t>
+                                      </m:r>
+                                    </m:e>
+                                    <m:sub>
+                                      <m:r>
+                                        <a:rPr lang="fr-FR" sz="1050" i="1">
+                                          <a:solidFill>
+                                            <a:srgbClr val="00B0F6"/>
+                                          </a:solidFill>
+                                          <a:latin typeface="Cambria Math" panose="02040503050406030204" pitchFamily="18" charset="0"/>
+                                          <a:ea typeface="Cambria Math" panose="02040503050406030204" pitchFamily="18" charset="0"/>
+                                        </a:rPr>
+                                        <m:t>2</m:t>
+                                      </m:r>
+                                    </m:sub>
+                                  </m:sSub>
+                                  <m:r>
+                                    <a:rPr lang="fr-FR" sz="1050" i="1">
+                                      <a:solidFill>
+                                        <a:srgbClr val="00B0F6"/>
+                                      </a:solidFill>
+                                      <a:latin typeface="Cambria Math" panose="02040503050406030204" pitchFamily="18" charset="0"/>
+                                    </a:rPr>
+                                    <m:t>∗</m:t>
+                                  </m:r>
+                                  <m:r>
+                                    <a:rPr lang="fr-FR" sz="1050" i="1">
+                                      <a:solidFill>
+                                        <a:srgbClr val="00B0F6"/>
+                                      </a:solidFill>
+                                      <a:latin typeface="Cambria Math" panose="02040503050406030204" pitchFamily="18" charset="0"/>
+                                    </a:rPr>
+                                    <m:t>𝑉𝐿</m:t>
+                                  </m:r>
+                                </m:e>
+                                <m:e>
+                                  <m:r>
+                                    <a:rPr lang="fr-FR" sz="1050" i="1" smtClean="0">
+                                      <a:solidFill>
+                                        <a:srgbClr val="00B0F6"/>
+                                      </a:solidFill>
+                                      <a:latin typeface="Cambria Math" panose="02040503050406030204" pitchFamily="18" charset="0"/>
+                                    </a:rPr>
+                                    <m:t>𝑉𝐿</m:t>
+                                  </m:r>
+                                  <m:r>
+                                    <a:rPr lang="fr-FR" sz="1050" i="1">
+                                      <a:solidFill>
+                                        <a:srgbClr val="F8766D"/>
+                                      </a:solidFill>
+                                      <a:latin typeface="Cambria Math" panose="02040503050406030204" pitchFamily="18" charset="0"/>
+                                    </a:rPr>
+                                    <m:t>= </m:t>
+                                  </m:r>
+                                  <m:sSub>
+                                    <m:sSubPr>
+                                      <m:ctrlPr>
+                                        <a:rPr lang="fr-FR" sz="1050" i="1">
+                                          <a:solidFill>
+                                            <a:srgbClr val="00BF7D"/>
+                                          </a:solidFill>
+                                          <a:latin typeface="Cambria Math" panose="02040503050406030204" pitchFamily="18" charset="0"/>
+                                        </a:rPr>
+                                      </m:ctrlPr>
+                                    </m:sSubPr>
+                                    <m:e>
+                                      <m:r>
+                                        <a:rPr lang="fr-FR" sz="1050" i="1">
+                                          <a:solidFill>
+                                            <a:srgbClr val="00BF7D"/>
+                                          </a:solidFill>
+                                          <a:latin typeface="Cambria Math" panose="02040503050406030204" pitchFamily="18" charset="0"/>
+                                          <a:ea typeface="Cambria Math" panose="02040503050406030204" pitchFamily="18" charset="0"/>
+                                        </a:rPr>
+                                        <m:t>𝛽</m:t>
+                                      </m:r>
+                                    </m:e>
+                                    <m:sub>
+                                      <m:r>
+                                        <a:rPr lang="fr-FR" sz="1050" i="1">
+                                          <a:solidFill>
+                                            <a:srgbClr val="00BF7D"/>
+                                          </a:solidFill>
+                                          <a:latin typeface="Cambria Math" panose="02040503050406030204" pitchFamily="18" charset="0"/>
+                                        </a:rPr>
+                                        <m:t>1</m:t>
+                                      </m:r>
+                                    </m:sub>
+                                  </m:sSub>
+                                  <m:r>
+                                    <a:rPr lang="fr-FR" sz="1050" i="1">
+                                      <a:solidFill>
+                                        <a:srgbClr val="00BF7D"/>
+                                      </a:solidFill>
+                                      <a:latin typeface="Cambria Math" panose="02040503050406030204" pitchFamily="18" charset="0"/>
+                                    </a:rPr>
+                                    <m:t>∗</m:t>
+                                  </m:r>
+                                  <m:r>
+                                    <a:rPr lang="fr-FR" sz="1050" i="1">
+                                      <a:solidFill>
+                                        <a:srgbClr val="00BF7D"/>
+                                      </a:solidFill>
+                                      <a:latin typeface="Cambria Math" panose="02040503050406030204" pitchFamily="18" charset="0"/>
+                                    </a:rPr>
+                                    <m:t>𝑉𝐿</m:t>
+                                  </m:r>
+                                  <m:r>
+                                    <a:rPr lang="fr-FR" sz="1050" i="1">
+                                      <a:latin typeface="Cambria Math" panose="02040503050406030204" pitchFamily="18" charset="0"/>
+                                    </a:rPr>
+                                    <m:t>+</m:t>
+                                  </m:r>
+                                  <m:sSub>
+                                    <m:sSubPr>
+                                      <m:ctrlPr>
+                                        <a:rPr lang="fr-FR" sz="1050" i="1">
+                                          <a:solidFill>
+                                            <a:srgbClr val="E76BF3"/>
+                                          </a:solidFill>
+                                          <a:latin typeface="Cambria Math" panose="02040503050406030204" pitchFamily="18" charset="0"/>
+                                        </a:rPr>
+                                      </m:ctrlPr>
+                                    </m:sSubPr>
+                                    <m:e>
+                                      <m:r>
+                                        <a:rPr lang="fr-FR" sz="1050" i="1">
+                                          <a:solidFill>
+                                            <a:srgbClr val="E76BF3"/>
+                                          </a:solidFill>
+                                          <a:latin typeface="Cambria Math" panose="02040503050406030204" pitchFamily="18" charset="0"/>
+                                          <a:ea typeface="Cambria Math" panose="02040503050406030204" pitchFamily="18" charset="0"/>
+                                        </a:rPr>
+                                        <m:t>𝛽</m:t>
+                                      </m:r>
+                                    </m:e>
+                                    <m:sub>
+                                      <m:r>
+                                        <a:rPr lang="fr-FR" sz="1050" i="1">
+                                          <a:solidFill>
+                                            <a:srgbClr val="E76BF3"/>
+                                          </a:solidFill>
+                                          <a:latin typeface="Cambria Math" panose="02040503050406030204" pitchFamily="18" charset="0"/>
+                                          <a:ea typeface="Cambria Math" panose="02040503050406030204" pitchFamily="18" charset="0"/>
+                                        </a:rPr>
+                                        <m:t>2</m:t>
+                                      </m:r>
+                                    </m:sub>
+                                  </m:sSub>
+                                  <m:r>
+                                    <a:rPr lang="fr-FR" sz="1050" i="1">
+                                      <a:solidFill>
+                                        <a:srgbClr val="E76BF3"/>
+                                      </a:solidFill>
+                                      <a:latin typeface="Cambria Math" panose="02040503050406030204" pitchFamily="18" charset="0"/>
+                                    </a:rPr>
+                                    <m:t>∗</m:t>
+                                  </m:r>
+                                  <m:r>
+                                    <a:rPr lang="fr-FR" sz="1050" i="1">
+                                      <a:solidFill>
+                                        <a:srgbClr val="E76BF3"/>
+                                      </a:solidFill>
+                                      <a:latin typeface="Cambria Math" panose="02040503050406030204" pitchFamily="18" charset="0"/>
+                                    </a:rPr>
+                                    <m:t>𝑉𝐿</m:t>
+                                  </m:r>
+                                </m:e>
+                                <m:e>
+                                  <m:r>
+                                    <a:rPr lang="fr-FR" sz="1050" i="1" smtClean="0">
+                                      <a:solidFill>
+                                        <a:srgbClr val="00BF7D"/>
+                                      </a:solidFill>
+                                      <a:latin typeface="Cambria Math" panose="02040503050406030204" pitchFamily="18" charset="0"/>
+                                    </a:rPr>
+                                    <m:t>𝑉𝐿</m:t>
+                                  </m:r>
+                                  <m:r>
+                                    <a:rPr lang="fr-FR" sz="1050" i="1">
+                                      <a:solidFill>
+                                        <a:srgbClr val="F8766D"/>
+                                      </a:solidFill>
+                                      <a:latin typeface="Cambria Math" panose="02040503050406030204" pitchFamily="18" charset="0"/>
+                                    </a:rPr>
+                                    <m:t>= </m:t>
+                                  </m:r>
+                                  <m:sSub>
+                                    <m:sSubPr>
+                                      <m:ctrlPr>
+                                        <a:rPr lang="fr-FR" sz="1050" i="1" smtClean="0">
+                                          <a:solidFill>
+                                            <a:srgbClr val="00B0F6"/>
+                                          </a:solidFill>
+                                          <a:latin typeface="Cambria Math" panose="02040503050406030204" pitchFamily="18" charset="0"/>
+                                        </a:rPr>
+                                      </m:ctrlPr>
+                                    </m:sSubPr>
+                                    <m:e>
+                                      <m:r>
+                                        <a:rPr lang="fr-FR" sz="1050" i="1">
+                                          <a:solidFill>
+                                            <a:srgbClr val="00B0F6"/>
+                                          </a:solidFill>
+                                          <a:latin typeface="Cambria Math" panose="02040503050406030204" pitchFamily="18" charset="0"/>
+                                          <a:ea typeface="Cambria Math" panose="02040503050406030204" pitchFamily="18" charset="0"/>
+                                        </a:rPr>
+                                        <m:t>𝛽</m:t>
+                                      </m:r>
+                                    </m:e>
+                                    <m:sub>
+                                      <m:r>
+                                        <a:rPr lang="fr-FR" sz="1050" i="1">
+                                          <a:solidFill>
+                                            <a:srgbClr val="00B0F6"/>
+                                          </a:solidFill>
+                                          <a:latin typeface="Cambria Math" panose="02040503050406030204" pitchFamily="18" charset="0"/>
+                                        </a:rPr>
+                                        <m:t>1</m:t>
+                                      </m:r>
+                                    </m:sub>
+                                  </m:sSub>
+                                  <m:r>
+                                    <a:rPr lang="fr-FR" sz="1050" i="1">
+                                      <a:solidFill>
+                                        <a:srgbClr val="00B0F6"/>
+                                      </a:solidFill>
+                                      <a:latin typeface="Cambria Math" panose="02040503050406030204" pitchFamily="18" charset="0"/>
+                                    </a:rPr>
+                                    <m:t>∗</m:t>
+                                  </m:r>
+                                  <m:r>
+                                    <a:rPr lang="fr-FR" sz="1050" i="1">
+                                      <a:solidFill>
+                                        <a:srgbClr val="00B0F6"/>
+                                      </a:solidFill>
+                                      <a:latin typeface="Cambria Math" panose="02040503050406030204" pitchFamily="18" charset="0"/>
+                                    </a:rPr>
+                                    <m:t>𝑉𝐿</m:t>
+                                  </m:r>
+                                  <m:r>
+                                    <a:rPr lang="fr-FR" sz="1050" i="1">
+                                      <a:latin typeface="Cambria Math" panose="02040503050406030204" pitchFamily="18" charset="0"/>
+                                    </a:rPr>
+                                    <m:t>+</m:t>
+                                  </m:r>
+                                  <m:sSub>
+                                    <m:sSubPr>
+                                      <m:ctrlPr>
+                                        <a:rPr lang="fr-FR" sz="1050" i="1">
+                                          <a:solidFill>
+                                            <a:srgbClr val="E76BF3"/>
+                                          </a:solidFill>
+                                          <a:latin typeface="Cambria Math" panose="02040503050406030204" pitchFamily="18" charset="0"/>
+                                        </a:rPr>
+                                      </m:ctrlPr>
+                                    </m:sSubPr>
+                                    <m:e>
+                                      <m:r>
+                                        <a:rPr lang="fr-FR" sz="1050" i="1">
+                                          <a:solidFill>
+                                            <a:srgbClr val="E76BF3"/>
+                                          </a:solidFill>
+                                          <a:latin typeface="Cambria Math" panose="02040503050406030204" pitchFamily="18" charset="0"/>
+                                          <a:ea typeface="Cambria Math" panose="02040503050406030204" pitchFamily="18" charset="0"/>
+                                        </a:rPr>
+                                        <m:t>𝛽</m:t>
+                                      </m:r>
+                                    </m:e>
+                                    <m:sub>
+                                      <m:r>
+                                        <a:rPr lang="fr-FR" sz="1050" i="1">
+                                          <a:solidFill>
+                                            <a:srgbClr val="E76BF3"/>
+                                          </a:solidFill>
+                                          <a:latin typeface="Cambria Math" panose="02040503050406030204" pitchFamily="18" charset="0"/>
+                                          <a:ea typeface="Cambria Math" panose="02040503050406030204" pitchFamily="18" charset="0"/>
+                                        </a:rPr>
+                                        <m:t>2</m:t>
+                                      </m:r>
+                                    </m:sub>
+                                  </m:sSub>
+                                  <m:r>
+                                    <a:rPr lang="fr-FR" sz="1050" i="1">
+                                      <a:solidFill>
+                                        <a:srgbClr val="E76BF3"/>
+                                      </a:solidFill>
+                                      <a:latin typeface="Cambria Math" panose="02040503050406030204" pitchFamily="18" charset="0"/>
+                                    </a:rPr>
+                                    <m:t>∗</m:t>
+                                  </m:r>
+                                  <m:r>
+                                    <a:rPr lang="fr-FR" sz="1050" i="1">
+                                      <a:solidFill>
+                                        <a:srgbClr val="E76BF3"/>
+                                      </a:solidFill>
+                                      <a:latin typeface="Cambria Math" panose="02040503050406030204" pitchFamily="18" charset="0"/>
+                                    </a:rPr>
+                                    <m:t>𝑉𝐿</m:t>
+                                  </m:r>
+                                </m:e>
+                              </m:eqArr>
+                            </m:e>
+                          </m:d>
+                        </m:oMath>
+                      </m:oMathPara>
+                    </a14:m>
+                    <a:endParaRPr lang="fr-FR" sz="1050" b="1" dirty="0"/>
+                  </a:p>
+                </p:txBody>
+              </p:sp>
+            </mc:Choice>
+            <mc:Fallback>
+              <p:sp>
+                <p:nvSpPr>
+                  <p:cNvPr id="167" name="ZoneTexte 166">
+                    <a:extLst>
+                      <a:ext uri="{FF2B5EF4-FFF2-40B4-BE49-F238E27FC236}">
+                        <a16:creationId xmlns:a16="http://schemas.microsoft.com/office/drawing/2014/main" id="{B27D330A-2795-4146-B602-D66E630B9387}"/>
+                      </a:ext>
+                    </a:extLst>
+                  </p:cNvPr>
+                  <p:cNvSpPr txBox="1">
+                    <a:spLocks noRot="1" noChangeAspect="1" noMove="1" noResize="1" noEditPoints="1" noAdjustHandles="1" noChangeArrowheads="1" noChangeShapeType="1" noTextEdit="1"/>
+                  </p:cNvSpPr>
+                  <p:nvPr/>
+                </p:nvSpPr>
+                <p:spPr>
+                  <a:xfrm>
+                    <a:off x="207540" y="4574292"/>
+                    <a:ext cx="1903054" cy="1848664"/>
+                  </a:xfrm>
+                  <a:prstGeom prst="rect">
+                    <a:avLst/>
+                  </a:prstGeom>
+                  <a:blipFill>
+                    <a:blip r:embed="rId13"/>
+                    <a:stretch>
+                      <a:fillRect l="-39423" b="-74795"/>
+                    </a:stretch>
+                  </a:blipFill>
+                </p:spPr>
+                <p:txBody>
+                  <a:bodyPr/>
+                  <a:lstStyle/>
+                  <a:p>
+                    <a:r>
+                      <a:rPr lang="fr-FR">
+                        <a:noFill/>
+                      </a:rPr>
+                      <a:t> </a:t>
+                    </a:r>
+                  </a:p>
+                </p:txBody>
+              </p:sp>
+            </mc:Fallback>
+          </mc:AlternateContent>
+        </p:grpSp>
+        <p:sp>
+          <p:nvSpPr>
+            <p:cNvPr id="169" name="ZoneTexte 168">
               <a:extLst>
                 <a:ext uri="{FF2B5EF4-FFF2-40B4-BE49-F238E27FC236}">
-                  <a16:creationId xmlns:a16="http://schemas.microsoft.com/office/drawing/2014/main" id="{CB2B12AE-421E-43AA-994C-1B3B6B2A93F2}"/>
+                  <a16:creationId xmlns:a16="http://schemas.microsoft.com/office/drawing/2014/main" id="{B77E8B82-D2A0-4C1A-AECA-128B63812E3E}"/>
                 </a:ext>
               </a:extLst>
             </p:cNvPr>
-            <p:cNvCxnSpPr>
-              <a:stCxn id="83" idx="1"/>
-              <a:endCxn id="56" idx="6"/>
-            </p:cNvCxnSpPr>
+            <p:cNvSpPr txBox="1"/>
             <p:nvPr/>
-          </p:nvCxnSpPr>
+          </p:nvSpPr>
           <p:spPr>
-            <a:xfrm flipH="1" flipV="1">
-              <a:off x="3841751" y="3355701"/>
-              <a:ext cx="1455249" cy="666039"/>
+            <a:xfrm>
+              <a:off x="6993644" y="2300915"/>
+              <a:ext cx="3539795" cy="369332"/>
             </a:xfrm>
-            <a:prstGeom prst="straightConnector1">
+            <a:prstGeom prst="rect">
               <a:avLst/>
             </a:prstGeom>
-            <a:ln>
-              <a:tailEnd type="triangle"/>
-            </a:ln>
+            <a:noFill/>
           </p:spPr>
-          <p:style>
-            <a:lnRef idx="1">
-              <a:schemeClr val="dk1"/>
-            </a:lnRef>
-            <a:fillRef idx="0">
-              <a:schemeClr val="dk1"/>
-            </a:fillRef>
-            <a:effectRef idx="0">
-              <a:schemeClr val="dk1"/>
-            </a:effectRef>
-            <a:fontRef idx="minor">
-              <a:schemeClr val="tx1"/>
-            </a:fontRef>
-          </p:style>
-        </p:cxnSp>
-        <p:cxnSp>
-          <p:nvCxnSpPr>
-            <p:cNvPr id="46" name="Connecteur droit avec flèche 45">
+          <p:txBody>
+            <a:bodyPr wrap="square" rtlCol="0">
+              <a:spAutoFit/>
+            </a:bodyPr>
+            <a:lstStyle/>
+            <a:p>
+              <a:pPr algn="ctr"/>
+              <a:r>
+                <a:rPr lang="fr-FR" b="1" dirty="0"/>
+                <a:t>One </a:t>
+              </a:r>
+              <a:r>
+                <a:rPr lang="fr-FR" b="1" dirty="0" err="1"/>
+                <a:t>Health</a:t>
+              </a:r>
+              <a:r>
+                <a:rPr lang="fr-FR" b="1" dirty="0"/>
+                <a:t> </a:t>
+              </a:r>
+              <a:r>
+                <a:rPr lang="fr-FR" b="1" dirty="0" err="1"/>
+                <a:t>submodels</a:t>
+              </a:r>
+              <a:endParaRPr lang="fr-FR" b="1" dirty="0"/>
+            </a:p>
+          </p:txBody>
+        </p:sp>
+        <p:sp>
+          <p:nvSpPr>
+            <p:cNvPr id="171" name="ZoneTexte 170">
               <a:extLst>
                 <a:ext uri="{FF2B5EF4-FFF2-40B4-BE49-F238E27FC236}">
-                  <a16:creationId xmlns:a16="http://schemas.microsoft.com/office/drawing/2014/main" id="{86F673A2-3DC1-4D60-83AE-D0293555EF0B}"/>
+                  <a16:creationId xmlns:a16="http://schemas.microsoft.com/office/drawing/2014/main" id="{3685804F-5127-47BD-9E92-D25A219A6173}"/>
                 </a:ext>
               </a:extLst>
             </p:cNvPr>
-            <p:cNvCxnSpPr>
-              <a:endCxn id="56" idx="3"/>
-            </p:cNvCxnSpPr>
+            <p:cNvSpPr txBox="1"/>
             <p:nvPr/>
-          </p:nvCxnSpPr>
+          </p:nvSpPr>
           <p:spPr>
-            <a:xfrm flipV="1">
-              <a:off x="2688167" y="3553266"/>
-              <a:ext cx="604351" cy="81834"/>
+            <a:xfrm>
+              <a:off x="5585812" y="1509194"/>
+              <a:ext cx="6015843" cy="369332"/>
             </a:xfrm>
-            <a:prstGeom prst="straightConnector1">
+            <a:prstGeom prst="rect">
               <a:avLst/>
             </a:prstGeom>
-            <a:ln>
-              <a:prstDash val="dashDot"/>
-              <a:tailEnd type="triangle"/>
-            </a:ln>
+            <a:noFill/>
           </p:spPr>
-          <p:style>
-            <a:lnRef idx="1">
-              <a:schemeClr val="dk1"/>
-            </a:lnRef>
-            <a:fillRef idx="0">
-              <a:schemeClr val="dk1"/>
-            </a:fillRef>
-            <a:effectRef idx="0">
-              <a:schemeClr val="dk1"/>
-            </a:effectRef>
-            <a:fontRef idx="minor">
-              <a:schemeClr val="tx1"/>
-            </a:fontRef>
-          </p:style>
-        </p:cxnSp>
-        <p:cxnSp>
-          <p:nvCxnSpPr>
-            <p:cNvPr id="48" name="Connecteur droit avec flèche 47">
+          <p:txBody>
+            <a:bodyPr wrap="square" rtlCol="0">
+              <a:spAutoFit/>
+            </a:bodyPr>
+            <a:lstStyle/>
+            <a:p>
+              <a:r>
+                <a:rPr lang="fr-FR" b="1" dirty="0" err="1"/>
+                <a:t>Antimicrobial</a:t>
+              </a:r>
+              <a:r>
+                <a:rPr lang="fr-FR" b="1" dirty="0"/>
+                <a:t> </a:t>
+              </a:r>
+              <a:r>
+                <a:rPr lang="fr-FR" b="1" dirty="0" err="1"/>
+                <a:t>consumption</a:t>
+              </a:r>
+              <a:r>
+                <a:rPr lang="fr-FR" b="1" dirty="0"/>
+                <a:t> (AMC) </a:t>
+              </a:r>
+              <a:r>
+                <a:rPr lang="fr-FR" b="1" dirty="0" err="1"/>
+                <a:t>adjustment</a:t>
+              </a:r>
+              <a:r>
+                <a:rPr lang="fr-FR" b="1" dirty="0"/>
+                <a:t> </a:t>
+              </a:r>
+              <a:r>
+                <a:rPr lang="fr-FR" b="1" dirty="0" err="1"/>
+                <a:t>Submodel</a:t>
+              </a:r>
+              <a:endParaRPr lang="fr-FR" b="1" dirty="0"/>
+            </a:p>
+          </p:txBody>
+        </p:sp>
+        <p:sp>
+          <p:nvSpPr>
+            <p:cNvPr id="173" name="ZoneTexte 172">
               <a:extLst>
                 <a:ext uri="{FF2B5EF4-FFF2-40B4-BE49-F238E27FC236}">
-                  <a16:creationId xmlns:a16="http://schemas.microsoft.com/office/drawing/2014/main" id="{8CBD54D4-0B9A-4B76-8180-AE1ECF8F08A5}"/>
+                  <a16:creationId xmlns:a16="http://schemas.microsoft.com/office/drawing/2014/main" id="{9C8CD2CD-6936-409D-954A-991EFA0D6B49}"/>
                 </a:ext>
               </a:extLst>
             </p:cNvPr>
-            <p:cNvCxnSpPr>
-              <a:stCxn id="15" idx="2"/>
-              <a:endCxn id="55" idx="0"/>
-            </p:cNvCxnSpPr>
+            <p:cNvSpPr txBox="1"/>
             <p:nvPr/>
-          </p:nvCxnSpPr>
+          </p:nvSpPr>
           <p:spPr>
             <a:xfrm>
-              <a:off x="5524500" y="1655918"/>
-              <a:ext cx="0" cy="496635"/>
+              <a:off x="4434681" y="916503"/>
+              <a:ext cx="6015843" cy="369332"/>
             </a:xfrm>
-            <a:prstGeom prst="straightConnector1">
+            <a:prstGeom prst="rect">
               <a:avLst/>
             </a:prstGeom>
-            <a:ln>
-              <a:prstDash val="dashDot"/>
-              <a:tailEnd type="triangle"/>
-            </a:ln>
+            <a:noFill/>
           </p:spPr>
-          <p:style>
-            <a:lnRef idx="1">
-              <a:schemeClr val="dk1"/>
-            </a:lnRef>
-            <a:fillRef idx="0">
-              <a:schemeClr val="dk1"/>
-            </a:fillRef>
-            <a:effectRef idx="0">
-              <a:schemeClr val="dk1"/>
-            </a:effectRef>
-            <a:fontRef idx="minor">
-              <a:schemeClr val="tx1"/>
-            </a:fontRef>
-          </p:style>
-        </p:cxnSp>
-        <p:cxnSp>
-          <p:nvCxnSpPr>
-            <p:cNvPr id="73" name="Connecteur droit avec flèche 72">
-              <a:extLst>
-                <a:ext uri="{FF2B5EF4-FFF2-40B4-BE49-F238E27FC236}">
-                  <a16:creationId xmlns:a16="http://schemas.microsoft.com/office/drawing/2014/main" id="{F2DAB3C4-02AE-4CFA-8AD2-53CCA6EB1DF9}"/>
-                </a:ext>
-              </a:extLst>
-            </p:cNvPr>
-            <p:cNvCxnSpPr>
-              <a:cxnSpLocks/>
-              <a:endCxn id="83" idx="4"/>
-            </p:cNvCxnSpPr>
-            <p:nvPr/>
-          </p:nvCxnSpPr>
-          <p:spPr>
-            <a:xfrm flipV="1">
-              <a:off x="5524500" y="4498704"/>
-              <a:ext cx="0" cy="556782"/>
-            </a:xfrm>
-            <a:prstGeom prst="straightConnector1">
-              <a:avLst/>
-            </a:prstGeom>
-            <a:ln>
-              <a:prstDash val="dashDot"/>
-              <a:tailEnd type="triangle"/>
-            </a:ln>
-          </p:spPr>
-          <p:style>
-            <a:lnRef idx="1">
-              <a:schemeClr val="dk1"/>
-            </a:lnRef>
-            <a:fillRef idx="0">
-              <a:schemeClr val="dk1"/>
-            </a:fillRef>
-            <a:effectRef idx="0">
-              <a:schemeClr val="dk1"/>
-            </a:effectRef>
-            <a:fontRef idx="minor">
-              <a:schemeClr val="tx1"/>
-            </a:fontRef>
-          </p:style>
-        </p:cxnSp>
-        <p:cxnSp>
-          <p:nvCxnSpPr>
-            <p:cNvPr id="75" name="Connecteur droit avec flèche 74">
-              <a:extLst>
-                <a:ext uri="{FF2B5EF4-FFF2-40B4-BE49-F238E27FC236}">
-                  <a16:creationId xmlns:a16="http://schemas.microsoft.com/office/drawing/2014/main" id="{A1435939-3328-4DAD-A42D-9312EA26A3DE}"/>
-                </a:ext>
-              </a:extLst>
-            </p:cNvPr>
-            <p:cNvCxnSpPr>
-              <a:cxnSpLocks/>
-              <a:endCxn id="86" idx="5"/>
-            </p:cNvCxnSpPr>
-            <p:nvPr/>
-          </p:nvCxnSpPr>
-          <p:spPr>
-            <a:xfrm flipH="1" flipV="1">
-              <a:off x="8696281" y="3942731"/>
-              <a:ext cx="595374" cy="828334"/>
-            </a:xfrm>
-            <a:prstGeom prst="straightConnector1">
-              <a:avLst/>
-            </a:prstGeom>
-            <a:ln>
-              <a:prstDash val="dashDot"/>
-              <a:tailEnd type="triangle"/>
-            </a:ln>
-          </p:spPr>
-          <p:style>
-            <a:lnRef idx="1">
-              <a:schemeClr val="dk1"/>
-            </a:lnRef>
-            <a:fillRef idx="0">
-              <a:schemeClr val="dk1"/>
-            </a:fillRef>
-            <a:effectRef idx="0">
-              <a:schemeClr val="dk1"/>
-            </a:effectRef>
-            <a:fontRef idx="minor">
-              <a:schemeClr val="tx1"/>
-            </a:fontRef>
-          </p:style>
-        </p:cxnSp>
-        <p:cxnSp>
-          <p:nvCxnSpPr>
-            <p:cNvPr id="78" name="Connecteur droit avec flèche 77">
-              <a:extLst>
-                <a:ext uri="{FF2B5EF4-FFF2-40B4-BE49-F238E27FC236}">
-                  <a16:creationId xmlns:a16="http://schemas.microsoft.com/office/drawing/2014/main" id="{4D494EB8-6042-43DD-A77E-3C256D26FFF0}"/>
-                </a:ext>
-              </a:extLst>
-            </p:cNvPr>
-            <p:cNvCxnSpPr>
-              <a:cxnSpLocks/>
-            </p:cNvCxnSpPr>
-            <p:nvPr/>
-          </p:nvCxnSpPr>
-          <p:spPr>
-            <a:xfrm flipH="1">
-              <a:off x="8888941" y="2234387"/>
-              <a:ext cx="1074206" cy="25733"/>
-            </a:xfrm>
-            <a:prstGeom prst="straightConnector1">
-              <a:avLst/>
-            </a:prstGeom>
-            <a:ln>
-              <a:prstDash val="dashDot"/>
-              <a:tailEnd type="triangle"/>
-            </a:ln>
-          </p:spPr>
-          <p:style>
-            <a:lnRef idx="1">
-              <a:schemeClr val="dk1"/>
-            </a:lnRef>
-            <a:fillRef idx="0">
-              <a:schemeClr val="dk1"/>
-            </a:fillRef>
-            <a:effectRef idx="0">
-              <a:schemeClr val="dk1"/>
-            </a:effectRef>
-            <a:fontRef idx="minor">
-              <a:schemeClr val="tx1"/>
-            </a:fontRef>
-          </p:style>
-        </p:cxnSp>
-        <p:cxnSp>
-          <p:nvCxnSpPr>
-            <p:cNvPr id="58" name="Connecteur droit avec flèche 57">
-              <a:extLst>
-                <a:ext uri="{FF2B5EF4-FFF2-40B4-BE49-F238E27FC236}">
-                  <a16:creationId xmlns:a16="http://schemas.microsoft.com/office/drawing/2014/main" id="{16431977-C88A-450D-B61D-A1A2478D7E57}"/>
-                </a:ext>
-              </a:extLst>
-            </p:cNvPr>
-            <p:cNvCxnSpPr>
-              <a:stCxn id="56" idx="1"/>
-            </p:cNvCxnSpPr>
-            <p:nvPr/>
-          </p:nvCxnSpPr>
-          <p:spPr>
-            <a:xfrm flipH="1">
-              <a:off x="2688167" y="3158136"/>
-              <a:ext cx="604351" cy="0"/>
-            </a:xfrm>
-            <a:prstGeom prst="straightConnector1">
-              <a:avLst/>
-            </a:prstGeom>
-            <a:ln w="6350">
-              <a:prstDash val="sysDash"/>
-              <a:tailEnd type="triangle"/>
-            </a:ln>
-          </p:spPr>
-          <p:style>
-            <a:lnRef idx="1">
-              <a:schemeClr val="dk1"/>
-            </a:lnRef>
-            <a:fillRef idx="0">
-              <a:schemeClr val="dk1"/>
-            </a:fillRef>
-            <a:effectRef idx="0">
-              <a:schemeClr val="dk1"/>
-            </a:effectRef>
-            <a:fontRef idx="minor">
-              <a:schemeClr val="tx1"/>
-            </a:fontRef>
-          </p:style>
-        </p:cxnSp>
-        <p:cxnSp>
-          <p:nvCxnSpPr>
-            <p:cNvPr id="84" name="Connecteur droit avec flèche 83">
-              <a:extLst>
-                <a:ext uri="{FF2B5EF4-FFF2-40B4-BE49-F238E27FC236}">
-                  <a16:creationId xmlns:a16="http://schemas.microsoft.com/office/drawing/2014/main" id="{4B6E22DC-37D1-4F2D-9CC4-89B7AEAFE219}"/>
-                </a:ext>
-              </a:extLst>
-            </p:cNvPr>
-            <p:cNvCxnSpPr>
-              <a:cxnSpLocks/>
-              <a:stCxn id="55" idx="1"/>
-            </p:cNvCxnSpPr>
-            <p:nvPr/>
-          </p:nvCxnSpPr>
-          <p:spPr>
-            <a:xfrm flipV="1">
-              <a:off x="5297000" y="1655885"/>
-              <a:ext cx="4234" cy="578502"/>
-            </a:xfrm>
-            <a:prstGeom prst="straightConnector1">
-              <a:avLst/>
-            </a:prstGeom>
-            <a:ln>
-              <a:prstDash val="sysDash"/>
-              <a:tailEnd type="triangle"/>
-            </a:ln>
-          </p:spPr>
-          <p:style>
-            <a:lnRef idx="1">
-              <a:schemeClr val="dk1"/>
-            </a:lnRef>
-            <a:fillRef idx="0">
-              <a:schemeClr val="dk1"/>
-            </a:fillRef>
-            <a:effectRef idx="0">
-              <a:schemeClr val="dk1"/>
-            </a:effectRef>
-            <a:fontRef idx="minor">
-              <a:schemeClr val="tx1"/>
-            </a:fontRef>
-          </p:style>
-        </p:cxnSp>
-        <p:cxnSp>
-          <p:nvCxnSpPr>
-            <p:cNvPr id="88" name="Connecteur droit avec flèche 87">
-              <a:extLst>
-                <a:ext uri="{FF2B5EF4-FFF2-40B4-BE49-F238E27FC236}">
-                  <a16:creationId xmlns:a16="http://schemas.microsoft.com/office/drawing/2014/main" id="{F874736B-50E5-4E86-ACFD-372680EF6DC7}"/>
-                </a:ext>
-              </a:extLst>
-            </p:cNvPr>
-            <p:cNvCxnSpPr>
-              <a:cxnSpLocks/>
-            </p:cNvCxnSpPr>
-            <p:nvPr/>
-          </p:nvCxnSpPr>
-          <p:spPr>
-            <a:xfrm flipH="1">
-              <a:off x="5297000" y="4428136"/>
-              <a:ext cx="1" cy="627350"/>
-            </a:xfrm>
-            <a:prstGeom prst="straightConnector1">
-              <a:avLst/>
-            </a:prstGeom>
-            <a:ln>
-              <a:prstDash val="sysDash"/>
-              <a:tailEnd type="triangle"/>
-            </a:ln>
-          </p:spPr>
-          <p:style>
-            <a:lnRef idx="1">
-              <a:schemeClr val="dk1"/>
-            </a:lnRef>
-            <a:fillRef idx="0">
-              <a:schemeClr val="dk1"/>
-            </a:fillRef>
-            <a:effectRef idx="0">
-              <a:schemeClr val="dk1"/>
-            </a:effectRef>
-            <a:fontRef idx="minor">
-              <a:schemeClr val="tx1"/>
-            </a:fontRef>
-          </p:style>
-        </p:cxnSp>
-        <p:cxnSp>
-          <p:nvCxnSpPr>
-            <p:cNvPr id="92" name="Connecteur droit avec flèche 91">
-              <a:extLst>
-                <a:ext uri="{FF2B5EF4-FFF2-40B4-BE49-F238E27FC236}">
-                  <a16:creationId xmlns:a16="http://schemas.microsoft.com/office/drawing/2014/main" id="{5E5935FA-017F-4934-8362-7E47777E5A90}"/>
-                </a:ext>
-              </a:extLst>
-            </p:cNvPr>
-            <p:cNvCxnSpPr>
-              <a:cxnSpLocks/>
-              <a:stCxn id="86" idx="4"/>
-            </p:cNvCxnSpPr>
-            <p:nvPr/>
-          </p:nvCxnSpPr>
-          <p:spPr>
-            <a:xfrm>
-              <a:off x="8468781" y="4024565"/>
-              <a:ext cx="644608" cy="787159"/>
-            </a:xfrm>
-            <a:prstGeom prst="straightConnector1">
-              <a:avLst/>
-            </a:prstGeom>
-            <a:ln>
-              <a:prstDash val="sysDash"/>
-              <a:tailEnd type="triangle"/>
-            </a:ln>
-          </p:spPr>
-          <p:style>
-            <a:lnRef idx="1">
-              <a:schemeClr val="dk1"/>
-            </a:lnRef>
-            <a:fillRef idx="0">
-              <a:schemeClr val="dk1"/>
-            </a:fillRef>
-            <a:effectRef idx="0">
-              <a:schemeClr val="dk1"/>
-            </a:effectRef>
-            <a:fontRef idx="minor">
-              <a:schemeClr val="tx1"/>
-            </a:fontRef>
-          </p:style>
-        </p:cxnSp>
-        <p:cxnSp>
-          <p:nvCxnSpPr>
-            <p:cNvPr id="94" name="Connecteur droit avec flèche 93">
-              <a:extLst>
-                <a:ext uri="{FF2B5EF4-FFF2-40B4-BE49-F238E27FC236}">
-                  <a16:creationId xmlns:a16="http://schemas.microsoft.com/office/drawing/2014/main" id="{5F774878-6F6A-4CEE-B40C-E2E8A627E390}"/>
-                </a:ext>
-              </a:extLst>
-            </p:cNvPr>
-            <p:cNvCxnSpPr>
-              <a:cxnSpLocks/>
-            </p:cNvCxnSpPr>
-            <p:nvPr/>
-          </p:nvCxnSpPr>
-          <p:spPr>
-            <a:xfrm>
-              <a:off x="9014883" y="2594615"/>
-              <a:ext cx="936663" cy="224303"/>
-            </a:xfrm>
-            <a:prstGeom prst="straightConnector1">
-              <a:avLst/>
-            </a:prstGeom>
-            <a:ln>
-              <a:prstDash val="sysDash"/>
-              <a:tailEnd type="triangle"/>
-            </a:ln>
-          </p:spPr>
-          <p:style>
-            <a:lnRef idx="1">
-              <a:schemeClr val="dk1"/>
-            </a:lnRef>
-            <a:fillRef idx="0">
-              <a:schemeClr val="dk1"/>
-            </a:fillRef>
-            <a:effectRef idx="0">
-              <a:schemeClr val="dk1"/>
-            </a:effectRef>
-            <a:fontRef idx="minor">
-              <a:schemeClr val="tx1"/>
-            </a:fontRef>
-          </p:style>
-        </p:cxnSp>
-        <p:cxnSp>
-          <p:nvCxnSpPr>
-            <p:cNvPr id="96" name="Connecteur droit avec flèche 95">
-              <a:extLst>
-                <a:ext uri="{FF2B5EF4-FFF2-40B4-BE49-F238E27FC236}">
-                  <a16:creationId xmlns:a16="http://schemas.microsoft.com/office/drawing/2014/main" id="{35B23C92-DD05-4CA3-8F12-C7B6EDDB167A}"/>
-                </a:ext>
-              </a:extLst>
-            </p:cNvPr>
-            <p:cNvCxnSpPr>
-              <a:cxnSpLocks/>
-            </p:cNvCxnSpPr>
-            <p:nvPr/>
-          </p:nvCxnSpPr>
-          <p:spPr>
-            <a:xfrm>
-              <a:off x="1028700" y="5547817"/>
-              <a:ext cx="331219" cy="0"/>
-            </a:xfrm>
-            <a:prstGeom prst="straightConnector1">
-              <a:avLst/>
-            </a:prstGeom>
-            <a:ln>
-              <a:prstDash val="sysDash"/>
-              <a:tailEnd type="triangle"/>
-            </a:ln>
-          </p:spPr>
-          <p:style>
-            <a:lnRef idx="1">
-              <a:schemeClr val="dk1"/>
-            </a:lnRef>
-            <a:fillRef idx="0">
-              <a:schemeClr val="dk1"/>
-            </a:fillRef>
-            <a:effectRef idx="0">
-              <a:schemeClr val="dk1"/>
-            </a:effectRef>
-            <a:fontRef idx="minor">
-              <a:schemeClr val="tx1"/>
-            </a:fontRef>
-          </p:style>
-        </p:cxnSp>
+          <p:txBody>
+            <a:bodyPr wrap="square" rtlCol="0">
+              <a:spAutoFit/>
+            </a:bodyPr>
+            <a:lstStyle/>
+            <a:p>
+              <a:pPr algn="ctr"/>
+              <a:r>
+                <a:rPr lang="fr-FR" b="1" dirty="0"/>
+                <a:t>Main model</a:t>
+              </a:r>
+            </a:p>
+          </p:txBody>
+        </p:sp>
         <mc:AlternateContent xmlns:mc="http://schemas.openxmlformats.org/markup-compatibility/2006">
           <mc:Choice xmlns:a14="http://schemas.microsoft.com/office/drawing/2010/main" Requires="a14">
             <p:sp>
               <p:nvSpPr>
-                <p:cNvPr id="79" name="ZoneTexte 78">
+                <p:cNvPr id="174" name="ZoneTexte 173">
                   <a:extLst>
                     <a:ext uri="{FF2B5EF4-FFF2-40B4-BE49-F238E27FC236}">
-                      <a16:creationId xmlns:a16="http://schemas.microsoft.com/office/drawing/2014/main" id="{88CBC489-3E89-4963-B0E9-64437D82B1C2}"/>
+                      <a16:creationId xmlns:a16="http://schemas.microsoft.com/office/drawing/2014/main" id="{DA017C55-6D22-4334-8CFA-225CE133FCDA}"/>
                     </a:ext>
                   </a:extLst>
                 </p:cNvPr>
@@ -8233,8 +10230,8 @@
               </p:nvSpPr>
               <p:spPr>
                 <a:xfrm>
-                  <a:off x="1407008" y="5363151"/>
-                  <a:ext cx="1324507" cy="369332"/>
+                  <a:off x="7147420" y="2786044"/>
+                  <a:ext cx="489857" cy="369332"/>
                 </a:xfrm>
                 <a:prstGeom prst="rect">
                   <a:avLst/>
@@ -8247,38 +10244,21 @@
                 </a:bodyPr>
                 <a:lstStyle/>
                 <a:p>
-                  <a:r>
-                    <a:rPr lang="fr-FR" dirty="0"/>
-                    <a:t>Loadings </a:t>
-                  </a:r>
                   <a14:m>
-                    <m:oMath xmlns:m="http://schemas.openxmlformats.org/officeDocument/2006/math">
-                      <m:sSub>
-                        <m:sSubPr>
-                          <m:ctrlPr>
-                            <a:rPr lang="fr-FR" i="1" smtClean="0">
-                              <a:latin typeface="Cambria Math" panose="02040503050406030204" pitchFamily="18" charset="0"/>
-                            </a:rPr>
-                          </m:ctrlPr>
-                        </m:sSubPr>
-                        <m:e>
-                          <m:r>
-                            <a:rPr lang="fr-FR" b="0" i="1" smtClean="0">
-                              <a:latin typeface="Cambria Math" panose="02040503050406030204" pitchFamily="18" charset="0"/>
-                            </a:rPr>
-                            <m:t>𝑐</m:t>
-                          </m:r>
-                        </m:e>
-                        <m:sub>
-                          <m:r>
-                            <a:rPr lang="fr-FR" b="0" i="1" smtClean="0">
-                              <a:latin typeface="Cambria Math" panose="02040503050406030204" pitchFamily="18" charset="0"/>
-                            </a:rPr>
-                            <m:t>𝑘</m:t>
-                          </m:r>
-                        </m:sub>
-                      </m:sSub>
-                    </m:oMath>
+                    <m:oMathPara xmlns:m="http://schemas.openxmlformats.org/officeDocument/2006/math">
+                      <m:oMathParaPr>
+                        <m:jc m:val="centerGroup"/>
+                      </m:oMathParaPr>
+                      <m:oMath xmlns:m="http://schemas.openxmlformats.org/officeDocument/2006/math">
+                        <m:r>
+                          <a:rPr lang="fr-FR" i="1" smtClean="0">
+                            <a:latin typeface="Cambria Math" panose="02040503050406030204" pitchFamily="18" charset="0"/>
+                            <a:ea typeface="Cambria Math" panose="02040503050406030204" pitchFamily="18" charset="0"/>
+                          </a:rPr>
+                          <m:t>𝛽</m:t>
+                        </m:r>
+                      </m:oMath>
+                    </m:oMathPara>
                   </a14:m>
                   <a:endParaRPr lang="fr-FR" dirty="0"/>
                 </a:p>
@@ -8288,10 +10268,10 @@
           <mc:Fallback>
             <p:sp>
               <p:nvSpPr>
-                <p:cNvPr id="79" name="ZoneTexte 78">
+                <p:cNvPr id="174" name="ZoneTexte 173">
                   <a:extLst>
                     <a:ext uri="{FF2B5EF4-FFF2-40B4-BE49-F238E27FC236}">
-                      <a16:creationId xmlns:a16="http://schemas.microsoft.com/office/drawing/2014/main" id="{88CBC489-3E89-4963-B0E9-64437D82B1C2}"/>
+                      <a16:creationId xmlns:a16="http://schemas.microsoft.com/office/drawing/2014/main" id="{DA017C55-6D22-4334-8CFA-225CE133FCDA}"/>
                     </a:ext>
                   </a:extLst>
                 </p:cNvPr>
@@ -8302,16 +10282,16 @@
               </p:nvSpPr>
               <p:spPr>
                 <a:xfrm>
-                  <a:off x="1407008" y="5363151"/>
-                  <a:ext cx="1324507" cy="369332"/>
+                  <a:off x="7147420" y="2786044"/>
+                  <a:ext cx="489857" cy="369332"/>
                 </a:xfrm>
                 <a:prstGeom prst="rect">
                   <a:avLst/>
                 </a:prstGeom>
                 <a:blipFill>
-                  <a:blip r:embed="rId2"/>
+                  <a:blip r:embed="rId14"/>
                   <a:stretch>
-                    <a:fillRect l="-4147" t="-10000" b="-26667"/>
+                    <a:fillRect b="-13115"/>
                   </a:stretch>
                 </a:blipFill>
               </p:spPr>
@@ -8330,56 +10310,14 @@
             </p:sp>
           </mc:Fallback>
         </mc:AlternateContent>
-        <p:cxnSp>
-          <p:nvCxnSpPr>
-            <p:cNvPr id="99" name="Connecteur droit avec flèche 98">
-              <a:extLst>
-                <a:ext uri="{FF2B5EF4-FFF2-40B4-BE49-F238E27FC236}">
-                  <a16:creationId xmlns:a16="http://schemas.microsoft.com/office/drawing/2014/main" id="{2761E1D8-A02B-407C-9FFC-5E5C879C3A57}"/>
-                </a:ext>
-              </a:extLst>
-            </p:cNvPr>
-            <p:cNvCxnSpPr>
-              <a:cxnSpLocks/>
-            </p:cNvCxnSpPr>
-            <p:nvPr/>
-          </p:nvCxnSpPr>
-          <p:spPr>
-            <a:xfrm>
-              <a:off x="1028700" y="5890337"/>
-              <a:ext cx="331218" cy="0"/>
-            </a:xfrm>
-            <a:prstGeom prst="straightConnector1">
-              <a:avLst/>
-            </a:prstGeom>
-            <a:ln>
-              <a:prstDash val="dashDot"/>
-              <a:tailEnd type="triangle"/>
-            </a:ln>
-          </p:spPr>
-          <p:style>
-            <a:lnRef idx="1">
-              <a:schemeClr val="dk1"/>
-            </a:lnRef>
-            <a:fillRef idx="0">
-              <a:schemeClr val="dk1"/>
-            </a:fillRef>
-            <a:effectRef idx="0">
-              <a:schemeClr val="dk1"/>
-            </a:effectRef>
-            <a:fontRef idx="minor">
-              <a:schemeClr val="tx1"/>
-            </a:fontRef>
-          </p:style>
-        </p:cxnSp>
         <mc:AlternateContent xmlns:mc="http://schemas.openxmlformats.org/markup-compatibility/2006">
           <mc:Choice xmlns:a14="http://schemas.microsoft.com/office/drawing/2010/main" Requires="a14">
             <p:sp>
               <p:nvSpPr>
-                <p:cNvPr id="102" name="ZoneTexte 101">
+                <p:cNvPr id="175" name="ZoneTexte 174">
                   <a:extLst>
                     <a:ext uri="{FF2B5EF4-FFF2-40B4-BE49-F238E27FC236}">
-                      <a16:creationId xmlns:a16="http://schemas.microsoft.com/office/drawing/2014/main" id="{C9F9395C-EB19-4FCC-8548-0AD8673E365B}"/>
+                      <a16:creationId xmlns:a16="http://schemas.microsoft.com/office/drawing/2014/main" id="{FB4F61EF-8D31-4A92-9EE9-FAD32792833B}"/>
                     </a:ext>
                   </a:extLst>
                 </p:cNvPr>
@@ -8388,8 +10326,8 @@
               </p:nvSpPr>
               <p:spPr>
                 <a:xfrm>
-                  <a:off x="1398541" y="5705671"/>
-                  <a:ext cx="1324507" cy="369332"/>
+                  <a:off x="8954465" y="3550208"/>
+                  <a:ext cx="489857" cy="369332"/>
                 </a:xfrm>
                 <a:prstGeom prst="rect">
                   <a:avLst/>
@@ -8402,38 +10340,21 @@
                 </a:bodyPr>
                 <a:lstStyle/>
                 <a:p>
-                  <a:r>
-                    <a:rPr lang="fr-FR" dirty="0"/>
-                    <a:t>Weight </a:t>
-                  </a:r>
                   <a14:m>
-                    <m:oMath xmlns:m="http://schemas.openxmlformats.org/officeDocument/2006/math">
-                      <m:sSub>
-                        <m:sSubPr>
-                          <m:ctrlPr>
-                            <a:rPr lang="fr-FR" i="1" smtClean="0">
-                              <a:latin typeface="Cambria Math" panose="02040503050406030204" pitchFamily="18" charset="0"/>
-                            </a:rPr>
-                          </m:ctrlPr>
-                        </m:sSubPr>
-                        <m:e>
-                          <m:r>
-                            <a:rPr lang="fr-FR" b="0" i="1" smtClean="0">
-                              <a:latin typeface="Cambria Math" panose="02040503050406030204" pitchFamily="18" charset="0"/>
-                            </a:rPr>
-                            <m:t>𝑤</m:t>
-                          </m:r>
-                        </m:e>
-                        <m:sub>
-                          <m:r>
-                            <a:rPr lang="fr-FR" b="0" i="1" smtClean="0">
-                              <a:latin typeface="Cambria Math" panose="02040503050406030204" pitchFamily="18" charset="0"/>
-                            </a:rPr>
-                            <m:t>𝑘</m:t>
-                          </m:r>
-                        </m:sub>
-                      </m:sSub>
-                    </m:oMath>
+                    <m:oMathPara xmlns:m="http://schemas.openxmlformats.org/officeDocument/2006/math">
+                      <m:oMathParaPr>
+                        <m:jc m:val="centerGroup"/>
+                      </m:oMathParaPr>
+                      <m:oMath xmlns:m="http://schemas.openxmlformats.org/officeDocument/2006/math">
+                        <m:r>
+                          <a:rPr lang="fr-FR" i="1" smtClean="0">
+                            <a:latin typeface="Cambria Math" panose="02040503050406030204" pitchFamily="18" charset="0"/>
+                            <a:ea typeface="Cambria Math" panose="02040503050406030204" pitchFamily="18" charset="0"/>
+                          </a:rPr>
+                          <m:t>𝛽</m:t>
+                        </m:r>
+                      </m:oMath>
+                    </m:oMathPara>
                   </a14:m>
                   <a:endParaRPr lang="fr-FR" dirty="0"/>
                 </a:p>
@@ -8443,10 +10364,10 @@
           <mc:Fallback>
             <p:sp>
               <p:nvSpPr>
-                <p:cNvPr id="102" name="ZoneTexte 101">
+                <p:cNvPr id="175" name="ZoneTexte 174">
                   <a:extLst>
                     <a:ext uri="{FF2B5EF4-FFF2-40B4-BE49-F238E27FC236}">
-                      <a16:creationId xmlns:a16="http://schemas.microsoft.com/office/drawing/2014/main" id="{C9F9395C-EB19-4FCC-8548-0AD8673E365B}"/>
+                      <a16:creationId xmlns:a16="http://schemas.microsoft.com/office/drawing/2014/main" id="{FB4F61EF-8D31-4A92-9EE9-FAD32792833B}"/>
                     </a:ext>
                   </a:extLst>
                 </p:cNvPr>
@@ -8457,16 +10378,16 @@
               </p:nvSpPr>
               <p:spPr>
                 <a:xfrm>
-                  <a:off x="1398541" y="5705671"/>
-                  <a:ext cx="1324507" cy="369332"/>
+                  <a:off x="8954465" y="3550208"/>
+                  <a:ext cx="489857" cy="369332"/>
                 </a:xfrm>
                 <a:prstGeom prst="rect">
                   <a:avLst/>
                 </a:prstGeom>
                 <a:blipFill>
-                  <a:blip r:embed="rId3"/>
+                  <a:blip r:embed="rId15"/>
                   <a:stretch>
-                    <a:fillRect l="-3670" t="-9836" b="-24590"/>
+                    <a:fillRect b="-13115"/>
                   </a:stretch>
                 </a:blipFill>
               </p:spPr>
@@ -8485,55 +10406,14 @@
             </p:sp>
           </mc:Fallback>
         </mc:AlternateContent>
-        <p:cxnSp>
-          <p:nvCxnSpPr>
-            <p:cNvPr id="103" name="Connecteur droit avec flèche 102">
-              <a:extLst>
-                <a:ext uri="{FF2B5EF4-FFF2-40B4-BE49-F238E27FC236}">
-                  <a16:creationId xmlns:a16="http://schemas.microsoft.com/office/drawing/2014/main" id="{BCD3604B-B2FE-45B7-948D-D925E12F63C8}"/>
-                </a:ext>
-              </a:extLst>
-            </p:cNvPr>
-            <p:cNvCxnSpPr>
-              <a:cxnSpLocks/>
-            </p:cNvCxnSpPr>
-            <p:nvPr/>
-          </p:nvCxnSpPr>
-          <p:spPr>
-            <a:xfrm flipV="1">
-              <a:off x="1028700" y="6232857"/>
-              <a:ext cx="331218" cy="2"/>
-            </a:xfrm>
-            <a:prstGeom prst="straightConnector1">
-              <a:avLst/>
-            </a:prstGeom>
-            <a:ln>
-              <a:tailEnd type="triangle"/>
-            </a:ln>
-          </p:spPr>
-          <p:style>
-            <a:lnRef idx="1">
-              <a:schemeClr val="dk1"/>
-            </a:lnRef>
-            <a:fillRef idx="0">
-              <a:schemeClr val="dk1"/>
-            </a:fillRef>
-            <a:effectRef idx="0">
-              <a:schemeClr val="dk1"/>
-            </a:effectRef>
-            <a:fontRef idx="minor">
-              <a:schemeClr val="tx1"/>
-            </a:fontRef>
-          </p:style>
-        </p:cxnSp>
         <mc:AlternateContent xmlns:mc="http://schemas.openxmlformats.org/markup-compatibility/2006">
           <mc:Choice xmlns:a14="http://schemas.microsoft.com/office/drawing/2010/main" Requires="a14">
             <p:sp>
               <p:nvSpPr>
-                <p:cNvPr id="110" name="ZoneTexte 109">
+                <p:cNvPr id="176" name="ZoneTexte 175">
                   <a:extLst>
                     <a:ext uri="{FF2B5EF4-FFF2-40B4-BE49-F238E27FC236}">
-                      <a16:creationId xmlns:a16="http://schemas.microsoft.com/office/drawing/2014/main" id="{1150510F-1416-40E4-8413-11C4D9989D93}"/>
+                      <a16:creationId xmlns:a16="http://schemas.microsoft.com/office/drawing/2014/main" id="{87DFAC80-E39D-4F80-8E41-62E127C463C8}"/>
                     </a:ext>
                   </a:extLst>
                 </p:cNvPr>
@@ -8542,8 +10422,8 @@
               </p:nvSpPr>
               <p:spPr>
                 <a:xfrm>
-                  <a:off x="1407008" y="6032648"/>
-                  <a:ext cx="2113010" cy="369332"/>
+                  <a:off x="7102362" y="3559228"/>
+                  <a:ext cx="489857" cy="369332"/>
                 </a:xfrm>
                 <a:prstGeom prst="rect">
                   <a:avLst/>
@@ -8556,38 +10436,21 @@
                 </a:bodyPr>
                 <a:lstStyle/>
                 <a:p>
-                  <a:r>
-                    <a:rPr lang="fr-FR" dirty="0"/>
-                    <a:t>Path coefficients </a:t>
-                  </a:r>
                   <a14:m>
-                    <m:oMath xmlns:m="http://schemas.openxmlformats.org/officeDocument/2006/math">
-                      <m:sSub>
-                        <m:sSubPr>
-                          <m:ctrlPr>
-                            <a:rPr lang="fr-FR" i="1" smtClean="0">
-                              <a:latin typeface="Cambria Math" panose="02040503050406030204" pitchFamily="18" charset="0"/>
-                            </a:rPr>
-                          </m:ctrlPr>
-                        </m:sSubPr>
-                        <m:e>
-                          <m:r>
-                            <a:rPr lang="fr-FR" b="0" i="1" smtClean="0">
-                              <a:latin typeface="Cambria Math" panose="02040503050406030204" pitchFamily="18" charset="0"/>
-                            </a:rPr>
-                            <m:t>𝑏</m:t>
-                          </m:r>
-                        </m:e>
-                        <m:sub>
-                          <m:r>
-                            <a:rPr lang="fr-FR" b="0" i="1" smtClean="0">
-                              <a:latin typeface="Cambria Math" panose="02040503050406030204" pitchFamily="18" charset="0"/>
-                            </a:rPr>
-                            <m:t>𝑘</m:t>
-                          </m:r>
-                        </m:sub>
-                      </m:sSub>
-                    </m:oMath>
+                    <m:oMathPara xmlns:m="http://schemas.openxmlformats.org/officeDocument/2006/math">
+                      <m:oMathParaPr>
+                        <m:jc m:val="centerGroup"/>
+                      </m:oMathParaPr>
+                      <m:oMath xmlns:m="http://schemas.openxmlformats.org/officeDocument/2006/math">
+                        <m:r>
+                          <a:rPr lang="fr-FR" i="1" smtClean="0">
+                            <a:latin typeface="Cambria Math" panose="02040503050406030204" pitchFamily="18" charset="0"/>
+                            <a:ea typeface="Cambria Math" panose="02040503050406030204" pitchFamily="18" charset="0"/>
+                          </a:rPr>
+                          <m:t>𝛽</m:t>
+                        </m:r>
+                      </m:oMath>
+                    </m:oMathPara>
                   </a14:m>
                   <a:endParaRPr lang="fr-FR" dirty="0"/>
                 </a:p>
@@ -8597,10 +10460,10 @@
           <mc:Fallback>
             <p:sp>
               <p:nvSpPr>
-                <p:cNvPr id="110" name="ZoneTexte 109">
+                <p:cNvPr id="176" name="ZoneTexte 175">
                   <a:extLst>
                     <a:ext uri="{FF2B5EF4-FFF2-40B4-BE49-F238E27FC236}">
-                      <a16:creationId xmlns:a16="http://schemas.microsoft.com/office/drawing/2014/main" id="{1150510F-1416-40E4-8413-11C4D9989D93}"/>
+                      <a16:creationId xmlns:a16="http://schemas.microsoft.com/office/drawing/2014/main" id="{87DFAC80-E39D-4F80-8E41-62E127C463C8}"/>
                     </a:ext>
                   </a:extLst>
                 </p:cNvPr>
@@ -8611,16 +10474,304 @@
               </p:nvSpPr>
               <p:spPr>
                 <a:xfrm>
-                  <a:off x="1407008" y="6032648"/>
-                  <a:ext cx="2113010" cy="369332"/>
+                  <a:off x="7102362" y="3559228"/>
+                  <a:ext cx="489857" cy="369332"/>
                 </a:xfrm>
                 <a:prstGeom prst="rect">
                   <a:avLst/>
                 </a:prstGeom>
                 <a:blipFill>
-                  <a:blip r:embed="rId4"/>
+                  <a:blip r:embed="rId16"/>
                   <a:stretch>
-                    <a:fillRect l="-2601" t="-10000" b="-26667"/>
+                    <a:fillRect b="-13333"/>
+                  </a:stretch>
+                </a:blipFill>
+              </p:spPr>
+              <p:txBody>
+                <a:bodyPr/>
+                <a:lstStyle/>
+                <a:p>
+                  <a:r>
+                    <a:rPr lang="fr-FR">
+                      <a:noFill/>
+                    </a:rPr>
+                    <a:t> </a:t>
+                  </a:r>
+                </a:p>
+              </p:txBody>
+            </p:sp>
+          </mc:Fallback>
+        </mc:AlternateContent>
+        <mc:AlternateContent xmlns:mc="http://schemas.openxmlformats.org/markup-compatibility/2006">
+          <mc:Choice xmlns:a14="http://schemas.microsoft.com/office/drawing/2010/main" Requires="a14">
+            <p:sp>
+              <p:nvSpPr>
+                <p:cNvPr id="177" name="ZoneTexte 176">
+                  <a:extLst>
+                    <a:ext uri="{FF2B5EF4-FFF2-40B4-BE49-F238E27FC236}">
+                      <a16:creationId xmlns:a16="http://schemas.microsoft.com/office/drawing/2014/main" id="{7BA76858-94F3-46FA-8DFB-CC852210CBC8}"/>
+                    </a:ext>
+                  </a:extLst>
+                </p:cNvPr>
+                <p:cNvSpPr txBox="1"/>
+                <p:nvPr/>
+              </p:nvSpPr>
+              <p:spPr>
+                <a:xfrm>
+                  <a:off x="5501311" y="3653242"/>
+                  <a:ext cx="489857" cy="369332"/>
+                </a:xfrm>
+                <a:prstGeom prst="rect">
+                  <a:avLst/>
+                </a:prstGeom>
+                <a:noFill/>
+              </p:spPr>
+              <p:txBody>
+                <a:bodyPr wrap="square" rtlCol="0">
+                  <a:spAutoFit/>
+                </a:bodyPr>
+                <a:lstStyle/>
+                <a:p>
+                  <a14:m>
+                    <m:oMathPara xmlns:m="http://schemas.openxmlformats.org/officeDocument/2006/math">
+                      <m:oMathParaPr>
+                        <m:jc m:val="centerGroup"/>
+                      </m:oMathParaPr>
+                      <m:oMath xmlns:m="http://schemas.openxmlformats.org/officeDocument/2006/math">
+                        <m:r>
+                          <a:rPr lang="fr-FR" i="1" smtClean="0">
+                            <a:latin typeface="Cambria Math" panose="02040503050406030204" pitchFamily="18" charset="0"/>
+                            <a:ea typeface="Cambria Math" panose="02040503050406030204" pitchFamily="18" charset="0"/>
+                          </a:rPr>
+                          <m:t>𝛽</m:t>
+                        </m:r>
+                      </m:oMath>
+                    </m:oMathPara>
+                  </a14:m>
+                  <a:endParaRPr lang="fr-FR" dirty="0"/>
+                </a:p>
+              </p:txBody>
+            </p:sp>
+          </mc:Choice>
+          <mc:Fallback>
+            <p:sp>
+              <p:nvSpPr>
+                <p:cNvPr id="177" name="ZoneTexte 176">
+                  <a:extLst>
+                    <a:ext uri="{FF2B5EF4-FFF2-40B4-BE49-F238E27FC236}">
+                      <a16:creationId xmlns:a16="http://schemas.microsoft.com/office/drawing/2014/main" id="{7BA76858-94F3-46FA-8DFB-CC852210CBC8}"/>
+                    </a:ext>
+                  </a:extLst>
+                </p:cNvPr>
+                <p:cNvSpPr txBox="1">
+                  <a:spLocks noRot="1" noChangeAspect="1" noMove="1" noResize="1" noEditPoints="1" noAdjustHandles="1" noChangeArrowheads="1" noChangeShapeType="1" noTextEdit="1"/>
+                </p:cNvSpPr>
+                <p:nvPr/>
+              </p:nvSpPr>
+              <p:spPr>
+                <a:xfrm>
+                  <a:off x="5501311" y="3653242"/>
+                  <a:ext cx="489857" cy="369332"/>
+                </a:xfrm>
+                <a:prstGeom prst="rect">
+                  <a:avLst/>
+                </a:prstGeom>
+                <a:blipFill>
+                  <a:blip r:embed="rId17"/>
+                  <a:stretch>
+                    <a:fillRect b="-13115"/>
+                  </a:stretch>
+                </a:blipFill>
+              </p:spPr>
+              <p:txBody>
+                <a:bodyPr/>
+                <a:lstStyle/>
+                <a:p>
+                  <a:r>
+                    <a:rPr lang="fr-FR">
+                      <a:noFill/>
+                    </a:rPr>
+                    <a:t> </a:t>
+                  </a:r>
+                </a:p>
+              </p:txBody>
+            </p:sp>
+          </mc:Fallback>
+        </mc:AlternateContent>
+        <mc:AlternateContent xmlns:mc="http://schemas.openxmlformats.org/markup-compatibility/2006">
+          <mc:Choice xmlns:a14="http://schemas.microsoft.com/office/drawing/2010/main" Requires="a14">
+            <p:sp>
+              <p:nvSpPr>
+                <p:cNvPr id="178" name="ZoneTexte 177">
+                  <a:extLst>
+                    <a:ext uri="{FF2B5EF4-FFF2-40B4-BE49-F238E27FC236}">
+                      <a16:creationId xmlns:a16="http://schemas.microsoft.com/office/drawing/2014/main" id="{6E2CC41B-EB22-4E81-95A7-D0DE71C946A7}"/>
+                    </a:ext>
+                  </a:extLst>
+                </p:cNvPr>
+                <p:cNvSpPr txBox="1"/>
+                <p:nvPr/>
+              </p:nvSpPr>
+              <p:spPr>
+                <a:xfrm>
+                  <a:off x="5459319" y="4385621"/>
+                  <a:ext cx="489857" cy="369332"/>
+                </a:xfrm>
+                <a:prstGeom prst="rect">
+                  <a:avLst/>
+                </a:prstGeom>
+                <a:noFill/>
+              </p:spPr>
+              <p:txBody>
+                <a:bodyPr wrap="square" rtlCol="0">
+                  <a:spAutoFit/>
+                </a:bodyPr>
+                <a:lstStyle/>
+                <a:p>
+                  <a14:m>
+                    <m:oMathPara xmlns:m="http://schemas.openxmlformats.org/officeDocument/2006/math">
+                      <m:oMathParaPr>
+                        <m:jc m:val="centerGroup"/>
+                      </m:oMathParaPr>
+                      <m:oMath xmlns:m="http://schemas.openxmlformats.org/officeDocument/2006/math">
+                        <m:r>
+                          <a:rPr lang="fr-FR" i="1" smtClean="0">
+                            <a:latin typeface="Cambria Math" panose="02040503050406030204" pitchFamily="18" charset="0"/>
+                            <a:ea typeface="Cambria Math" panose="02040503050406030204" pitchFamily="18" charset="0"/>
+                          </a:rPr>
+                          <m:t>𝛽</m:t>
+                        </m:r>
+                      </m:oMath>
+                    </m:oMathPara>
+                  </a14:m>
+                  <a:endParaRPr lang="fr-FR" dirty="0"/>
+                </a:p>
+              </p:txBody>
+            </p:sp>
+          </mc:Choice>
+          <mc:Fallback>
+            <p:sp>
+              <p:nvSpPr>
+                <p:cNvPr id="178" name="ZoneTexte 177">
+                  <a:extLst>
+                    <a:ext uri="{FF2B5EF4-FFF2-40B4-BE49-F238E27FC236}">
+                      <a16:creationId xmlns:a16="http://schemas.microsoft.com/office/drawing/2014/main" id="{6E2CC41B-EB22-4E81-95A7-D0DE71C946A7}"/>
+                    </a:ext>
+                  </a:extLst>
+                </p:cNvPr>
+                <p:cNvSpPr txBox="1">
+                  <a:spLocks noRot="1" noChangeAspect="1" noMove="1" noResize="1" noEditPoints="1" noAdjustHandles="1" noChangeArrowheads="1" noChangeShapeType="1" noTextEdit="1"/>
+                </p:cNvSpPr>
+                <p:nvPr/>
+              </p:nvSpPr>
+              <p:spPr>
+                <a:xfrm>
+                  <a:off x="5459319" y="4385621"/>
+                  <a:ext cx="489857" cy="369332"/>
+                </a:xfrm>
+                <a:prstGeom prst="rect">
+                  <a:avLst/>
+                </a:prstGeom>
+                <a:blipFill>
+                  <a:blip r:embed="rId18"/>
+                  <a:stretch>
+                    <a:fillRect b="-13115"/>
+                  </a:stretch>
+                </a:blipFill>
+              </p:spPr>
+              <p:txBody>
+                <a:bodyPr/>
+                <a:lstStyle/>
+                <a:p>
+                  <a:r>
+                    <a:rPr lang="fr-FR">
+                      <a:noFill/>
+                    </a:rPr>
+                    <a:t> </a:t>
+                  </a:r>
+                </a:p>
+              </p:txBody>
+            </p:sp>
+          </mc:Fallback>
+        </mc:AlternateContent>
+        <mc:AlternateContent xmlns:mc="http://schemas.openxmlformats.org/markup-compatibility/2006">
+          <mc:Choice xmlns:a14="http://schemas.microsoft.com/office/drawing/2010/main" Requires="a14">
+            <p:sp>
+              <p:nvSpPr>
+                <p:cNvPr id="179" name="ZoneTexte 178">
+                  <a:extLst>
+                    <a:ext uri="{FF2B5EF4-FFF2-40B4-BE49-F238E27FC236}">
+                      <a16:creationId xmlns:a16="http://schemas.microsoft.com/office/drawing/2014/main" id="{978E1849-B764-4AF2-8F89-0BE5BC79C02C}"/>
+                    </a:ext>
+                  </a:extLst>
+                </p:cNvPr>
+                <p:cNvSpPr txBox="1"/>
+                <p:nvPr/>
+              </p:nvSpPr>
+              <p:spPr>
+                <a:xfrm>
+                  <a:off x="3942638" y="3674052"/>
+                  <a:ext cx="489857" cy="369332"/>
+                </a:xfrm>
+                <a:prstGeom prst="rect">
+                  <a:avLst/>
+                </a:prstGeom>
+                <a:noFill/>
+              </p:spPr>
+              <p:txBody>
+                <a:bodyPr wrap="square" rtlCol="0">
+                  <a:spAutoFit/>
+                </a:bodyPr>
+                <a:lstStyle/>
+                <a:p>
+                  <a14:m>
+                    <m:oMathPara xmlns:m="http://schemas.openxmlformats.org/officeDocument/2006/math">
+                      <m:oMathParaPr>
+                        <m:jc m:val="centerGroup"/>
+                      </m:oMathParaPr>
+                      <m:oMath xmlns:m="http://schemas.openxmlformats.org/officeDocument/2006/math">
+                        <m:r>
+                          <a:rPr lang="fr-FR" i="1" smtClean="0">
+                            <a:latin typeface="Cambria Math" panose="02040503050406030204" pitchFamily="18" charset="0"/>
+                            <a:ea typeface="Cambria Math" panose="02040503050406030204" pitchFamily="18" charset="0"/>
+                          </a:rPr>
+                          <m:t>𝛽</m:t>
+                        </m:r>
+                      </m:oMath>
+                    </m:oMathPara>
+                  </a14:m>
+                  <a:endParaRPr lang="fr-FR" dirty="0"/>
+                </a:p>
+              </p:txBody>
+            </p:sp>
+          </mc:Choice>
+          <mc:Fallback>
+            <p:sp>
+              <p:nvSpPr>
+                <p:cNvPr id="179" name="ZoneTexte 178">
+                  <a:extLst>
+                    <a:ext uri="{FF2B5EF4-FFF2-40B4-BE49-F238E27FC236}">
+                      <a16:creationId xmlns:a16="http://schemas.microsoft.com/office/drawing/2014/main" id="{978E1849-B764-4AF2-8F89-0BE5BC79C02C}"/>
+                    </a:ext>
+                  </a:extLst>
+                </p:cNvPr>
+                <p:cNvSpPr txBox="1">
+                  <a:spLocks noRot="1" noChangeAspect="1" noMove="1" noResize="1" noEditPoints="1" noAdjustHandles="1" noChangeArrowheads="1" noChangeShapeType="1" noTextEdit="1"/>
+                </p:cNvSpPr>
+                <p:nvPr/>
+              </p:nvSpPr>
+              <p:spPr>
+                <a:xfrm>
+                  <a:off x="3942638" y="3674052"/>
+                  <a:ext cx="489857" cy="369332"/>
+                </a:xfrm>
+                <a:prstGeom prst="rect">
+                  <a:avLst/>
+                </a:prstGeom>
+                <a:blipFill>
+                  <a:blip r:embed="rId19"/>
+                  <a:stretch>
+                    <a:fillRect b="-13333"/>
                   </a:stretch>
                 </a:blipFill>
               </p:spPr>
